--- a/presentation.pptx
+++ b/presentation.pptx
@@ -12186,82 +12186,30 @@
           </a:p>
         </p:txBody>
       </p:sp>
-      <p:sp>
-        <p:nvSpPr>
-          <p:cNvPr id="3" name="TextBox 2"/>
-          <p:cNvSpPr txBox="1"/>
+      <p:pic>
+        <p:nvPicPr>
+          <p:cNvPr id="3" name="Picture 2" descr="decision_framework.png"/>
+          <p:cNvPicPr>
+            <a:picLocks noChangeAspect="1"/>
+          </p:cNvPicPr>
           <p:nvPr/>
-        </p:nvSpPr>
+        </p:nvPicPr>
+        <p:blipFill>
+          <a:blip r:embed="rId2"/>
+          <a:stretch>
+            <a:fillRect/>
+          </a:stretch>
+        </p:blipFill>
         <p:spPr>
           <a:xfrm>
-            <a:off x="457200" y="1188720"/>
-            <a:ext cx="10972800" cy="3200400"/>
+            <a:off x="1371600" y="1097280"/>
+            <a:ext cx="9144000" cy="3200400"/>
           </a:xfrm>
           <a:prstGeom prst="rect">
             <a:avLst/>
           </a:prstGeom>
-          <a:noFill/>
         </p:spPr>
-        <p:txBody>
-          <a:bodyPr wrap="square">
-            <a:spAutoFit/>
-          </a:bodyPr>
-          <a:lstStyle/>
-          <a:p>
-            <a:pPr algn="l">
-              <a:defRPr sz="1300" b="0">
-                <a:solidFill>
-                  <a:srgbClr val="1C2A3A"/>
-                </a:solidFill>
-                <a:latin typeface="Consolas"/>
-              </a:defRPr>
-            </a:pPr>
-            <a:r>
-              <a:t>              Does the task require NEW REASONING SKILLS?</a:t>
-            </a:r>
-            <a:br/>
-            <a:r>
-              <a:t>             /                                           \</a:t>
-            </a:r>
-            <a:br/>
-            <a:r>
-              <a:t>           YES                                           NO</a:t>
-            </a:r>
-            <a:br/>
-            <a:r>
-              <a:t>            |                                             |</a:t>
-            </a:r>
-            <a:br/>
-            <a:r>
-              <a:t>   Does it need                                Does it need</a:t>
-            </a:r>
-            <a:br/>
-            <a:r>
-              <a:t>  FRESH/DYNAMIC data?                        FRESH/DYNAMIC data?</a:t>
-            </a:r>
-            <a:br/>
-            <a:r>
-              <a:t>    /          \                               /          \</a:t>
-            </a:r>
-            <a:br/>
-            <a:r>
-              <a:t>  YES           NO                           YES           NO</a:t>
-            </a:r>
-            <a:br/>
-            <a:r>
-              <a:t>   |             |                            |             |</a:t>
-            </a:r>
-            <a:br/>
-            <a:r>
-              <a:t> HYBRID      FINE-TUNE                       RAG        PROMPT ENG.</a:t>
-            </a:r>
-            <a:br/>
-            <a:r>
-              <a:t>(FT+RAG)    (Best accuracy)               (Dynamic)    (Quick start)</a:t>
-            </a:r>
-          </a:p>
-        </p:txBody>
-      </p:sp>
+      </p:pic>
       <p:sp>
         <p:nvSpPr>
           <p:cNvPr id="4" name="Rectangle 3"/>
@@ -18975,94 +18923,30 @@
           </a:p>
         </p:txBody>
       </p:sp>
-      <p:sp>
-        <p:nvSpPr>
-          <p:cNvPr id="3" name="TextBox 2"/>
-          <p:cNvSpPr txBox="1"/>
+      <p:pic>
+        <p:nvPicPr>
+          <p:cNvPr id="3" name="Picture 2" descr="hybrid_architecture.png"/>
+          <p:cNvPicPr>
+            <a:picLocks noChangeAspect="1"/>
+          </p:cNvPicPr>
           <p:nvPr/>
-        </p:nvSpPr>
+        </p:nvPicPr>
+        <p:blipFill>
+          <a:blip r:embed="rId2"/>
+          <a:stretch>
+            <a:fillRect/>
+          </a:stretch>
+        </p:blipFill>
         <p:spPr>
           <a:xfrm>
-            <a:off x="914400" y="1371600"/>
-            <a:ext cx="4572000" cy="3657600"/>
+            <a:off x="457200" y="1188720"/>
+            <a:ext cx="5943600" cy="4114800"/>
           </a:xfrm>
           <a:prstGeom prst="rect">
             <a:avLst/>
           </a:prstGeom>
-          <a:noFill/>
         </p:spPr>
-        <p:txBody>
-          <a:bodyPr wrap="square">
-            <a:spAutoFit/>
-          </a:bodyPr>
-          <a:lstStyle/>
-          <a:p>
-            <a:pPr algn="l">
-              <a:defRPr sz="1400" b="0">
-                <a:solidFill>
-                  <a:srgbClr val="1C2A3A"/>
-                </a:solidFill>
-                <a:latin typeface="Consolas"/>
-              </a:defRPr>
-            </a:pPr>
-            <a:r>
-              <a:t>  User Question + Financial Table</a:t>
-            </a:r>
-            <a:br/>
-            <a:r>
-              <a:t>         |</a:t>
-            </a:r>
-            <a:br/>
-            <a:r>
-              <a:t>    +----+----+</a:t>
-            </a:r>
-            <a:br/>
-            <a:r>
-              <a:t>    |         |</a:t>
-            </a:r>
-            <a:br/>
-            <a:r>
-              <a:t> [RETRIEVE]  [FINE-TUNED MODEL]</a:t>
-            </a:r>
-            <a:br/>
-            <a:r>
-              <a:t>  from DB     processes table</a:t>
-            </a:r>
-            <a:br/>
-            <a:r>
-              <a:t>    |         |</a:t>
-            </a:r>
-            <a:br/>
-            <a:r>
-              <a:t>    +----+----+</a:t>
-            </a:r>
-            <a:br/>
-            <a:r>
-              <a:t>         |</a:t>
-            </a:r>
-            <a:br/>
-            <a:r>
-              <a:t>  [FINE-TUNED MODEL</a:t>
-            </a:r>
-            <a:br/>
-            <a:r>
-              <a:t>   + Retrieved Context]</a:t>
-            </a:r>
-            <a:br/>
-            <a:r>
-              <a:t>         |</a:t>
-            </a:r>
-            <a:br/>
-            <a:r>
-              <a:t>  Answer with domain reasoning</a:t>
-            </a:r>
-            <a:br/>
-            <a:r>
-              <a:t>  + fresh context + citations</a:t>
-            </a:r>
-          </a:p>
-        </p:txBody>
-      </p:sp>
+      </p:pic>
       <p:sp>
         <p:nvSpPr>
           <p:cNvPr id="4" name="Rectangle 3"/>
@@ -19071,8 +18955,8 @@
         </p:nvSpPr>
         <p:spPr>
           <a:xfrm>
-            <a:off x="6400800" y="1371600"/>
-            <a:ext cx="5029200" cy="1645920"/>
+            <a:off x="6858000" y="1371600"/>
+            <a:ext cx="4846320" cy="1645920"/>
           </a:xfrm>
           <a:prstGeom prst="rect">
             <a:avLst/>
@@ -19149,8 +19033,8 @@
         </p:nvSpPr>
         <p:spPr>
           <a:xfrm>
-            <a:off x="6400800" y="3291840"/>
-            <a:ext cx="5029200" cy="1645920"/>
+            <a:off x="6858000" y="3291840"/>
+            <a:ext cx="4846320" cy="1645920"/>
           </a:xfrm>
           <a:prstGeom prst="rect">
             <a:avLst/>
@@ -40671,82 +40555,30 @@
           </a:p>
         </p:txBody>
       </p:sp>
-      <p:sp>
-        <p:nvSpPr>
-          <p:cNvPr id="3" name="TextBox 2"/>
-          <p:cNvSpPr txBox="1"/>
+      <p:pic>
+        <p:nvPicPr>
+          <p:cNvPr id="3" name="Picture 2" descr="rag_flow.png"/>
+          <p:cNvPicPr>
+            <a:picLocks noChangeAspect="1"/>
+          </p:cNvPicPr>
           <p:nvPr/>
-        </p:nvSpPr>
+        </p:nvPicPr>
+        <p:blipFill>
+          <a:blip r:embed="rId2"/>
+          <a:stretch>
+            <a:fillRect/>
+          </a:stretch>
+        </p:blipFill>
         <p:spPr>
           <a:xfrm>
-            <a:off x="731520" y="1371600"/>
-            <a:ext cx="5486400" cy="3657600"/>
+            <a:off x="457200" y="1188720"/>
+            <a:ext cx="5943600" cy="4389120"/>
           </a:xfrm>
           <a:prstGeom prst="rect">
             <a:avLst/>
           </a:prstGeom>
-          <a:noFill/>
         </p:spPr>
-        <p:txBody>
-          <a:bodyPr wrap="square">
-            <a:spAutoFit/>
-          </a:bodyPr>
-          <a:lstStyle/>
-          <a:p>
-            <a:pPr algn="l">
-              <a:defRPr sz="1400" b="0">
-                <a:solidFill>
-                  <a:srgbClr val="1C2A3A"/>
-                </a:solidFill>
-                <a:latin typeface="Consolas"/>
-              </a:defRPr>
-            </a:pPr>
-            <a:r>
-              <a:t>User Question</a:t>
-            </a:r>
-            <a:br/>
-            <a:r>
-              <a:t>     |</a:t>
-            </a:r>
-            <a:br/>
-            <a:r>
-              <a:t>  [1. EMBED]       Convert question to vector</a:t>
-            </a:r>
-            <a:br/>
-            <a:r>
-              <a:t>     |</a:t>
-            </a:r>
-            <a:br/>
-            <a:r>
-              <a:t>  [2. RETRIEVE]    Search vector DB for similar docs</a:t>
-            </a:r>
-            <a:br/>
-            <a:r>
-              <a:t>     |</a:t>
-            </a:r>
-            <a:br/>
-            <a:r>
-              <a:t>  [3. AUGMENT]     Add retrieved docs to prompt</a:t>
-            </a:r>
-            <a:br/>
-            <a:r>
-              <a:t>     |</a:t>
-            </a:r>
-            <a:br/>
-            <a:r>
-              <a:t>  [4. GENERATE]    LLM generates answer with context</a:t>
-            </a:r>
-            <a:br/>
-            <a:r>
-              <a:t>     |</a:t>
-            </a:r>
-            <a:br/>
-            <a:r>
-              <a:t>  Answer (with source references)</a:t>
-            </a:r>
-          </a:p>
-        </p:txBody>
-      </p:sp>
+      </p:pic>
       <p:sp>
         <p:nvSpPr>
           <p:cNvPr id="4" name="Rectangle 3"/>
@@ -42017,82 +41849,30 @@
           </a:p>
         </p:txBody>
       </p:sp>
-      <p:sp>
-        <p:nvSpPr>
-          <p:cNvPr id="3" name="TextBox 2"/>
-          <p:cNvSpPr txBox="1"/>
+      <p:pic>
+        <p:nvPicPr>
+          <p:cNvPr id="3" name="Picture 2" descr="finetuning_flow.png"/>
+          <p:cNvPicPr>
+            <a:picLocks noChangeAspect="1"/>
+          </p:cNvPicPr>
           <p:nvPr/>
-        </p:nvSpPr>
+        </p:nvPicPr>
+        <p:blipFill>
+          <a:blip r:embed="rId2"/>
+          <a:stretch>
+            <a:fillRect/>
+          </a:stretch>
+        </p:blipFill>
         <p:spPr>
           <a:xfrm>
-            <a:off x="731520" y="1371600"/>
-            <a:ext cx="6400800" cy="3200400"/>
+            <a:off x="457200" y="1188720"/>
+            <a:ext cx="5943600" cy="3200400"/>
           </a:xfrm>
           <a:prstGeom prst="rect">
             <a:avLst/>
           </a:prstGeom>
-          <a:noFill/>
         </p:spPr>
-        <p:txBody>
-          <a:bodyPr wrap="square">
-            <a:spAutoFit/>
-          </a:bodyPr>
-          <a:lstStyle/>
-          <a:p>
-            <a:pPr algn="l">
-              <a:defRPr sz="1400" b="0">
-                <a:solidFill>
-                  <a:srgbClr val="1C2A3A"/>
-                </a:solidFill>
-                <a:latin typeface="Consolas"/>
-              </a:defRPr>
-            </a:pPr>
-            <a:r>
-              <a:t>Domain-Specific Dataset (e.g., 8,000+ financial Q&amp;A pairs)</a:t>
-            </a:r>
-            <a:br/>
-            <a:r>
-              <a:t>     |</a:t>
-            </a:r>
-            <a:br/>
-            <a:r>
-              <a:t>  [1. PREPARE]     Format data as instruction/response pairs</a:t>
-            </a:r>
-            <a:br/>
-            <a:r>
-              <a:t>     |</a:t>
-            </a:r>
-            <a:br/>
-            <a:r>
-              <a:t>  [2. TRAIN]       Update model weights (Full / LoRA / QLoRA)</a:t>
-            </a:r>
-            <a:br/>
-            <a:r>
-              <a:t>     |</a:t>
-            </a:r>
-            <a:br/>
-            <a:r>
-              <a:t>  [3. EVALUATE]    Test on held-out data, measure accuracy</a:t>
-            </a:r>
-            <a:br/>
-            <a:r>
-              <a:t>     |</a:t>
-            </a:r>
-            <a:br/>
-            <a:r>
-              <a:t>  [4. DEPLOY]      Use the specialized model for inference</a:t>
-            </a:r>
-            <a:br/>
-            <a:r>
-              <a:t>     |</a:t>
-            </a:r>
-            <a:br/>
-            <a:r>
-              <a:t>  Model with NEW capabilities</a:t>
-            </a:r>
-          </a:p>
-        </p:txBody>
-      </p:sp>
+      </p:pic>
       <p:sp>
         <p:nvSpPr>
           <p:cNvPr id="4" name="Rectangle 3"/>

--- a/presentation.pptx
+++ b/presentation.pptx
@@ -7100,6 +7100,5580 @@
 </c:chartSpace>
 </file>
 
+<file path=ppt/notesMasters/notesMaster1.xml><?xml version="1.0" encoding="utf-8"?>
+<p:notesMaster xmlns:a="http://schemas.openxmlformats.org/drawingml/2006/main" xmlns:p="http://schemas.openxmlformats.org/presentationml/2006/main" xmlns:r="http://schemas.openxmlformats.org/officeDocument/2006/relationships">
+  <p:cSld>
+    <p:bg>
+      <p:bgRef idx="1001">
+        <a:schemeClr val="bg1"/>
+      </p:bgRef>
+    </p:bg>
+    <p:spTree>
+      <p:nvGrpSpPr>
+        <p:cNvPr id="1" name=""/>
+        <p:cNvGrpSpPr/>
+        <p:nvPr/>
+      </p:nvGrpSpPr>
+      <p:grpSpPr>
+        <a:xfrm>
+          <a:off x="0" y="0"/>
+          <a:ext cx="0" cy="0"/>
+          <a:chOff x="0" y="0"/>
+          <a:chExt cx="0" cy="0"/>
+        </a:xfrm>
+      </p:grpSpPr>
+      <p:sp>
+        <p:nvSpPr>
+          <p:cNvPr id="2" name="Header Placeholder 1"/>
+          <p:cNvSpPr>
+            <a:spLocks noGrp="1"/>
+          </p:cNvSpPr>
+          <p:nvPr>
+            <p:ph type="hdr" sz="quarter"/>
+          </p:nvPr>
+        </p:nvSpPr>
+        <p:spPr>
+          <a:xfrm>
+            <a:off x="0" y="0"/>
+            <a:ext cx="2971800" cy="457200"/>
+          </a:xfrm>
+          <a:prstGeom prst="rect">
+            <a:avLst/>
+          </a:prstGeom>
+        </p:spPr>
+        <p:txBody>
+          <a:bodyPr vert="horz" lIns="91440" tIns="45720" rIns="91440" bIns="45720" rtlCol="0"/>
+          <a:lstStyle>
+            <a:lvl1pPr algn="l">
+              <a:defRPr sz="1200"/>
+            </a:lvl1pPr>
+          </a:lstStyle>
+          <a:p>
+            <a:endParaRPr lang="en-US"/>
+          </a:p>
+        </p:txBody>
+      </p:sp>
+      <p:sp>
+        <p:nvSpPr>
+          <p:cNvPr id="3" name="Date Placeholder 2"/>
+          <p:cNvSpPr>
+            <a:spLocks noGrp="1"/>
+          </p:cNvSpPr>
+          <p:nvPr>
+            <p:ph type="dt" idx="1"/>
+          </p:nvPr>
+        </p:nvSpPr>
+        <p:spPr>
+          <a:xfrm>
+            <a:off x="3884613" y="0"/>
+            <a:ext cx="2971800" cy="457200"/>
+          </a:xfrm>
+          <a:prstGeom prst="rect">
+            <a:avLst/>
+          </a:prstGeom>
+        </p:spPr>
+        <p:txBody>
+          <a:bodyPr vert="horz" lIns="91440" tIns="45720" rIns="91440" bIns="45720" rtlCol="0"/>
+          <a:lstStyle>
+            <a:lvl1pPr algn="r">
+              <a:defRPr sz="1200"/>
+            </a:lvl1pPr>
+          </a:lstStyle>
+          <a:p>
+            <a:fld id="{0F89C1C7-3DCD-1040-A9CF-14679D8B5DDD}" type="datetimeFigureOut">
+              <a:rPr lang="en-US" smtClean="0"/>
+              <a:t>10/17/16</a:t>
+            </a:fld>
+            <a:endParaRPr lang="en-US"/>
+          </a:p>
+        </p:txBody>
+      </p:sp>
+      <p:sp>
+        <p:nvSpPr>
+          <p:cNvPr id="4" name="Slide Image Placeholder 3"/>
+          <p:cNvSpPr>
+            <a:spLocks noGrp="1" noRot="1" noChangeAspect="1"/>
+          </p:cNvSpPr>
+          <p:nvPr>
+            <p:ph type="sldImg" idx="2"/>
+          </p:nvPr>
+        </p:nvSpPr>
+        <p:spPr>
+          <a:xfrm>
+            <a:off x="1143000" y="685800"/>
+            <a:ext cx="4572000" cy="3429000"/>
+          </a:xfrm>
+          <a:prstGeom prst="rect">
+            <a:avLst/>
+          </a:prstGeom>
+          <a:noFill/>
+          <a:ln w="12700">
+            <a:solidFill>
+              <a:prstClr val="black"/>
+            </a:solidFill>
+          </a:ln>
+        </p:spPr>
+        <p:txBody>
+          <a:bodyPr vert="horz" lIns="91440" tIns="45720" rIns="91440" bIns="45720" rtlCol="0" anchor="ctr"/>
+          <a:lstStyle/>
+          <a:p>
+            <a:endParaRPr lang="en-US"/>
+          </a:p>
+        </p:txBody>
+      </p:sp>
+      <p:sp>
+        <p:nvSpPr>
+          <p:cNvPr id="5" name="Notes Placeholder 4"/>
+          <p:cNvSpPr>
+            <a:spLocks noGrp="1"/>
+          </p:cNvSpPr>
+          <p:nvPr>
+            <p:ph type="body" sz="quarter" idx="3"/>
+          </p:nvPr>
+        </p:nvSpPr>
+        <p:spPr>
+          <a:xfrm>
+            <a:off x="685800" y="4343400"/>
+            <a:ext cx="5486400" cy="4114800"/>
+          </a:xfrm>
+          <a:prstGeom prst="rect">
+            <a:avLst/>
+          </a:prstGeom>
+        </p:spPr>
+        <p:txBody>
+          <a:bodyPr vert="horz" lIns="91440" tIns="45720" rIns="91440" bIns="45720" rtlCol="0"/>
+          <a:lstStyle/>
+          <a:p>
+            <a:pPr lvl="0"/>
+            <a:r>
+              <a:rPr lang="en-US" smtClean="0"/>
+              <a:t>Click to edit Master text styles</a:t>
+            </a:r>
+          </a:p>
+          <a:p>
+            <a:pPr lvl="1"/>
+            <a:r>
+              <a:rPr lang="en-US" smtClean="0"/>
+              <a:t>Second level</a:t>
+            </a:r>
+          </a:p>
+          <a:p>
+            <a:pPr lvl="2"/>
+            <a:r>
+              <a:rPr lang="en-US" smtClean="0"/>
+              <a:t>Third level</a:t>
+            </a:r>
+          </a:p>
+          <a:p>
+            <a:pPr lvl="3"/>
+            <a:r>
+              <a:rPr lang="en-US" smtClean="0"/>
+              <a:t>Fourth level</a:t>
+            </a:r>
+          </a:p>
+          <a:p>
+            <a:pPr lvl="4"/>
+            <a:r>
+              <a:rPr lang="en-US" smtClean="0"/>
+              <a:t>Fifth level</a:t>
+            </a:r>
+            <a:endParaRPr lang="en-US"/>
+          </a:p>
+        </p:txBody>
+      </p:sp>
+      <p:sp>
+        <p:nvSpPr>
+          <p:cNvPr id="6" name="Footer Placeholder 5"/>
+          <p:cNvSpPr>
+            <a:spLocks noGrp="1"/>
+          </p:cNvSpPr>
+          <p:nvPr>
+            <p:ph type="ftr" sz="quarter" idx="4"/>
+          </p:nvPr>
+        </p:nvSpPr>
+        <p:spPr>
+          <a:xfrm>
+            <a:off x="0" y="8685213"/>
+            <a:ext cx="2971800" cy="457200"/>
+          </a:xfrm>
+          <a:prstGeom prst="rect">
+            <a:avLst/>
+          </a:prstGeom>
+        </p:spPr>
+        <p:txBody>
+          <a:bodyPr vert="horz" lIns="91440" tIns="45720" rIns="91440" bIns="45720" rtlCol="0" anchor="b"/>
+          <a:lstStyle>
+            <a:lvl1pPr algn="l">
+              <a:defRPr sz="1200"/>
+            </a:lvl1pPr>
+          </a:lstStyle>
+          <a:p>
+            <a:endParaRPr lang="en-US"/>
+          </a:p>
+        </p:txBody>
+      </p:sp>
+      <p:sp>
+        <p:nvSpPr>
+          <p:cNvPr id="7" name="Slide Number Placeholder 6"/>
+          <p:cNvSpPr>
+            <a:spLocks noGrp="1"/>
+          </p:cNvSpPr>
+          <p:nvPr>
+            <p:ph type="sldNum" sz="quarter" idx="5"/>
+          </p:nvPr>
+        </p:nvSpPr>
+        <p:spPr>
+          <a:xfrm>
+            <a:off x="3884613" y="8685213"/>
+            <a:ext cx="2971800" cy="457200"/>
+          </a:xfrm>
+          <a:prstGeom prst="rect">
+            <a:avLst/>
+          </a:prstGeom>
+        </p:spPr>
+        <p:txBody>
+          <a:bodyPr vert="horz" lIns="91440" tIns="45720" rIns="91440" bIns="45720" rtlCol="0" anchor="b"/>
+          <a:lstStyle>
+            <a:lvl1pPr algn="r">
+              <a:defRPr sz="1200"/>
+            </a:lvl1pPr>
+          </a:lstStyle>
+          <a:p>
+            <a:fld id="{BB5E49A5-4136-284D-997B-48E1D791AD67}" type="slidenum">
+              <a:rPr lang="en-US" smtClean="0"/>
+              <a:t>‹#›</a:t>
+            </a:fld>
+            <a:endParaRPr lang="en-US"/>
+          </a:p>
+        </p:txBody>
+      </p:sp>
+    </p:spTree>
+    <p:extLst>
+      <p:ext uri="{BB962C8B-B14F-4D97-AF65-F5344CB8AC3E}">
+        <p14:creationId xmlns:p14="http://schemas.microsoft.com/office/powerpoint/2010/main" val="2623252185"/>
+      </p:ext>
+    </p:extLst>
+  </p:cSld>
+  <p:clrMap bg1="lt1" tx1="dk1" bg2="lt2" tx2="dk2" accent1="accent1" accent2="accent2" accent3="accent3" accent4="accent4" accent5="accent5" accent6="accent6" hlink="hlink" folHlink="folHlink"/>
+  <p:notesStyle>
+    <a:lvl1pPr marL="0" algn="l" defTabSz="457200" rtl="0" eaLnBrk="1" latinLnBrk="0" hangingPunct="1">
+      <a:defRPr sz="1200" kern="1200">
+        <a:solidFill>
+          <a:schemeClr val="tx1"/>
+        </a:solidFill>
+        <a:latin typeface="+mn-lt"/>
+        <a:ea typeface="+mn-ea"/>
+        <a:cs typeface="+mn-cs"/>
+      </a:defRPr>
+    </a:lvl1pPr>
+    <a:lvl2pPr marL="457200" algn="l" defTabSz="457200" rtl="0" eaLnBrk="1" latinLnBrk="0" hangingPunct="1">
+      <a:defRPr sz="1200" kern="1200">
+        <a:solidFill>
+          <a:schemeClr val="tx1"/>
+        </a:solidFill>
+        <a:latin typeface="+mn-lt"/>
+        <a:ea typeface="+mn-ea"/>
+        <a:cs typeface="+mn-cs"/>
+      </a:defRPr>
+    </a:lvl2pPr>
+    <a:lvl3pPr marL="914400" algn="l" defTabSz="457200" rtl="0" eaLnBrk="1" latinLnBrk="0" hangingPunct="1">
+      <a:defRPr sz="1200" kern="1200">
+        <a:solidFill>
+          <a:schemeClr val="tx1"/>
+        </a:solidFill>
+        <a:latin typeface="+mn-lt"/>
+        <a:ea typeface="+mn-ea"/>
+        <a:cs typeface="+mn-cs"/>
+      </a:defRPr>
+    </a:lvl3pPr>
+    <a:lvl4pPr marL="1371600" algn="l" defTabSz="457200" rtl="0" eaLnBrk="1" latinLnBrk="0" hangingPunct="1">
+      <a:defRPr sz="1200" kern="1200">
+        <a:solidFill>
+          <a:schemeClr val="tx1"/>
+        </a:solidFill>
+        <a:latin typeface="+mn-lt"/>
+        <a:ea typeface="+mn-ea"/>
+        <a:cs typeface="+mn-cs"/>
+      </a:defRPr>
+    </a:lvl4pPr>
+    <a:lvl5pPr marL="1828800" algn="l" defTabSz="457200" rtl="0" eaLnBrk="1" latinLnBrk="0" hangingPunct="1">
+      <a:defRPr sz="1200" kern="1200">
+        <a:solidFill>
+          <a:schemeClr val="tx1"/>
+        </a:solidFill>
+        <a:latin typeface="+mn-lt"/>
+        <a:ea typeface="+mn-ea"/>
+        <a:cs typeface="+mn-cs"/>
+      </a:defRPr>
+    </a:lvl5pPr>
+    <a:lvl6pPr marL="2286000" algn="l" defTabSz="457200" rtl="0" eaLnBrk="1" latinLnBrk="0" hangingPunct="1">
+      <a:defRPr sz="1200" kern="1200">
+        <a:solidFill>
+          <a:schemeClr val="tx1"/>
+        </a:solidFill>
+        <a:latin typeface="+mn-lt"/>
+        <a:ea typeface="+mn-ea"/>
+        <a:cs typeface="+mn-cs"/>
+      </a:defRPr>
+    </a:lvl6pPr>
+    <a:lvl7pPr marL="2743200" algn="l" defTabSz="457200" rtl="0" eaLnBrk="1" latinLnBrk="0" hangingPunct="1">
+      <a:defRPr sz="1200" kern="1200">
+        <a:solidFill>
+          <a:schemeClr val="tx1"/>
+        </a:solidFill>
+        <a:latin typeface="+mn-lt"/>
+        <a:ea typeface="+mn-ea"/>
+        <a:cs typeface="+mn-cs"/>
+      </a:defRPr>
+    </a:lvl7pPr>
+    <a:lvl8pPr marL="3200400" algn="l" defTabSz="457200" rtl="0" eaLnBrk="1" latinLnBrk="0" hangingPunct="1">
+      <a:defRPr sz="1200" kern="1200">
+        <a:solidFill>
+          <a:schemeClr val="tx1"/>
+        </a:solidFill>
+        <a:latin typeface="+mn-lt"/>
+        <a:ea typeface="+mn-ea"/>
+        <a:cs typeface="+mn-cs"/>
+      </a:defRPr>
+    </a:lvl8pPr>
+    <a:lvl9pPr marL="3657600" algn="l" defTabSz="457200" rtl="0" eaLnBrk="1" latinLnBrk="0" hangingPunct="1">
+      <a:defRPr sz="1200" kern="1200">
+        <a:solidFill>
+          <a:schemeClr val="tx1"/>
+        </a:solidFill>
+        <a:latin typeface="+mn-lt"/>
+        <a:ea typeface="+mn-ea"/>
+        <a:cs typeface="+mn-cs"/>
+      </a:defRPr>
+    </a:lvl9pPr>
+  </p:notesStyle>
+</p:notesMaster>
+</file>
+
+<file path=ppt/notesSlides/notesSlide1.xml><?xml version="1.0" encoding="utf-8"?>
+<p:notes xmlns:a="http://schemas.openxmlformats.org/drawingml/2006/main" xmlns:p="http://schemas.openxmlformats.org/presentationml/2006/main" xmlns:r="http://schemas.openxmlformats.org/officeDocument/2006/relationships">
+  <p:cSld>
+    <p:spTree>
+      <p:nvGrpSpPr>
+        <p:cNvPr id="1" name=""/>
+        <p:cNvGrpSpPr/>
+        <p:nvPr/>
+      </p:nvGrpSpPr>
+      <p:grpSpPr>
+        <a:xfrm>
+          <a:off x="0" y="0"/>
+          <a:ext cx="0" cy="0"/>
+          <a:chOff x="0" y="0"/>
+          <a:chExt cx="0" cy="0"/>
+        </a:xfrm>
+      </p:grpSpPr>
+      <p:sp>
+        <p:nvSpPr>
+          <p:cNvPr id="2" name="Slide Image Placeholder 1"/>
+          <p:cNvSpPr>
+            <a:spLocks noGrp="1"/>
+          </p:cNvSpPr>
+          <p:nvPr>
+            <p:ph type="sldImg" idx="2"/>
+          </p:nvPr>
+        </p:nvSpPr>
+        <p:spPr/>
+      </p:sp>
+      <p:sp>
+        <p:nvSpPr>
+          <p:cNvPr id="3" name="Notes Placeholder 2"/>
+          <p:cNvSpPr>
+            <a:spLocks noGrp="1"/>
+          </p:cNvSpPr>
+          <p:nvPr>
+            <p:ph type="body" idx="3" sz="quarter"/>
+          </p:nvPr>
+        </p:nvSpPr>
+        <p:spPr/>
+        <p:txBody>
+          <a:bodyPr/>
+          <a:lstStyle/>
+          <a:p>
+            <a:r>
+              <a:t>Welcome everyone. Today we're exploring LLM Fine-Tuning and how to maximize AI performance for specialized tasks.</a:t>
+            </a:r>
+          </a:p>
+          <a:p/>
+          <a:p>
+            <a:r>
+              <a:t>We'll compare three approaches: Fine-Tuning, RAG (Retrieval-Augmented Generation), and Hybrid systems. No deep technical background is required — we'll build up concepts step by step, then see them in action with a live demo.</a:t>
+            </a:r>
+          </a:p>
+          <a:p/>
+          <a:p>
+            <a:r>
+              <a:t>Key quote to frame the talk: "Fine-tuning teaches a model new skills. RAG gives it new information. Knowing the difference is the key to building effective AI systems."</a:t>
+            </a:r>
+          </a:p>
+        </p:txBody>
+      </p:sp>
+      <p:sp>
+        <p:nvSpPr>
+          <p:cNvPr id="4" name="Slide Number Placeholder 3"/>
+          <p:cNvSpPr>
+            <a:spLocks noGrp="1"/>
+          </p:cNvSpPr>
+          <p:nvPr>
+            <p:ph type="sldNum" idx="5" sz="quarter"/>
+          </p:nvPr>
+        </p:nvSpPr>
+        <p:spPr/>
+      </p:sp>
+    </p:spTree>
+  </p:cSld>
+  <p:clrMapOvr>
+    <a:masterClrMapping/>
+  </p:clrMapOvr>
+</p:notes>
+</file>
+
+<file path=ppt/notesSlides/notesSlide10.xml><?xml version="1.0" encoding="utf-8"?>
+<p:notes xmlns:a="http://schemas.openxmlformats.org/drawingml/2006/main" xmlns:p="http://schemas.openxmlformats.org/presentationml/2006/main" xmlns:r="http://schemas.openxmlformats.org/officeDocument/2006/relationships">
+  <p:cSld>
+    <p:spTree>
+      <p:nvGrpSpPr>
+        <p:cNvPr id="1" name=""/>
+        <p:cNvGrpSpPr/>
+        <p:nvPr/>
+      </p:nvGrpSpPr>
+      <p:grpSpPr>
+        <a:xfrm>
+          <a:off x="0" y="0"/>
+          <a:ext cx="0" cy="0"/>
+          <a:chOff x="0" y="0"/>
+          <a:chExt cx="0" cy="0"/>
+        </a:xfrm>
+      </p:grpSpPr>
+      <p:sp>
+        <p:nvSpPr>
+          <p:cNvPr id="2" name="Slide Image Placeholder 1"/>
+          <p:cNvSpPr>
+            <a:spLocks noGrp="1"/>
+          </p:cNvSpPr>
+          <p:nvPr>
+            <p:ph type="sldImg" idx="2"/>
+          </p:nvPr>
+        </p:nvSpPr>
+        <p:spPr/>
+      </p:sp>
+      <p:sp>
+        <p:nvSpPr>
+          <p:cNvPr id="3" name="Notes Placeholder 2"/>
+          <p:cNvSpPr>
+            <a:spLocks noGrp="1"/>
+          </p:cNvSpPr>
+          <p:nvPr>
+            <p:ph type="body" idx="3" sz="quarter"/>
+          </p:nvPr>
+        </p:nvSpPr>
+        <p:spPr/>
+        <p:txBody>
+          <a:bodyPr/>
+          <a:lstStyle/>
+          <a:p>
+            <a:r>
+              <a:t>There are three main fine-tuning methods, each with different trade-offs.</a:t>
+            </a:r>
+          </a:p>
+          <a:p/>
+          <a:p>
+            <a:r>
+              <a:t>Full Fine-Tuning updates ALL parameters — maximum learning capacity but requires significant GPU memory. Think $$$. </a:t>
+            </a:r>
+          </a:p>
+          <a:p/>
+          <a:p>
+            <a:r>
+              <a:t>LoRA (Low-Rank Adaptation) adds small adapter layers while freezing original weights. This uses 10-100x less memory and achieves near full fine-tuning quality. Cost: $$.</a:t>
+            </a:r>
+          </a:p>
+          <a:p/>
+          <a:p>
+            <a:r>
+              <a:t>QLoRA combines LoRA with 4-bit quantization. It runs on consumer GPUs with minimal quality loss. This is the most accessible method. Cost: $.</a:t>
+            </a:r>
+          </a:p>
+          <a:p/>
+          <a:p>
+            <a:r>
+              <a:t>Practical tip: start with QLoRA for rapid experimentation, then scale to LoRA or full fine-tuning once you've validated the approach works.</a:t>
+            </a:r>
+          </a:p>
+        </p:txBody>
+      </p:sp>
+      <p:sp>
+        <p:nvSpPr>
+          <p:cNvPr id="4" name="Slide Number Placeholder 3"/>
+          <p:cNvSpPr>
+            <a:spLocks noGrp="1"/>
+          </p:cNvSpPr>
+          <p:nvPr>
+            <p:ph type="sldNum" idx="5" sz="quarter"/>
+          </p:nvPr>
+        </p:nvSpPr>
+        <p:spPr/>
+      </p:sp>
+    </p:spTree>
+  </p:cSld>
+  <p:clrMapOvr>
+    <a:masterClrMapping/>
+  </p:clrMapOvr>
+</p:notes>
+</file>
+
+<file path=ppt/notesSlides/notesSlide11.xml><?xml version="1.0" encoding="utf-8"?>
+<p:notes xmlns:a="http://schemas.openxmlformats.org/drawingml/2006/main" xmlns:p="http://schemas.openxmlformats.org/presentationml/2006/main" xmlns:r="http://schemas.openxmlformats.org/officeDocument/2006/relationships">
+  <p:cSld>
+    <p:spTree>
+      <p:nvGrpSpPr>
+        <p:cNvPr id="1" name=""/>
+        <p:cNvGrpSpPr/>
+        <p:nvPr/>
+      </p:nvGrpSpPr>
+      <p:grpSpPr>
+        <a:xfrm>
+          <a:off x="0" y="0"/>
+          <a:ext cx="0" cy="0"/>
+          <a:chOff x="0" y="0"/>
+          <a:chExt cx="0" cy="0"/>
+        </a:xfrm>
+      </p:grpSpPr>
+      <p:sp>
+        <p:nvSpPr>
+          <p:cNvPr id="2" name="Slide Image Placeholder 1"/>
+          <p:cNvSpPr>
+            <a:spLocks noGrp="1"/>
+          </p:cNvSpPr>
+          <p:nvPr>
+            <p:ph type="sldImg" idx="2"/>
+          </p:nvPr>
+        </p:nvSpPr>
+        <p:spPr/>
+      </p:sp>
+      <p:sp>
+        <p:nvSpPr>
+          <p:cNvPr id="3" name="Notes Placeholder 2"/>
+          <p:cNvSpPr>
+            <a:spLocks noGrp="1"/>
+          </p:cNvSpPr>
+          <p:nvPr>
+            <p:ph type="body" idx="3" sz="quarter"/>
+          </p:nvPr>
+        </p:nvSpPr>
+        <p:spPr/>
+        <p:txBody>
+          <a:bodyPr/>
+          <a:lstStyle/>
+          <a:p>
+            <a:r>
+              <a:t>Here are the concrete benefits we've measured:</a:t>
+            </a:r>
+          </a:p>
+          <a:p/>
+          <a:p>
+            <a:r>
+              <a:t>Improved accuracy — 61.2% on FinQA vs just 15.3% for RAG. That's a 4x improvement.</a:t>
+            </a:r>
+          </a:p>
+          <a:p/>
+          <a:p>
+            <a:r>
+              <a:t>Learned computation — the model performs multi-step calculations, not just formula retrieval.</a:t>
+            </a:r>
+          </a:p>
+          <a:p/>
+          <a:p>
+            <a:r>
+              <a:t>Consistent output — 98% format consistency vs 65% for RAG.</a:t>
+            </a:r>
+          </a:p>
+          <a:p/>
+          <a:p>
+            <a:r>
+              <a:t>Lower latency — approximately 200ms vs 800ms for RAG, since there's no retrieval step.</a:t>
+            </a:r>
+          </a:p>
+          <a:p/>
+          <a:p>
+            <a:r>
+              <a:t>Customizable behavior — you control tone, format, and reasoning style through training data.</a:t>
+            </a:r>
+          </a:p>
+          <a:p/>
+          <a:p>
+            <a:r>
+              <a:t>And it adapts to YOUR unique data — the model learns your domain's patterns and edge cases.</a:t>
+            </a:r>
+          </a:p>
+        </p:txBody>
+      </p:sp>
+      <p:sp>
+        <p:nvSpPr>
+          <p:cNvPr id="4" name="Slide Number Placeholder 3"/>
+          <p:cNvSpPr>
+            <a:spLocks noGrp="1"/>
+          </p:cNvSpPr>
+          <p:nvPr>
+            <p:ph type="sldNum" idx="5" sz="quarter"/>
+          </p:nvPr>
+        </p:nvSpPr>
+        <p:spPr/>
+      </p:sp>
+    </p:spTree>
+  </p:cSld>
+  <p:clrMapOvr>
+    <a:masterClrMapping/>
+  </p:clrMapOvr>
+</p:notes>
+</file>
+
+<file path=ppt/notesSlides/notesSlide12.xml><?xml version="1.0" encoding="utf-8"?>
+<p:notes xmlns:a="http://schemas.openxmlformats.org/drawingml/2006/main" xmlns:p="http://schemas.openxmlformats.org/presentationml/2006/main" xmlns:r="http://schemas.openxmlformats.org/officeDocument/2006/relationships">
+  <p:cSld>
+    <p:spTree>
+      <p:nvGrpSpPr>
+        <p:cNvPr id="1" name=""/>
+        <p:cNvGrpSpPr/>
+        <p:nvPr/>
+      </p:nvGrpSpPr>
+      <p:grpSpPr>
+        <a:xfrm>
+          <a:off x="0" y="0"/>
+          <a:ext cx="0" cy="0"/>
+          <a:chOff x="0" y="0"/>
+          <a:chExt cx="0" cy="0"/>
+        </a:xfrm>
+      </p:grpSpPr>
+      <p:sp>
+        <p:nvSpPr>
+          <p:cNvPr id="2" name="Slide Image Placeholder 1"/>
+          <p:cNvSpPr>
+            <a:spLocks noGrp="1"/>
+          </p:cNvSpPr>
+          <p:nvPr>
+            <p:ph type="sldImg" idx="2"/>
+          </p:nvPr>
+        </p:nvSpPr>
+        <p:spPr/>
+      </p:sp>
+      <p:sp>
+        <p:nvSpPr>
+          <p:cNvPr id="3" name="Notes Placeholder 2"/>
+          <p:cNvSpPr>
+            <a:spLocks noGrp="1"/>
+          </p:cNvSpPr>
+          <p:nvPr>
+            <p:ph type="body" idx="3" sz="quarter"/>
+          </p:nvPr>
+        </p:nvSpPr>
+        <p:spPr/>
+        <p:txBody>
+          <a:bodyPr/>
+          <a:lstStyle/>
+          <a:p>
+            <a:r>
+              <a:t>Let me walk you through the actual models we used in our benchmarks. These are real, published models with real training data.</a:t>
+            </a:r>
+          </a:p>
+          <a:p/>
+          <a:p>
+            <a:r>
+              <a:t>FinBERT is built on BERT-base-uncased with 110M parameters, created by Prosus AI. It does 3-class sentiment analysis — positive, negative, neutral — and was trained on the Financial PhraseBank dataset of 4,840 expert-annotated sentences.</a:t>
+            </a:r>
+          </a:p>
+          <a:p/>
+          <a:p>
+            <a:r>
+              <a:t>FinQA-7B is built on Meta's Llama2-7B, fine-tuned by a community contributor using QLoRA on the FinQA dataset — 8,281 question-answer pairs derived from SEC filings.</a:t>
+            </a:r>
+          </a:p>
+          <a:p/>
+          <a:p>
+            <a:r>
+              <a:t>The training data is rigorous: Financial PhraseBank has 16 expert annotators from Aalto University, and FinQA comes from IBM Research with step-by-step reasoning programs from S&amp;P 500 filings.</a:t>
+            </a:r>
+          </a:p>
+        </p:txBody>
+      </p:sp>
+      <p:sp>
+        <p:nvSpPr>
+          <p:cNvPr id="4" name="Slide Number Placeholder 3"/>
+          <p:cNvSpPr>
+            <a:spLocks noGrp="1"/>
+          </p:cNvSpPr>
+          <p:nvPr>
+            <p:ph type="sldNum" idx="5" sz="quarter"/>
+          </p:nvPr>
+        </p:nvSpPr>
+        <p:spPr/>
+      </p:sp>
+    </p:spTree>
+  </p:cSld>
+  <p:clrMapOvr>
+    <a:masterClrMapping/>
+  </p:clrMapOvr>
+</p:notes>
+</file>
+
+<file path=ppt/notesSlides/notesSlide13.xml><?xml version="1.0" encoding="utf-8"?>
+<p:notes xmlns:a="http://schemas.openxmlformats.org/drawingml/2006/main" xmlns:p="http://schemas.openxmlformats.org/presentationml/2006/main" xmlns:r="http://schemas.openxmlformats.org/officeDocument/2006/relationships">
+  <p:cSld>
+    <p:spTree>
+      <p:nvGrpSpPr>
+        <p:cNvPr id="1" name=""/>
+        <p:cNvGrpSpPr/>
+        <p:nvPr/>
+      </p:nvGrpSpPr>
+      <p:grpSpPr>
+        <a:xfrm>
+          <a:off x="0" y="0"/>
+          <a:ext cx="0" cy="0"/>
+          <a:chOff x="0" y="0"/>
+          <a:chExt cx="0" cy="0"/>
+        </a:xfrm>
+      </p:grpSpPr>
+      <p:sp>
+        <p:nvSpPr>
+          <p:cNvPr id="2" name="Slide Image Placeholder 1"/>
+          <p:cNvSpPr>
+            <a:spLocks noGrp="1"/>
+          </p:cNvSpPr>
+          <p:nvPr>
+            <p:ph type="sldImg" idx="2"/>
+          </p:nvPr>
+        </p:nvSpPr>
+        <p:spPr/>
+      </p:sp>
+      <p:sp>
+        <p:nvSpPr>
+          <p:cNvPr id="3" name="Notes Placeholder 2"/>
+          <p:cNvSpPr>
+            <a:spLocks noGrp="1"/>
+          </p:cNvSpPr>
+          <p:nvPr>
+            <p:ph type="body" idx="3" sz="quarter"/>
+          </p:nvPr>
+        </p:nvSpPr>
+        <p:spPr/>
+        <p:txBody>
+          <a:bodyPr/>
+          <a:lstStyle/>
+          <a:p>
+            <a:r>
+              <a:t>Our third model is a DistilBERT fine-tuned for spam and phishing detection.</a:t>
+            </a:r>
+          </a:p>
+          <a:p/>
+          <a:p>
+            <a:r>
+              <a:t>DistilBERT is 40% smaller and 60% faster than BERT-base while retaining 97% of its language understanding. At just 66M parameters, it's ideal for high-throughput tasks like email filtering.</a:t>
+            </a:r>
+          </a:p>
+          <a:p/>
+          <a:p>
+            <a:r>
+              <a:t>The training data includes phishing emails, lottery scams, Nigerian prince scams, work-from-home spam, and legitimate business emails.</a:t>
+            </a:r>
+          </a:p>
+          <a:p/>
+          <a:p>
+            <a:r>
+              <a:t>Why DistilBERT for spam? It's small enough to run fast on CPU. Fine-tuning teaches it that urgency + verification + deadline = phishing — a reasoning pattern that RAG can't learn, since RAG can only retrieve similar-looking emails and may confuse a pharmacy notification with medication spam.</a:t>
+            </a:r>
+          </a:p>
+          <a:p/>
+          <a:p>
+            <a:r>
+              <a:t>Result: 95% accuracy fine-tuned vs 90% RAG vs 85% base.</a:t>
+            </a:r>
+          </a:p>
+        </p:txBody>
+      </p:sp>
+      <p:sp>
+        <p:nvSpPr>
+          <p:cNvPr id="4" name="Slide Number Placeholder 3"/>
+          <p:cNvSpPr>
+            <a:spLocks noGrp="1"/>
+          </p:cNvSpPr>
+          <p:nvPr>
+            <p:ph type="sldNum" idx="5" sz="quarter"/>
+          </p:nvPr>
+        </p:nvSpPr>
+        <p:spPr/>
+      </p:sp>
+    </p:spTree>
+  </p:cSld>
+  <p:clrMapOvr>
+    <a:masterClrMapping/>
+  </p:clrMapOvr>
+</p:notes>
+</file>
+
+<file path=ppt/notesSlides/notesSlide14.xml><?xml version="1.0" encoding="utf-8"?>
+<p:notes xmlns:a="http://schemas.openxmlformats.org/drawingml/2006/main" xmlns:p="http://schemas.openxmlformats.org/presentationml/2006/main" xmlns:r="http://schemas.openxmlformats.org/officeDocument/2006/relationships">
+  <p:cSld>
+    <p:spTree>
+      <p:nvGrpSpPr>
+        <p:cNvPr id="1" name=""/>
+        <p:cNvGrpSpPr/>
+        <p:nvPr/>
+      </p:nvGrpSpPr>
+      <p:grpSpPr>
+        <a:xfrm>
+          <a:off x="0" y="0"/>
+          <a:ext cx="0" cy="0"/>
+          <a:chOff x="0" y="0"/>
+          <a:chExt cx="0" cy="0"/>
+        </a:xfrm>
+      </p:grpSpPr>
+      <p:sp>
+        <p:nvSpPr>
+          <p:cNvPr id="2" name="Slide Image Placeholder 1"/>
+          <p:cNvSpPr>
+            <a:spLocks noGrp="1"/>
+          </p:cNvSpPr>
+          <p:nvPr>
+            <p:ph type="sldImg" idx="2"/>
+          </p:nvPr>
+        </p:nvSpPr>
+        <p:spPr/>
+      </p:sp>
+      <p:sp>
+        <p:nvSpPr>
+          <p:cNvPr id="3" name="Notes Placeholder 2"/>
+          <p:cNvSpPr>
+            <a:spLocks noGrp="1"/>
+          </p:cNvSpPr>
+          <p:nvPr>
+            <p:ph type="body" idx="3" sz="quarter"/>
+          </p:nvPr>
+        </p:nvSpPr>
+        <p:spPr/>
+        <p:txBody>
+          <a:bodyPr/>
+          <a:lstStyle/>
+          <a:p>
+            <a:r>
+              <a:t>Let's look at what the actual training data looks like — this makes fine-tuning concrete.</a:t>
+            </a:r>
+          </a:p>
+          <a:p/>
+          <a:p>
+            <a:r>
+              <a:t>For FinQA (numerical reasoning): the model receives a financial table and a question. The training label isn't just the answer — it includes the complete reasoning chain. Add these numbers, subtract those, divide — the model learns the STEPS, not just the final number.</a:t>
+            </a:r>
+          </a:p>
+          <a:p/>
+          <a:p>
+            <a:r>
+              <a:t>For Financial PhraseBank (sentiment): each example is a sentence with a label and the reasoning. "Operating profit rose" — the word "rose" plus growth numbers equals positive. "Headwinds to persist" — financial jargon that means challenges. "Maintained quarterly dividend" — no change, so neutral.</a:t>
+            </a:r>
+          </a:p>
+          <a:p/>
+          <a:p>
+            <a:r>
+              <a:t>This is what makes fine-tuning powerful: the model internalizes these domain reasoning patterns.</a:t>
+            </a:r>
+          </a:p>
+        </p:txBody>
+      </p:sp>
+      <p:sp>
+        <p:nvSpPr>
+          <p:cNvPr id="4" name="Slide Number Placeholder 3"/>
+          <p:cNvSpPr>
+            <a:spLocks noGrp="1"/>
+          </p:cNvSpPr>
+          <p:nvPr>
+            <p:ph type="sldNum" idx="5" sz="quarter"/>
+          </p:nvPr>
+        </p:nvSpPr>
+        <p:spPr/>
+      </p:sp>
+    </p:spTree>
+  </p:cSld>
+  <p:clrMapOvr>
+    <a:masterClrMapping/>
+  </p:clrMapOvr>
+</p:notes>
+</file>
+
+<file path=ppt/notesSlides/notesSlide15.xml><?xml version="1.0" encoding="utf-8"?>
+<p:notes xmlns:a="http://schemas.openxmlformats.org/drawingml/2006/main" xmlns:p="http://schemas.openxmlformats.org/presentationml/2006/main" xmlns:r="http://schemas.openxmlformats.org/officeDocument/2006/relationships">
+  <p:cSld>
+    <p:spTree>
+      <p:nvGrpSpPr>
+        <p:cNvPr id="1" name=""/>
+        <p:cNvGrpSpPr/>
+        <p:nvPr/>
+      </p:nvGrpSpPr>
+      <p:grpSpPr>
+        <a:xfrm>
+          <a:off x="0" y="0"/>
+          <a:ext cx="0" cy="0"/>
+          <a:chOff x="0" y="0"/>
+          <a:chExt cx="0" cy="0"/>
+        </a:xfrm>
+      </p:grpSpPr>
+      <p:sp>
+        <p:nvSpPr>
+          <p:cNvPr id="2" name="Slide Image Placeholder 1"/>
+          <p:cNvSpPr>
+            <a:spLocks noGrp="1"/>
+          </p:cNvSpPr>
+          <p:nvPr>
+            <p:ph type="sldImg" idx="2"/>
+          </p:nvPr>
+        </p:nvSpPr>
+        <p:spPr/>
+      </p:sp>
+      <p:sp>
+        <p:nvSpPr>
+          <p:cNvPr id="3" name="Notes Placeholder 2"/>
+          <p:cNvSpPr>
+            <a:spLocks noGrp="1"/>
+          </p:cNvSpPr>
+          <p:nvPr>
+            <p:ph type="body" idx="3" sz="quarter"/>
+          </p:nvPr>
+        </p:nvSpPr>
+        <p:spPr/>
+        <p:txBody>
+          <a:bodyPr/>
+          <a:lstStyle/>
+          <a:p>
+            <a:r>
+              <a:t>This is the head-to-head comparison table. Let me highlight the key contrasts.</a:t>
+            </a:r>
+          </a:p>
+          <a:p/>
+          <a:p>
+            <a:r>
+              <a:t>RAG provides external, retrieved knowledge. Fine-tuning provides internal, learned knowledge. Hybrid gives both.</a:t>
+            </a:r>
+          </a:p>
+          <a:p/>
+          <a:p>
+            <a:r>
+              <a:t>Crucially, RAG does NOT teach new skills. Fine-tuning does.</a:t>
+            </a:r>
+          </a:p>
+          <a:p/>
+          <a:p>
+            <a:r>
+              <a:t>Look at the accuracy numbers: RAG achieves 15-40% on domain tasks, fine-tuning reaches 60-95%, and hybrid can go even higher.</a:t>
+            </a:r>
+          </a:p>
+          <a:p/>
+          <a:p>
+            <a:r>
+              <a:t>Output consistency is 65% for RAG vs 98% for fine-tuning. Inference latency is ~800ms for RAG vs ~200ms for fine-tuning.</a:t>
+            </a:r>
+          </a:p>
+          <a:p/>
+          <a:p>
+            <a:r>
+              <a:t>But RAG has advantages too: source citations and the ability to handle fresh data without retraining.</a:t>
+            </a:r>
+          </a:p>
+          <a:p/>
+          <a:p>
+            <a:r>
+              <a:t>Key insight: RAG and Fine-Tuning are complementary, not competing. The best solution often combines both.</a:t>
+            </a:r>
+          </a:p>
+        </p:txBody>
+      </p:sp>
+      <p:sp>
+        <p:nvSpPr>
+          <p:cNvPr id="4" name="Slide Number Placeholder 3"/>
+          <p:cNvSpPr>
+            <a:spLocks noGrp="1"/>
+          </p:cNvSpPr>
+          <p:nvPr>
+            <p:ph type="sldNum" idx="5" sz="quarter"/>
+          </p:nvPr>
+        </p:nvSpPr>
+        <p:spPr/>
+      </p:sp>
+    </p:spTree>
+  </p:cSld>
+  <p:clrMapOvr>
+    <a:masterClrMapping/>
+  </p:clrMapOvr>
+</p:notes>
+</file>
+
+<file path=ppt/notesSlides/notesSlide16.xml><?xml version="1.0" encoding="utf-8"?>
+<p:notes xmlns:a="http://schemas.openxmlformats.org/drawingml/2006/main" xmlns:p="http://schemas.openxmlformats.org/presentationml/2006/main" xmlns:r="http://schemas.openxmlformats.org/officeDocument/2006/relationships">
+  <p:cSld>
+    <p:spTree>
+      <p:nvGrpSpPr>
+        <p:cNvPr id="1" name=""/>
+        <p:cNvGrpSpPr/>
+        <p:nvPr/>
+      </p:nvGrpSpPr>
+      <p:grpSpPr>
+        <a:xfrm>
+          <a:off x="0" y="0"/>
+          <a:ext cx="0" cy="0"/>
+          <a:chOff x="0" y="0"/>
+          <a:chExt cx="0" cy="0"/>
+        </a:xfrm>
+      </p:grpSpPr>
+      <p:sp>
+        <p:nvSpPr>
+          <p:cNvPr id="2" name="Slide Image Placeholder 1"/>
+          <p:cNvSpPr>
+            <a:spLocks noGrp="1"/>
+          </p:cNvSpPr>
+          <p:nvPr>
+            <p:ph type="sldImg" idx="2"/>
+          </p:nvPr>
+        </p:nvSpPr>
+        <p:spPr/>
+      </p:sp>
+      <p:sp>
+        <p:nvSpPr>
+          <p:cNvPr id="3" name="Notes Placeholder 2"/>
+          <p:cNvSpPr>
+            <a:spLocks noGrp="1"/>
+          </p:cNvSpPr>
+          <p:nvPr>
+            <p:ph type="body" idx="3" sz="quarter"/>
+          </p:nvPr>
+        </p:nvSpPr>
+        <p:spPr/>
+        <p:txBody>
+          <a:bodyPr/>
+          <a:lstStyle/>
+          <a:p>
+            <a:r>
+              <a:t>Let me show you real examples where RAG falls short.</a:t>
+            </a:r>
+          </a:p>
+          <a:p/>
+          <a:p>
+            <a:r>
+              <a:t>Example 1 — Financial Calculation: RAG retrieves the revenue growth formula but gives a vague answer like "revenue appears to have grown." The fine-tuned model performs step-by-step calculation and returns "2.45%."</a:t>
+            </a:r>
+          </a:p>
+          <a:p/>
+          <a:p>
+            <a:r>
+              <a:t>Example 2 — Sentiment: RAG misclassifies "management expects headwinds to persist" as unclear/neutral. FinBERT correctly identifies it as NEGATIVE with 91% confidence because it understands "headwinds" is financial jargon for challenges.</a:t>
+            </a:r>
+          </a:p>
+          <a:p/>
+          <a:p>
+            <a:r>
+              <a:t>Example 3 — Spam Detection: RAG retrieves medication-spam examples for "your prescription is ready for pickup at Walgreens" and votes SPAM — a false positive. The fine-tuned DistilBERT correctly classifies it as HAM with 99% confidence because it learned that pharmacy pickups lack phishing cues.</a:t>
+            </a:r>
+          </a:p>
+        </p:txBody>
+      </p:sp>
+      <p:sp>
+        <p:nvSpPr>
+          <p:cNvPr id="4" name="Slide Number Placeholder 3"/>
+          <p:cNvSpPr>
+            <a:spLocks noGrp="1"/>
+          </p:cNvSpPr>
+          <p:nvPr>
+            <p:ph type="sldNum" idx="5" sz="quarter"/>
+          </p:nvPr>
+        </p:nvSpPr>
+        <p:spPr/>
+      </p:sp>
+    </p:spTree>
+  </p:cSld>
+  <p:clrMapOvr>
+    <a:masterClrMapping/>
+  </p:clrMapOvr>
+</p:notes>
+</file>
+
+<file path=ppt/notesSlides/notesSlide17.xml><?xml version="1.0" encoding="utf-8"?>
+<p:notes xmlns:a="http://schemas.openxmlformats.org/drawingml/2006/main" xmlns:p="http://schemas.openxmlformats.org/presentationml/2006/main" xmlns:r="http://schemas.openxmlformats.org/officeDocument/2006/relationships">
+  <p:cSld>
+    <p:spTree>
+      <p:nvGrpSpPr>
+        <p:cNvPr id="1" name=""/>
+        <p:cNvGrpSpPr/>
+        <p:nvPr/>
+      </p:nvGrpSpPr>
+      <p:grpSpPr>
+        <a:xfrm>
+          <a:off x="0" y="0"/>
+          <a:ext cx="0" cy="0"/>
+          <a:chOff x="0" y="0"/>
+          <a:chExt cx="0" cy="0"/>
+        </a:xfrm>
+      </p:grpSpPr>
+      <p:sp>
+        <p:nvSpPr>
+          <p:cNvPr id="2" name="Slide Image Placeholder 1"/>
+          <p:cNvSpPr>
+            <a:spLocks noGrp="1"/>
+          </p:cNvSpPr>
+          <p:nvPr>
+            <p:ph type="sldImg" idx="2"/>
+          </p:nvPr>
+        </p:nvSpPr>
+        <p:spPr/>
+      </p:sp>
+      <p:sp>
+        <p:nvSpPr>
+          <p:cNvPr id="3" name="Notes Placeholder 2"/>
+          <p:cNvSpPr>
+            <a:spLocks noGrp="1"/>
+          </p:cNvSpPr>
+          <p:nvPr>
+            <p:ph type="body" idx="3" sz="quarter"/>
+          </p:nvPr>
+        </p:nvSpPr>
+        <p:spPr/>
+        <p:txBody>
+          <a:bodyPr/>
+          <a:lstStyle/>
+          <a:p>
+            <a:r>
+              <a:t>This is your decision framework — use this diagram to guide your choice.</a:t>
+            </a:r>
+          </a:p>
+          <a:p/>
+          <a:p>
+            <a:r>
+              <a:t>Choose RAG when: data changes frequently, you need source citations, you have no training data, or you need quick deployment.</a:t>
+            </a:r>
+          </a:p>
+          <a:p/>
+          <a:p>
+            <a:r>
+              <a:t>Choose Fine-Tuning when: specialized skills are needed, high accuracy is critical, consistent output is required, or low latency matters.</a:t>
+            </a:r>
+          </a:p>
+          <a:p/>
+          <a:p>
+            <a:r>
+              <a:t>Choose Hybrid when: you need maximum accuracy, the domain is complex, you need both learned skills AND fresh data, or it's a production system.</a:t>
+            </a:r>
+          </a:p>
+          <a:p/>
+          <a:p>
+            <a:r>
+              <a:t>Most real-world production systems end up in the Hybrid category, starting with RAG for quick wins and adding fine-tuning where accuracy gaps appear.</a:t>
+            </a:r>
+          </a:p>
+        </p:txBody>
+      </p:sp>
+      <p:sp>
+        <p:nvSpPr>
+          <p:cNvPr id="4" name="Slide Number Placeholder 3"/>
+          <p:cNvSpPr>
+            <a:spLocks noGrp="1"/>
+          </p:cNvSpPr>
+          <p:nvPr>
+            <p:ph type="sldNum" idx="5" sz="quarter"/>
+          </p:nvPr>
+        </p:nvSpPr>
+        <p:spPr/>
+      </p:sp>
+    </p:spTree>
+  </p:cSld>
+  <p:clrMapOvr>
+    <a:masterClrMapping/>
+  </p:clrMapOvr>
+</p:notes>
+</file>
+
+<file path=ppt/notesSlides/notesSlide18.xml><?xml version="1.0" encoding="utf-8"?>
+<p:notes xmlns:a="http://schemas.openxmlformats.org/drawingml/2006/main" xmlns:p="http://schemas.openxmlformats.org/presentationml/2006/main" xmlns:r="http://schemas.openxmlformats.org/officeDocument/2006/relationships">
+  <p:cSld>
+    <p:spTree>
+      <p:nvGrpSpPr>
+        <p:cNvPr id="1" name=""/>
+        <p:cNvGrpSpPr/>
+        <p:nvPr/>
+      </p:nvGrpSpPr>
+      <p:grpSpPr>
+        <a:xfrm>
+          <a:off x="0" y="0"/>
+          <a:ext cx="0" cy="0"/>
+          <a:chOff x="0" y="0"/>
+          <a:chExt cx="0" cy="0"/>
+        </a:xfrm>
+      </p:grpSpPr>
+      <p:sp>
+        <p:nvSpPr>
+          <p:cNvPr id="2" name="Slide Image Placeholder 1"/>
+          <p:cNvSpPr>
+            <a:spLocks noGrp="1"/>
+          </p:cNvSpPr>
+          <p:nvPr>
+            <p:ph type="sldImg" idx="2"/>
+          </p:nvPr>
+        </p:nvSpPr>
+        <p:spPr/>
+      </p:sp>
+      <p:sp>
+        <p:nvSpPr>
+          <p:cNvPr id="3" name="Notes Placeholder 2"/>
+          <p:cNvSpPr>
+            <a:spLocks noGrp="1"/>
+          </p:cNvSpPr>
+          <p:nvPr>
+            <p:ph type="body" idx="3" sz="quarter"/>
+          </p:nvPr>
+        </p:nvSpPr>
+        <p:spPr/>
+        <p:txBody>
+          <a:bodyPr/>
+          <a:lstStyle/>
+          <a:p>
+            <a:r>
+              <a:t>This is a comprehensive toolkit overview for fine-tuning.</a:t>
+            </a:r>
+          </a:p>
+          <a:p/>
+          <a:p>
+            <a:r>
+              <a:t>For training frameworks: HuggingFace Transformers + PEFT is the industry standard. Unsloth gives you 2-5x faster training with 70% less VRAM. Axolotl is great for reproducible experiments via YAML configs. LLaMA-Factory provides a web UI for non-ML engineers. TRL handles RLHF and alignment tuning.</a:t>
+            </a:r>
+          </a:p>
+          <a:p/>
+          <a:p>
+            <a:r>
+              <a:t>For cloud platforms: AWS SageMaker JumpStart gives one-click fine-tuning. Amazon Bedrock offers fully managed no-code fine-tuning. OpenAI's API lets you fine-tune GPT-4o. Google Vertex AI covers Gemini models. Together AI and Fireworks offer serverless pay-per-GPU-hour options.</a:t>
+            </a:r>
+          </a:p>
+          <a:p/>
+          <a:p>
+            <a:r>
+              <a:t>For monitoring and evaluation: Weights &amp; Biases for experiment tracking, MLflow for open-source ML lifecycle, Argilla/Label Studio for data labeling, LM Eval Harness for benchmarking, and Ollama/vLLM for serving fine-tuned models.</a:t>
+            </a:r>
+          </a:p>
+        </p:txBody>
+      </p:sp>
+      <p:sp>
+        <p:nvSpPr>
+          <p:cNvPr id="4" name="Slide Number Placeholder 3"/>
+          <p:cNvSpPr>
+            <a:spLocks noGrp="1"/>
+          </p:cNvSpPr>
+          <p:nvPr>
+            <p:ph type="sldNum" idx="5" sz="quarter"/>
+          </p:nvPr>
+        </p:nvSpPr>
+        <p:spPr/>
+      </p:sp>
+    </p:spTree>
+  </p:cSld>
+  <p:clrMapOvr>
+    <a:masterClrMapping/>
+  </p:clrMapOvr>
+</p:notes>
+</file>
+
+<file path=ppt/notesSlides/notesSlide19.xml><?xml version="1.0" encoding="utf-8"?>
+<p:notes xmlns:a="http://schemas.openxmlformats.org/drawingml/2006/main" xmlns:p="http://schemas.openxmlformats.org/presentationml/2006/main" xmlns:r="http://schemas.openxmlformats.org/officeDocument/2006/relationships">
+  <p:cSld>
+    <p:spTree>
+      <p:nvGrpSpPr>
+        <p:cNvPr id="1" name=""/>
+        <p:cNvGrpSpPr/>
+        <p:nvPr/>
+      </p:nvGrpSpPr>
+      <p:grpSpPr>
+        <a:xfrm>
+          <a:off x="0" y="0"/>
+          <a:ext cx="0" cy="0"/>
+          <a:chOff x="0" y="0"/>
+          <a:chExt cx="0" cy="0"/>
+        </a:xfrm>
+      </p:grpSpPr>
+      <p:sp>
+        <p:nvSpPr>
+          <p:cNvPr id="2" name="Slide Image Placeholder 1"/>
+          <p:cNvSpPr>
+            <a:spLocks noGrp="1"/>
+          </p:cNvSpPr>
+          <p:nvPr>
+            <p:ph type="sldImg" idx="2"/>
+          </p:nvPr>
+        </p:nvSpPr>
+        <p:spPr/>
+      </p:sp>
+      <p:sp>
+        <p:nvSpPr>
+          <p:cNvPr id="3" name="Notes Placeholder 2"/>
+          <p:cNvSpPr>
+            <a:spLocks noGrp="1"/>
+          </p:cNvSpPr>
+          <p:nvPr>
+            <p:ph type="body" idx="3" sz="quarter"/>
+          </p:nvPr>
+        </p:nvSpPr>
+        <p:spPr/>
+        <p:txBody>
+          <a:bodyPr/>
+          <a:lstStyle/>
+          <a:p>
+            <a:r>
+              <a:t>Here's a step-by-step walkthrough of fine-tuning locally using Unsloth with QLoRA.</a:t>
+            </a:r>
+          </a:p>
+          <a:p/>
+          <a:p>
+            <a:r>
+              <a:t>Prerequisites: NVIDIA GPU with 8+ GB VRAM, CUDA 11.8+, Python 3.10+, about 20-50 GB free disk space.</a:t>
+            </a:r>
+          </a:p>
+          <a:p/>
+          <a:p>
+            <a:r>
+              <a:t>The code shows four steps: load the base model in 4-bit quantization, add LoRA adapter layers (only 1-5% of parameters get trained), train with SFTTrainer for 3 epochs, and save the merged model.</a:t>
+            </a:r>
+          </a:p>
+          <a:p/>
+          <a:p>
+            <a:r>
+              <a:t>Key things to note: base model weights are FROZEN — only the small adapter matrices (50-200 MB) are trained. Training takes 30 minutes to 4 hours for a 7B model. GPU memory is just ~6 GB with QLoRA vs ~28 GB for full fine-tuning.</a:t>
+            </a:r>
+          </a:p>
+          <a:p/>
+          <a:p>
+            <a:r>
+              <a:t>Training data is JSONL format with instruction/input/output fields. Typically you need 1,000 to 10,000 examples.</a:t>
+            </a:r>
+          </a:p>
+          <a:p/>
+          <a:p>
+            <a:r>
+              <a:t>Tip: start with QLoRA + Unsloth, use Llama or Mistral 7B as base, evaluate after each epoch, and export to GGUF for Ollama deployment.</a:t>
+            </a:r>
+          </a:p>
+        </p:txBody>
+      </p:sp>
+      <p:sp>
+        <p:nvSpPr>
+          <p:cNvPr id="4" name="Slide Number Placeholder 3"/>
+          <p:cNvSpPr>
+            <a:spLocks noGrp="1"/>
+          </p:cNvSpPr>
+          <p:nvPr>
+            <p:ph type="sldNum" idx="5" sz="quarter"/>
+          </p:nvPr>
+        </p:nvSpPr>
+        <p:spPr/>
+      </p:sp>
+    </p:spTree>
+  </p:cSld>
+  <p:clrMapOvr>
+    <a:masterClrMapping/>
+  </p:clrMapOvr>
+</p:notes>
+</file>
+
+<file path=ppt/notesSlides/notesSlide2.xml><?xml version="1.0" encoding="utf-8"?>
+<p:notes xmlns:a="http://schemas.openxmlformats.org/drawingml/2006/main" xmlns:p="http://schemas.openxmlformats.org/presentationml/2006/main" xmlns:r="http://schemas.openxmlformats.org/officeDocument/2006/relationships">
+  <p:cSld>
+    <p:spTree>
+      <p:nvGrpSpPr>
+        <p:cNvPr id="1" name=""/>
+        <p:cNvGrpSpPr/>
+        <p:nvPr/>
+      </p:nvGrpSpPr>
+      <p:grpSpPr>
+        <a:xfrm>
+          <a:off x="0" y="0"/>
+          <a:ext cx="0" cy="0"/>
+          <a:chOff x="0" y="0"/>
+          <a:chExt cx="0" cy="0"/>
+        </a:xfrm>
+      </p:grpSpPr>
+      <p:sp>
+        <p:nvSpPr>
+          <p:cNvPr id="2" name="Slide Image Placeholder 1"/>
+          <p:cNvSpPr>
+            <a:spLocks noGrp="1"/>
+          </p:cNvSpPr>
+          <p:nvPr>
+            <p:ph type="sldImg" idx="2"/>
+          </p:nvPr>
+        </p:nvSpPr>
+        <p:spPr/>
+      </p:sp>
+      <p:sp>
+        <p:nvSpPr>
+          <p:cNvPr id="3" name="Notes Placeholder 2"/>
+          <p:cNvSpPr>
+            <a:spLocks noGrp="1"/>
+          </p:cNvSpPr>
+          <p:nvPr>
+            <p:ph type="body" idx="3" sz="quarter"/>
+          </p:nvPr>
+        </p:nvSpPr>
+        <p:spPr/>
+        <p:txBody>
+          <a:bodyPr/>
+          <a:lstStyle/>
+          <a:p>
+            <a:r>
+              <a:t>Here's our roadmap for today.</a:t>
+            </a:r>
+          </a:p>
+          <a:p/>
+          <a:p>
+            <a:r>
+              <a:t>Part 1 sets the foundation — what LLMs are, why generic models aren't enough, and three approaches to making them domain-specific.</a:t>
+            </a:r>
+          </a:p>
+          <a:p/>
+          <a:p>
+            <a:r>
+              <a:t>Part 2 goes deep: we'll examine RAG and Fine-Tuning individually, compare them head-to-head, and give you a decision framework.</a:t>
+            </a:r>
+          </a:p>
+          <a:p/>
+          <a:p>
+            <a:r>
+              <a:t>Part 3 covers the practical tooling ecosystem — what you actually need to build these systems.</a:t>
+            </a:r>
+          </a:p>
+          <a:p/>
+          <a:p>
+            <a:r>
+              <a:t>Part 4 is where the evidence lives: four benchmark experiments across sentiment analysis, numerical reasoning, financial ratios, and spam detection. Every number comes from models we actually ran.</a:t>
+            </a:r>
+          </a:p>
+        </p:txBody>
+      </p:sp>
+      <p:sp>
+        <p:nvSpPr>
+          <p:cNvPr id="4" name="Slide Number Placeholder 3"/>
+          <p:cNvSpPr>
+            <a:spLocks noGrp="1"/>
+          </p:cNvSpPr>
+          <p:nvPr>
+            <p:ph type="sldNum" idx="5" sz="quarter"/>
+          </p:nvPr>
+        </p:nvSpPr>
+        <p:spPr/>
+      </p:sp>
+    </p:spTree>
+  </p:cSld>
+  <p:clrMapOvr>
+    <a:masterClrMapping/>
+  </p:clrMapOvr>
+</p:notes>
+</file>
+
+<file path=ppt/notesSlides/notesSlide20.xml><?xml version="1.0" encoding="utf-8"?>
+<p:notes xmlns:a="http://schemas.openxmlformats.org/drawingml/2006/main" xmlns:p="http://schemas.openxmlformats.org/presentationml/2006/main" xmlns:r="http://schemas.openxmlformats.org/officeDocument/2006/relationships">
+  <p:cSld>
+    <p:spTree>
+      <p:nvGrpSpPr>
+        <p:cNvPr id="1" name=""/>
+        <p:cNvGrpSpPr/>
+        <p:nvPr/>
+      </p:nvGrpSpPr>
+      <p:grpSpPr>
+        <a:xfrm>
+          <a:off x="0" y="0"/>
+          <a:ext cx="0" cy="0"/>
+          <a:chOff x="0" y="0"/>
+          <a:chExt cx="0" cy="0"/>
+        </a:xfrm>
+      </p:grpSpPr>
+      <p:sp>
+        <p:nvSpPr>
+          <p:cNvPr id="2" name="Slide Image Placeholder 1"/>
+          <p:cNvSpPr>
+            <a:spLocks noGrp="1"/>
+          </p:cNvSpPr>
+          <p:nvPr>
+            <p:ph type="sldImg" idx="2"/>
+          </p:nvPr>
+        </p:nvSpPr>
+        <p:spPr/>
+      </p:sp>
+      <p:sp>
+        <p:nvSpPr>
+          <p:cNvPr id="3" name="Notes Placeholder 2"/>
+          <p:cNvSpPr>
+            <a:spLocks noGrp="1"/>
+          </p:cNvSpPr>
+          <p:nvPr>
+            <p:ph type="body" idx="3" sz="quarter"/>
+          </p:nvPr>
+        </p:nvSpPr>
+        <p:spPr/>
+        <p:txBody>
+          <a:bodyPr/>
+          <a:lstStyle/>
+          <a:p>
+            <a:r>
+              <a:t>For AWS users, there are two main options.</a:t>
+            </a:r>
+          </a:p>
+          <a:p/>
+          <a:p>
+            <a:r>
+              <a:t>Option A: SageMaker JumpStart — select a foundation model from the hub, configure hyperparameters like LoRA rank and learning rate, point to training data in S3, and deploy an endpoint. Full control with custom code.</a:t>
+            </a:r>
+          </a:p>
+          <a:p/>
+          <a:p>
+            <a:r>
+              <a:t>Option B: Amazon Bedrock Custom Models — fully managed, almost no code. Upload JSONL to S3, configure in the console, submit the job, and deploy as a Provisioned Throughput endpoint. No ML infrastructure to manage.</a:t>
+            </a:r>
+          </a:p>
+          <a:p/>
+          <a:p>
+            <a:r>
+              <a:t>SageMaker gives you full control and supports any model. Bedrock is simpler but limited to supported models. Both support LoRA/QLoRA, S3 data, IAM security, and VPC isolation.</a:t>
+            </a:r>
+          </a:p>
+          <a:p/>
+          <a:p>
+            <a:r>
+              <a:t>Typical costs: training on ml.g5.2xlarge is about $5/hr, so a 7B QLoRA job runs $5-25 total. Inference is around $1.50/hr on ml.g5.xlarge.</a:t>
+            </a:r>
+          </a:p>
+        </p:txBody>
+      </p:sp>
+      <p:sp>
+        <p:nvSpPr>
+          <p:cNvPr id="4" name="Slide Number Placeholder 3"/>
+          <p:cNvSpPr>
+            <a:spLocks noGrp="1"/>
+          </p:cNvSpPr>
+          <p:nvPr>
+            <p:ph type="sldNum" idx="5" sz="quarter"/>
+          </p:nvPr>
+        </p:nvSpPr>
+        <p:spPr/>
+      </p:sp>
+    </p:spTree>
+  </p:cSld>
+  <p:clrMapOvr>
+    <a:masterClrMapping/>
+  </p:clrMapOvr>
+</p:notes>
+</file>
+
+<file path=ppt/notesSlides/notesSlide21.xml><?xml version="1.0" encoding="utf-8"?>
+<p:notes xmlns:a="http://schemas.openxmlformats.org/drawingml/2006/main" xmlns:p="http://schemas.openxmlformats.org/presentationml/2006/main" xmlns:r="http://schemas.openxmlformats.org/officeDocument/2006/relationships">
+  <p:cSld>
+    <p:spTree>
+      <p:nvGrpSpPr>
+        <p:cNvPr id="1" name=""/>
+        <p:cNvGrpSpPr/>
+        <p:nvPr/>
+      </p:nvGrpSpPr>
+      <p:grpSpPr>
+        <a:xfrm>
+          <a:off x="0" y="0"/>
+          <a:ext cx="0" cy="0"/>
+          <a:chOff x="0" y="0"/>
+          <a:chExt cx="0" cy="0"/>
+        </a:xfrm>
+      </p:grpSpPr>
+      <p:sp>
+        <p:nvSpPr>
+          <p:cNvPr id="2" name="Slide Image Placeholder 1"/>
+          <p:cNvSpPr>
+            <a:spLocks noGrp="1"/>
+          </p:cNvSpPr>
+          <p:nvPr>
+            <p:ph type="sldImg" idx="2"/>
+          </p:nvPr>
+        </p:nvSpPr>
+        <p:spPr/>
+      </p:sp>
+      <p:sp>
+        <p:nvSpPr>
+          <p:cNvPr id="3" name="Notes Placeholder 2"/>
+          <p:cNvSpPr>
+            <a:spLocks noGrp="1"/>
+          </p:cNvSpPr>
+          <p:nvPr>
+            <p:ph type="body" idx="3" sz="quarter"/>
+          </p:nvPr>
+        </p:nvSpPr>
+        <p:spPr/>
+        <p:txBody>
+          <a:bodyPr/>
+          <a:lstStyle/>
+          <a:p>
+            <a:r>
+              <a:t>Now let's look at the RAG toolkit.</a:t>
+            </a:r>
+          </a:p>
+          <a:p/>
+          <a:p>
+            <a:r>
+              <a:t>For vector databases: ChromaDB is open-source and zero-config — great for prototyping. Pinecone is fully managed serverless. Weaviate offers hybrid search combining vector and keyword (BM25). Qdrant is Rust-based and fast with rich filtering. pgvector is a PostgreSQL extension if you want SQL and vectors in one database.</a:t>
+            </a:r>
+          </a:p>
+          <a:p/>
+          <a:p>
+            <a:r>
+              <a:t>For orchestration: LangChain is the most popular with 700+ integrations. LlamaIndex specializes in data ingestion and advanced RAG. Haystack from deepset offers production NLP pipelines. Semantic Kernel is Microsoft's offering for .NET/Python. CrewAI and AutoGen support multi-agent RAG workflows.</a:t>
+            </a:r>
+          </a:p>
+          <a:p/>
+          <a:p>
+            <a:r>
+              <a:t>For embeddings and evaluation: sentence-transformers for free local embeddings, OpenAI/Cohere/Voyage for API-based high-quality embeddings, RAGAS for evaluating RAG quality, and AWS Bedrock Knowledge Bases and Azure AI Search for managed cloud RAG.</a:t>
+            </a:r>
+          </a:p>
+        </p:txBody>
+      </p:sp>
+      <p:sp>
+        <p:nvSpPr>
+          <p:cNvPr id="4" name="Slide Number Placeholder 3"/>
+          <p:cNvSpPr>
+            <a:spLocks noGrp="1"/>
+          </p:cNvSpPr>
+          <p:nvPr>
+            <p:ph type="sldNum" idx="5" sz="quarter"/>
+          </p:nvPr>
+        </p:nvSpPr>
+        <p:spPr/>
+      </p:sp>
+    </p:spTree>
+  </p:cSld>
+  <p:clrMapOvr>
+    <a:masterClrMapping/>
+  </p:clrMapOvr>
+</p:notes>
+</file>
+
+<file path=ppt/notesSlides/notesSlide22.xml><?xml version="1.0" encoding="utf-8"?>
+<p:notes xmlns:a="http://schemas.openxmlformats.org/drawingml/2006/main" xmlns:p="http://schemas.openxmlformats.org/presentationml/2006/main" xmlns:r="http://schemas.openxmlformats.org/officeDocument/2006/relationships">
+  <p:cSld>
+    <p:spTree>
+      <p:nvGrpSpPr>
+        <p:cNvPr id="1" name=""/>
+        <p:cNvGrpSpPr/>
+        <p:nvPr/>
+      </p:nvGrpSpPr>
+      <p:grpSpPr>
+        <a:xfrm>
+          <a:off x="0" y="0"/>
+          <a:ext cx="0" cy="0"/>
+          <a:chOff x="0" y="0"/>
+          <a:chExt cx="0" cy="0"/>
+        </a:xfrm>
+      </p:grpSpPr>
+      <p:sp>
+        <p:nvSpPr>
+          <p:cNvPr id="2" name="Slide Image Placeholder 1"/>
+          <p:cNvSpPr>
+            <a:spLocks noGrp="1"/>
+          </p:cNvSpPr>
+          <p:nvPr>
+            <p:ph type="sldImg" idx="2"/>
+          </p:nvPr>
+        </p:nvSpPr>
+        <p:spPr/>
+      </p:sp>
+      <p:sp>
+        <p:nvSpPr>
+          <p:cNvPr id="3" name="Notes Placeholder 2"/>
+          <p:cNvSpPr>
+            <a:spLocks noGrp="1"/>
+          </p:cNvSpPr>
+          <p:nvPr>
+            <p:ph type="body" idx="3" sz="quarter"/>
+          </p:nvPr>
+        </p:nvSpPr>
+        <p:spPr/>
+        <p:txBody>
+          <a:bodyPr/>
+          <a:lstStyle/>
+          <a:p>
+            <a:r>
+              <a:t>Here's how to build RAG locally with Python, ChromaDB, and sentence-transformers.</a:t>
+            </a:r>
+          </a:p>
+          <a:p/>
+          <a:p>
+            <a:r>
+              <a:t>The code shows four steps: install dependencies, load and chunk documents (500 chars with 50 char overlap), create embeddings and a vector store using all-MiniLM-L6-v2, and query by embedding the question, retrieving top-K similar chunks, and generating an answer.</a:t>
+            </a:r>
+          </a:p>
+          <a:p/>
+          <a:p>
+            <a:r>
+              <a:t>The architecture is: Documents → Chunking → Embedding → ChromaDB → Top-K retrieval → LLM prompt → Answer with source references.</a:t>
+            </a:r>
+          </a:p>
+          <a:p/>
+          <a:p>
+            <a:r>
+              <a:t>No GPU required for retrieval. You can use API-based LLMs for generation, or run a local one via Ollama.</a:t>
+            </a:r>
+          </a:p>
+          <a:p/>
+          <a:p>
+            <a:r>
+              <a:t>Tuning tips that matter: chunk size of 300-1000 chars, overlap of 10-20%, top-K of 3-5 documents, try domain-specific embedding models, and consider adding a cross-encoder re-ranker for better precision.</a:t>
+            </a:r>
+          </a:p>
+        </p:txBody>
+      </p:sp>
+      <p:sp>
+        <p:nvSpPr>
+          <p:cNvPr id="4" name="Slide Number Placeholder 3"/>
+          <p:cNvSpPr>
+            <a:spLocks noGrp="1"/>
+          </p:cNvSpPr>
+          <p:nvPr>
+            <p:ph type="sldNum" idx="5" sz="quarter"/>
+          </p:nvPr>
+        </p:nvSpPr>
+        <p:spPr/>
+      </p:sp>
+    </p:spTree>
+  </p:cSld>
+  <p:clrMapOvr>
+    <a:masterClrMapping/>
+  </p:clrMapOvr>
+</p:notes>
+</file>
+
+<file path=ppt/notesSlides/notesSlide23.xml><?xml version="1.0" encoding="utf-8"?>
+<p:notes xmlns:a="http://schemas.openxmlformats.org/drawingml/2006/main" xmlns:p="http://schemas.openxmlformats.org/presentationml/2006/main" xmlns:r="http://schemas.openxmlformats.org/officeDocument/2006/relationships">
+  <p:cSld>
+    <p:spTree>
+      <p:nvGrpSpPr>
+        <p:cNvPr id="1" name=""/>
+        <p:cNvGrpSpPr/>
+        <p:nvPr/>
+      </p:nvGrpSpPr>
+      <p:grpSpPr>
+        <a:xfrm>
+          <a:off x="0" y="0"/>
+          <a:ext cx="0" cy="0"/>
+          <a:chOff x="0" y="0"/>
+          <a:chExt cx="0" cy="0"/>
+        </a:xfrm>
+      </p:grpSpPr>
+      <p:sp>
+        <p:nvSpPr>
+          <p:cNvPr id="2" name="Slide Image Placeholder 1"/>
+          <p:cNvSpPr>
+            <a:spLocks noGrp="1"/>
+          </p:cNvSpPr>
+          <p:nvPr>
+            <p:ph type="sldImg" idx="2"/>
+          </p:nvPr>
+        </p:nvSpPr>
+        <p:spPr/>
+      </p:sp>
+      <p:sp>
+        <p:nvSpPr>
+          <p:cNvPr id="3" name="Notes Placeholder 2"/>
+          <p:cNvSpPr>
+            <a:spLocks noGrp="1"/>
+          </p:cNvSpPr>
+          <p:nvPr>
+            <p:ph type="body" idx="3" sz="quarter"/>
+          </p:nvPr>
+        </p:nvSpPr>
+        <p:spPr/>
+        <p:txBody>
+          <a:bodyPr/>
+          <a:lstStyle/>
+          <a:p>
+            <a:r>
+              <a:t>For AWS-based RAG, there are again two options.</a:t>
+            </a:r>
+          </a:p>
+          <a:p/>
+          <a:p>
+            <a:r>
+              <a:t>Option A: Bedrock Knowledge Bases is fully managed. Five steps: create an S3 bucket with documents, configure in the Bedrock console with an embedding model and vector store, sync the data source, and query via the RetrieveAndGenerate API. The response includes both the answer and source citations. Supports PDF, TXT, CSV, HTML, and DOCX.</a:t>
+            </a:r>
+          </a:p>
+          <a:p/>
+          <a:p>
+            <a:r>
+              <a:t>Option B: Custom RAG gives you full control. Use Bedrock Embeddings or SageMaker for embedding, OpenSearch Serverless or Aurora pgvector for vector storage, Lambda + Step Functions or LangChain on ECS for orchestration, and Bedrock or SageMaker for generation.</a:t>
+            </a:r>
+          </a:p>
+          <a:p/>
+          <a:p>
+            <a:r>
+              <a:t>Cost estimates: OpenSearch serverless starts at $0.24/hr per OCU. A small RAG system typically runs $50-200/month.</a:t>
+            </a:r>
+          </a:p>
+        </p:txBody>
+      </p:sp>
+      <p:sp>
+        <p:nvSpPr>
+          <p:cNvPr id="4" name="Slide Number Placeholder 3"/>
+          <p:cNvSpPr>
+            <a:spLocks noGrp="1"/>
+          </p:cNvSpPr>
+          <p:nvPr>
+            <p:ph type="sldNum" idx="5" sz="quarter"/>
+          </p:nvPr>
+        </p:nvSpPr>
+        <p:spPr/>
+      </p:sp>
+    </p:spTree>
+  </p:cSld>
+  <p:clrMapOvr>
+    <a:masterClrMapping/>
+  </p:clrMapOvr>
+</p:notes>
+</file>
+
+<file path=ppt/notesSlides/notesSlide24.xml><?xml version="1.0" encoding="utf-8"?>
+<p:notes xmlns:a="http://schemas.openxmlformats.org/drawingml/2006/main" xmlns:p="http://schemas.openxmlformats.org/presentationml/2006/main" xmlns:r="http://schemas.openxmlformats.org/officeDocument/2006/relationships">
+  <p:cSld>
+    <p:spTree>
+      <p:nvGrpSpPr>
+        <p:cNvPr id="1" name=""/>
+        <p:cNvGrpSpPr/>
+        <p:nvPr/>
+      </p:nvGrpSpPr>
+      <p:grpSpPr>
+        <a:xfrm>
+          <a:off x="0" y="0"/>
+          <a:ext cx="0" cy="0"/>
+          <a:chOff x="0" y="0"/>
+          <a:chExt cx="0" cy="0"/>
+        </a:xfrm>
+      </p:grpSpPr>
+      <p:sp>
+        <p:nvSpPr>
+          <p:cNvPr id="2" name="Slide Image Placeholder 1"/>
+          <p:cNvSpPr>
+            <a:spLocks noGrp="1"/>
+          </p:cNvSpPr>
+          <p:nvPr>
+            <p:ph type="sldImg" idx="2"/>
+          </p:nvPr>
+        </p:nvSpPr>
+        <p:spPr/>
+      </p:sp>
+      <p:sp>
+        <p:nvSpPr>
+          <p:cNvPr id="3" name="Notes Placeholder 2"/>
+          <p:cNvSpPr>
+            <a:spLocks noGrp="1"/>
+          </p:cNvSpPr>
+          <p:nvPr>
+            <p:ph type="body" idx="3" sz="quarter"/>
+          </p:nvPr>
+        </p:nvSpPr>
+        <p:spPr/>
+        <p:txBody>
+          <a:bodyPr/>
+          <a:lstStyle/>
+          <a:p>
+            <a:r>
+              <a:t>Quick overview of data preparation and evaluation tools.</a:t>
+            </a:r>
+          </a:p>
+          <a:p/>
+          <a:p>
+            <a:r>
+              <a:t>For data preparation: Argilla and Label Studio for data labeling, HuggingFace Datasets library with 100K+ public datasets, and synthetic data generation using GPT-4 or Claude to bootstrap training data.</a:t>
+            </a:r>
+          </a:p>
+          <a:p/>
+          <a:p>
+            <a:r>
+              <a:t>For evaluation: LM Evaluation Harness is the standard benchmark framework. RAGAS evaluates RAG quality on faithfulness and relevancy. DeepEval provides unit testing for LLMs with CI/CD integration. Phoenix from Arize AI offers LLM observability for tracing and debugging in production.</a:t>
+            </a:r>
+          </a:p>
+          <a:p/>
+          <a:p>
+            <a:r>
+              <a:t>These tools close the loop — you need good data to train, and good evaluation to know if your approach is working.</a:t>
+            </a:r>
+          </a:p>
+        </p:txBody>
+      </p:sp>
+      <p:sp>
+        <p:nvSpPr>
+          <p:cNvPr id="4" name="Slide Number Placeholder 3"/>
+          <p:cNvSpPr>
+            <a:spLocks noGrp="1"/>
+          </p:cNvSpPr>
+          <p:nvPr>
+            <p:ph type="sldNum" idx="5" sz="quarter"/>
+          </p:nvPr>
+        </p:nvSpPr>
+        <p:spPr/>
+      </p:sp>
+    </p:spTree>
+  </p:cSld>
+  <p:clrMapOvr>
+    <a:masterClrMapping/>
+  </p:clrMapOvr>
+</p:notes>
+</file>
+
+<file path=ppt/notesSlides/notesSlide25.xml><?xml version="1.0" encoding="utf-8"?>
+<p:notes xmlns:a="http://schemas.openxmlformats.org/drawingml/2006/main" xmlns:p="http://schemas.openxmlformats.org/presentationml/2006/main" xmlns:r="http://schemas.openxmlformats.org/officeDocument/2006/relationships">
+  <p:cSld>
+    <p:spTree>
+      <p:nvGrpSpPr>
+        <p:cNvPr id="1" name=""/>
+        <p:cNvGrpSpPr/>
+        <p:nvPr/>
+      </p:nvGrpSpPr>
+      <p:grpSpPr>
+        <a:xfrm>
+          <a:off x="0" y="0"/>
+          <a:ext cx="0" cy="0"/>
+          <a:chOff x="0" y="0"/>
+          <a:chExt cx="0" cy="0"/>
+        </a:xfrm>
+      </p:grpSpPr>
+      <p:sp>
+        <p:nvSpPr>
+          <p:cNvPr id="2" name="Slide Image Placeholder 1"/>
+          <p:cNvSpPr>
+            <a:spLocks noGrp="1"/>
+          </p:cNvSpPr>
+          <p:nvPr>
+            <p:ph type="sldImg" idx="2"/>
+          </p:nvPr>
+        </p:nvSpPr>
+        <p:spPr/>
+      </p:sp>
+      <p:sp>
+        <p:nvSpPr>
+          <p:cNvPr id="3" name="Notes Placeholder 2"/>
+          <p:cNvSpPr>
+            <a:spLocks noGrp="1"/>
+          </p:cNvSpPr>
+          <p:nvPr>
+            <p:ph type="body" idx="3" sz="quarter"/>
+          </p:nvPr>
+        </p:nvSpPr>
+        <p:spPr/>
+        <p:txBody>
+          <a:bodyPr/>
+          <a:lstStyle/>
+          <a:p>
+            <a:r>
+              <a:t>Let's ground this in real-world use cases across four industries.</a:t>
+            </a:r>
+          </a:p>
+          <a:p/>
+          <a:p>
+            <a:r>
+              <a:t>Financial Services: risk assessment, compliance checking, financial analysis with ratios and metrics, and sentiment analysis where FinBERT understands that "headwinds" means negative.</a:t>
+            </a:r>
+          </a:p>
+          <a:p/>
+          <a:p>
+            <a:r>
+              <a:t>Healthcare: extracting diagnoses and medications from clinical notes, medical coding to ICD-10, and identifying drug interactions from pharma databases.</a:t>
+            </a:r>
+          </a:p>
+          <a:p/>
+          <a:p>
+            <a:r>
+              <a:t>Legal: contract review for clauses and obligations, case law research for precedent and citations, and due diligence across thousands of documents.</a:t>
+            </a:r>
+          </a:p>
+          <a:p/>
+          <a:p>
+            <a:r>
+              <a:t>Cybersecurity: spam and phishing detection at 95% accuracy with fine-tuned DistilBERT, threat classification, and high-throughput email triage.</a:t>
+            </a:r>
+          </a:p>
+          <a:p/>
+          <a:p>
+            <a:r>
+              <a:t>Common pattern across all of these: start with RAG for quick wins, then add fine-tuning where accuracy gaps appear.</a:t>
+            </a:r>
+          </a:p>
+        </p:txBody>
+      </p:sp>
+      <p:sp>
+        <p:nvSpPr>
+          <p:cNvPr id="4" name="Slide Number Placeholder 3"/>
+          <p:cNvSpPr>
+            <a:spLocks noGrp="1"/>
+          </p:cNvSpPr>
+          <p:nvPr>
+            <p:ph type="sldNum" idx="5" sz="quarter"/>
+          </p:nvPr>
+        </p:nvSpPr>
+        <p:spPr/>
+      </p:sp>
+    </p:spTree>
+  </p:cSld>
+  <p:clrMapOvr>
+    <a:masterClrMapping/>
+  </p:clrMapOvr>
+</p:notes>
+</file>
+
+<file path=ppt/notesSlides/notesSlide26.xml><?xml version="1.0" encoding="utf-8"?>
+<p:notes xmlns:a="http://schemas.openxmlformats.org/drawingml/2006/main" xmlns:p="http://schemas.openxmlformats.org/presentationml/2006/main" xmlns:r="http://schemas.openxmlformats.org/officeDocument/2006/relationships">
+  <p:cSld>
+    <p:spTree>
+      <p:nvGrpSpPr>
+        <p:cNvPr id="1" name=""/>
+        <p:cNvGrpSpPr/>
+        <p:nvPr/>
+      </p:nvGrpSpPr>
+      <p:grpSpPr>
+        <a:xfrm>
+          <a:off x="0" y="0"/>
+          <a:ext cx="0" cy="0"/>
+          <a:chOff x="0" y="0"/>
+          <a:chExt cx="0" cy="0"/>
+        </a:xfrm>
+      </p:grpSpPr>
+      <p:sp>
+        <p:nvSpPr>
+          <p:cNvPr id="2" name="Slide Image Placeholder 1"/>
+          <p:cNvSpPr>
+            <a:spLocks noGrp="1"/>
+          </p:cNvSpPr>
+          <p:nvPr>
+            <p:ph type="sldImg" idx="2"/>
+          </p:nvPr>
+        </p:nvSpPr>
+        <p:spPr/>
+      </p:sp>
+      <p:sp>
+        <p:nvSpPr>
+          <p:cNvPr id="3" name="Notes Placeholder 2"/>
+          <p:cNvSpPr>
+            <a:spLocks noGrp="1"/>
+          </p:cNvSpPr>
+          <p:nvPr>
+            <p:ph type="body" idx="3" sz="quarter"/>
+          </p:nvPr>
+        </p:nvSpPr>
+        <p:spPr/>
+        <p:txBody>
+          <a:bodyPr/>
+          <a:lstStyle/>
+          <a:p>
+            <a:r>
+              <a:t>The hybrid approach combines the best of both worlds.</a:t>
+            </a:r>
+          </a:p>
+          <a:p/>
+          <a:p>
+            <a:r>
+              <a:t>Fine-tuning contributes: numerical reasoning ability, domain-specific patterns, consistent output format, and lower error rates.</a:t>
+            </a:r>
+          </a:p>
+          <a:p/>
+          <a:p>
+            <a:r>
+              <a:t>RAG contributes: fresh updatable knowledge, source citations for audit, broader context coverage, and reduced hallucination.</a:t>
+            </a:r>
+          </a:p>
+          <a:p/>
+          <a:p>
+            <a:r>
+              <a:t>The results speak for themselves: Hybrid achieves 65.8% on FinQA vs 61.2% fine-tuning-only vs 15.3% RAG-only. On sentiment, it's 75% hybrid vs 70% fine-tuning vs 65% RAG.</a:t>
+            </a:r>
+          </a:p>
+          <a:p/>
+          <a:p>
+            <a:r>
+              <a:t>The diagram shows the architecture: the fine-tuned model handles reasoning and computation, while RAG injects current documents and provides citations. Together they produce the most accurate and verifiable results.</a:t>
+            </a:r>
+          </a:p>
+        </p:txBody>
+      </p:sp>
+      <p:sp>
+        <p:nvSpPr>
+          <p:cNvPr id="4" name="Slide Number Placeholder 3"/>
+          <p:cNvSpPr>
+            <a:spLocks noGrp="1"/>
+          </p:cNvSpPr>
+          <p:nvPr>
+            <p:ph type="sldNum" idx="5" sz="quarter"/>
+          </p:nvPr>
+        </p:nvSpPr>
+        <p:spPr/>
+      </p:sp>
+    </p:spTree>
+  </p:cSld>
+  <p:clrMapOvr>
+    <a:masterClrMapping/>
+  </p:clrMapOvr>
+</p:notes>
+</file>
+
+<file path=ppt/notesSlides/notesSlide27.xml><?xml version="1.0" encoding="utf-8"?>
+<p:notes xmlns:a="http://schemas.openxmlformats.org/drawingml/2006/main" xmlns:p="http://schemas.openxmlformats.org/presentationml/2006/main" xmlns:r="http://schemas.openxmlformats.org/officeDocument/2006/relationships">
+  <p:cSld>
+    <p:spTree>
+      <p:nvGrpSpPr>
+        <p:cNvPr id="1" name=""/>
+        <p:cNvGrpSpPr/>
+        <p:nvPr/>
+      </p:nvGrpSpPr>
+      <p:grpSpPr>
+        <a:xfrm>
+          <a:off x="0" y="0"/>
+          <a:ext cx="0" cy="0"/>
+          <a:chOff x="0" y="0"/>
+          <a:chExt cx="0" cy="0"/>
+        </a:xfrm>
+      </p:grpSpPr>
+      <p:sp>
+        <p:nvSpPr>
+          <p:cNvPr id="2" name="Slide Image Placeholder 1"/>
+          <p:cNvSpPr>
+            <a:spLocks noGrp="1"/>
+          </p:cNvSpPr>
+          <p:nvPr>
+            <p:ph type="sldImg" idx="2"/>
+          </p:nvPr>
+        </p:nvSpPr>
+        <p:spPr/>
+      </p:sp>
+      <p:sp>
+        <p:nvSpPr>
+          <p:cNvPr id="3" name="Notes Placeholder 2"/>
+          <p:cNvSpPr>
+            <a:spLocks noGrp="1"/>
+          </p:cNvSpPr>
+          <p:nvPr>
+            <p:ph type="body" idx="3" sz="quarter"/>
+          </p:nvPr>
+        </p:nvSpPr>
+        <p:spPr/>
+        <p:txBody>
+          <a:bodyPr/>
+          <a:lstStyle/>
+          <a:p>
+            <a:r>
+              <a:t>Let's talk money.</a:t>
+            </a:r>
+          </a:p>
+          <a:p/>
+          <a:p>
+            <a:r>
+              <a:t>Setup costs range from free for prompt engineering, $100-$1K for RAG, $500-$50K+ for fine-tuning, and $1K-$100K+ for hybrid systems.</a:t>
+            </a:r>
+          </a:p>
+          <a:p/>
+          <a:p>
+            <a:r>
+              <a:t>But look at per-query costs: fine-tuning has lower inference cost because there's no retrieval overhead.</a:t>
+            </a:r>
+          </a:p>
+          <a:p/>
+          <a:p>
+            <a:r>
+              <a:t>The ROI argument for fine-tuning: it's a one-time training investment, lower per-query cost, higher accuracy means fewer errors and less human review. Break-even is often within weeks for high-volume applications.</a:t>
+            </a:r>
+          </a:p>
+          <a:p/>
+          <a:p>
+            <a:r>
+              <a:t>When RAG has better ROI: low query volume under 1K per day, rapidly changing knowledge base, no training data available, or you need to launch in less than a week.</a:t>
+            </a:r>
+          </a:p>
+          <a:p/>
+          <a:p>
+            <a:r>
+              <a:t>The key insight is total cost of ownership, not just setup cost.</a:t>
+            </a:r>
+          </a:p>
+        </p:txBody>
+      </p:sp>
+      <p:sp>
+        <p:nvSpPr>
+          <p:cNvPr id="4" name="Slide Number Placeholder 3"/>
+          <p:cNvSpPr>
+            <a:spLocks noGrp="1"/>
+          </p:cNvSpPr>
+          <p:nvPr>
+            <p:ph type="sldNum" idx="5" sz="quarter"/>
+          </p:nvPr>
+        </p:nvSpPr>
+        <p:spPr/>
+      </p:sp>
+    </p:spTree>
+  </p:cSld>
+  <p:clrMapOvr>
+    <a:masterClrMapping/>
+  </p:clrMapOvr>
+</p:notes>
+</file>
+
+<file path=ppt/notesSlides/notesSlide28.xml><?xml version="1.0" encoding="utf-8"?>
+<p:notes xmlns:a="http://schemas.openxmlformats.org/drawingml/2006/main" xmlns:p="http://schemas.openxmlformats.org/presentationml/2006/main" xmlns:r="http://schemas.openxmlformats.org/officeDocument/2006/relationships">
+  <p:cSld>
+    <p:spTree>
+      <p:nvGrpSpPr>
+        <p:cNvPr id="1" name=""/>
+        <p:cNvGrpSpPr/>
+        <p:nvPr/>
+      </p:nvGrpSpPr>
+      <p:grpSpPr>
+        <a:xfrm>
+          <a:off x="0" y="0"/>
+          <a:ext cx="0" cy="0"/>
+          <a:chOff x="0" y="0"/>
+          <a:chExt cx="0" cy="0"/>
+        </a:xfrm>
+      </p:grpSpPr>
+      <p:sp>
+        <p:nvSpPr>
+          <p:cNvPr id="2" name="Slide Image Placeholder 1"/>
+          <p:cNvSpPr>
+            <a:spLocks noGrp="1"/>
+          </p:cNvSpPr>
+          <p:nvPr>
+            <p:ph type="sldImg" idx="2"/>
+          </p:nvPr>
+        </p:nvSpPr>
+        <p:spPr/>
+      </p:sp>
+      <p:sp>
+        <p:nvSpPr>
+          <p:cNvPr id="3" name="Notes Placeholder 2"/>
+          <p:cNvSpPr>
+            <a:spLocks noGrp="1"/>
+          </p:cNvSpPr>
+          <p:nvPr>
+            <p:ph type="body" idx="3" sz="quarter"/>
+          </p:nvPr>
+        </p:nvSpPr>
+        <p:spPr/>
+        <p:txBody>
+          <a:bodyPr/>
+          <a:lstStyle/>
+          <a:p>
+            <a:r>
+              <a:t>Six key takeaways to remember:</a:t>
+            </a:r>
+          </a:p>
+          <a:p/>
+          <a:p>
+            <a:r>
+              <a:t>1. Fine-tuning teaches new SKILLS — reasoning, computation, pattern recognition.</a:t>
+            </a:r>
+          </a:p>
+          <a:p/>
+          <a:p>
+            <a:r>
+              <a:t>2. RAG provides new INFORMATION — dynamic knowledge, citations, quick deployment.</a:t>
+            </a:r>
+          </a:p>
+          <a:p/>
+          <a:p>
+            <a:r>
+              <a:t>3. The best production systems often combine both — that's the hybrid approach.</a:t>
+            </a:r>
+          </a:p>
+          <a:p/>
+          <a:p>
+            <a:r>
+              <a:t>4. Modern tools like Unsloth, LoRA, and QLoRA make fine-tuning accessible even on consumer hardware.</a:t>
+            </a:r>
+          </a:p>
+          <a:p/>
+          <a:p>
+            <a:r>
+              <a:t>5. Start with RAG for quick wins, add fine-tuning where accuracy gaps appear — this is the practical adoption path.</a:t>
+            </a:r>
+          </a:p>
+          <a:p/>
+          <a:p>
+            <a:r>
+              <a:t>6. The cost of fine-tuning is an investment — higher accuracy means fewer costly errors downstream.</a:t>
+            </a:r>
+          </a:p>
+        </p:txBody>
+      </p:sp>
+      <p:sp>
+        <p:nvSpPr>
+          <p:cNvPr id="4" name="Slide Number Placeholder 3"/>
+          <p:cNvSpPr>
+            <a:spLocks noGrp="1"/>
+          </p:cNvSpPr>
+          <p:nvPr>
+            <p:ph type="sldNum" idx="5" sz="quarter"/>
+          </p:nvPr>
+        </p:nvSpPr>
+        <p:spPr/>
+      </p:sp>
+    </p:spTree>
+  </p:cSld>
+  <p:clrMapOvr>
+    <a:masterClrMapping/>
+  </p:clrMapOvr>
+</p:notes>
+</file>
+
+<file path=ppt/notesSlides/notesSlide29.xml><?xml version="1.0" encoding="utf-8"?>
+<p:notes xmlns:a="http://schemas.openxmlformats.org/drawingml/2006/main" xmlns:p="http://schemas.openxmlformats.org/presentationml/2006/main" xmlns:r="http://schemas.openxmlformats.org/officeDocument/2006/relationships">
+  <p:cSld>
+    <p:spTree>
+      <p:nvGrpSpPr>
+        <p:cNvPr id="1" name=""/>
+        <p:cNvGrpSpPr/>
+        <p:nvPr/>
+      </p:nvGrpSpPr>
+      <p:grpSpPr>
+        <a:xfrm>
+          <a:off x="0" y="0"/>
+          <a:ext cx="0" cy="0"/>
+          <a:chOff x="0" y="0"/>
+          <a:chExt cx="0" cy="0"/>
+        </a:xfrm>
+      </p:grpSpPr>
+      <p:sp>
+        <p:nvSpPr>
+          <p:cNvPr id="2" name="Slide Image Placeholder 1"/>
+          <p:cNvSpPr>
+            <a:spLocks noGrp="1"/>
+          </p:cNvSpPr>
+          <p:nvPr>
+            <p:ph type="sldImg" idx="2"/>
+          </p:nvPr>
+        </p:nvSpPr>
+        <p:spPr/>
+      </p:sp>
+      <p:sp>
+        <p:nvSpPr>
+          <p:cNvPr id="3" name="Notes Placeholder 2"/>
+          <p:cNvSpPr>
+            <a:spLocks noGrp="1"/>
+          </p:cNvSpPr>
+          <p:nvPr>
+            <p:ph type="body" idx="3" sz="quarter"/>
+          </p:nvPr>
+        </p:nvSpPr>
+        <p:spPr/>
+        <p:txBody>
+          <a:bodyPr/>
+          <a:lstStyle/>
+          <a:p>
+            <a:r>
+              <a:t>Now we move into the evidence section. Everything that follows comes from our actual benchmark experiments.</a:t>
+            </a:r>
+          </a:p>
+          <a:p/>
+          <a:p>
+            <a:r>
+              <a:t>We ran four controlled experiments comparing Base models vs Fine-Tuned vs RAG vs Hybrid. Same architecture, same parameter count — the only variable is the approach. This lets us isolate the impact of each technique.</a:t>
+            </a:r>
+          </a:p>
+        </p:txBody>
+      </p:sp>
+      <p:sp>
+        <p:nvSpPr>
+          <p:cNvPr id="4" name="Slide Number Placeholder 3"/>
+          <p:cNvSpPr>
+            <a:spLocks noGrp="1"/>
+          </p:cNvSpPr>
+          <p:nvPr>
+            <p:ph type="sldNum" idx="5" sz="quarter"/>
+          </p:nvPr>
+        </p:nvSpPr>
+        <p:spPr/>
+      </p:sp>
+    </p:spTree>
+  </p:cSld>
+  <p:clrMapOvr>
+    <a:masterClrMapping/>
+  </p:clrMapOvr>
+</p:notes>
+</file>
+
+<file path=ppt/notesSlides/notesSlide3.xml><?xml version="1.0" encoding="utf-8"?>
+<p:notes xmlns:a="http://schemas.openxmlformats.org/drawingml/2006/main" xmlns:p="http://schemas.openxmlformats.org/presentationml/2006/main" xmlns:r="http://schemas.openxmlformats.org/officeDocument/2006/relationships">
+  <p:cSld>
+    <p:spTree>
+      <p:nvGrpSpPr>
+        <p:cNvPr id="1" name=""/>
+        <p:cNvGrpSpPr/>
+        <p:nvPr/>
+      </p:nvGrpSpPr>
+      <p:grpSpPr>
+        <a:xfrm>
+          <a:off x="0" y="0"/>
+          <a:ext cx="0" cy="0"/>
+          <a:chOff x="0" y="0"/>
+          <a:chExt cx="0" cy="0"/>
+        </a:xfrm>
+      </p:grpSpPr>
+      <p:sp>
+        <p:nvSpPr>
+          <p:cNvPr id="2" name="Slide Image Placeholder 1"/>
+          <p:cNvSpPr>
+            <a:spLocks noGrp="1"/>
+          </p:cNvSpPr>
+          <p:nvPr>
+            <p:ph type="sldImg" idx="2"/>
+          </p:nvPr>
+        </p:nvSpPr>
+        <p:spPr/>
+      </p:sp>
+      <p:sp>
+        <p:nvSpPr>
+          <p:cNvPr id="3" name="Notes Placeholder 2"/>
+          <p:cNvSpPr>
+            <a:spLocks noGrp="1"/>
+          </p:cNvSpPr>
+          <p:nvPr>
+            <p:ph type="body" idx="3" sz="quarter"/>
+          </p:nvPr>
+        </p:nvSpPr>
+        <p:spPr/>
+        <p:txBody>
+          <a:bodyPr/>
+          <a:lstStyle/>
+          <a:p>
+            <a:r>
+              <a:t>Large Language Models are neural networks trained on massive text corpora — books, web pages, code, and more.</a:t>
+            </a:r>
+          </a:p>
+          <a:p/>
+          <a:p>
+            <a:r>
+              <a:t>They learn by predicting the next token, which forces them to internalize language patterns, factual knowledge, and reasoning strategies. The result is billions of parameters encoding what the model has learned.</a:t>
+            </a:r>
+          </a:p>
+          <a:p/>
+          <a:p>
+            <a:r>
+              <a:t>Key point: LLMs are generalists by design. GPT-4 has roughly 1.7 trillion parameters, Llama 3 ranges from 8B to 405B. They can follow instructions, answer questions, and write code — but they're not specialized for any single domain.</a:t>
+            </a:r>
+          </a:p>
+          <a:p/>
+          <a:p>
+            <a:r>
+              <a:t>Think of an LLM as a brilliant generalist: it can discuss any topic but isn't an expert in any single one. That's the gap we'll address today.</a:t>
+            </a:r>
+          </a:p>
+        </p:txBody>
+      </p:sp>
+      <p:sp>
+        <p:nvSpPr>
+          <p:cNvPr id="4" name="Slide Number Placeholder 3"/>
+          <p:cNvSpPr>
+            <a:spLocks noGrp="1"/>
+          </p:cNvSpPr>
+          <p:nvPr>
+            <p:ph type="sldNum" idx="5" sz="quarter"/>
+          </p:nvPr>
+        </p:nvSpPr>
+        <p:spPr/>
+      </p:sp>
+    </p:spTree>
+  </p:cSld>
+  <p:clrMapOvr>
+    <a:masterClrMapping/>
+  </p:clrMapOvr>
+</p:notes>
+</file>
+
+<file path=ppt/notesSlides/notesSlide30.xml><?xml version="1.0" encoding="utf-8"?>
+<p:notes xmlns:a="http://schemas.openxmlformats.org/drawingml/2006/main" xmlns:p="http://schemas.openxmlformats.org/presentationml/2006/main" xmlns:r="http://schemas.openxmlformats.org/officeDocument/2006/relationships">
+  <p:cSld>
+    <p:spTree>
+      <p:nvGrpSpPr>
+        <p:cNvPr id="1" name=""/>
+        <p:cNvGrpSpPr/>
+        <p:nvPr/>
+      </p:nvGrpSpPr>
+      <p:grpSpPr>
+        <a:xfrm>
+          <a:off x="0" y="0"/>
+          <a:ext cx="0" cy="0"/>
+          <a:chOff x="0" y="0"/>
+          <a:chExt cx="0" cy="0"/>
+        </a:xfrm>
+      </p:grpSpPr>
+      <p:sp>
+        <p:nvSpPr>
+          <p:cNvPr id="2" name="Slide Image Placeholder 1"/>
+          <p:cNvSpPr>
+            <a:spLocks noGrp="1"/>
+          </p:cNvSpPr>
+          <p:nvPr>
+            <p:ph type="sldImg" idx="2"/>
+          </p:nvPr>
+        </p:nvSpPr>
+        <p:spPr/>
+      </p:sp>
+      <p:sp>
+        <p:nvSpPr>
+          <p:cNvPr id="3" name="Notes Placeholder 2"/>
+          <p:cNvSpPr>
+            <a:spLocks noGrp="1"/>
+          </p:cNvSpPr>
+          <p:nvPr>
+            <p:ph type="body" idx="3" sz="quarter"/>
+          </p:nvPr>
+        </p:nvSpPr>
+        <p:spPr/>
+        <p:txBody>
+          <a:bodyPr/>
+          <a:lstStyle/>
+          <a:p>
+            <a:r>
+              <a:t>Here's the experiment overview.</a:t>
+            </a:r>
+          </a:p>
+          <a:p/>
+          <a:p>
+            <a:r>
+              <a:t>Experiment 1: BERT-base 110M parameters — sentiment classification. Four approaches compared: Base BERT, FinBERT (fine-tuned), BERT + RAG, FinBERT + RAG (hybrid).</a:t>
+            </a:r>
+          </a:p>
+          <a:p/>
+          <a:p>
+            <a:r>
+              <a:t>Experiment 2: Llama2-7B — numerical reasoning with the same four approaches.</a:t>
+            </a:r>
+          </a:p>
+          <a:p/>
+          <a:p>
+            <a:r>
+              <a:t>Experiment 3: Llama2-7B — financial ratio calculation with the same four approaches.</a:t>
+            </a:r>
+          </a:p>
+          <a:p/>
+          <a:p>
+            <a:r>
+              <a:t>Experiment 4: DistilBERT 66M — spam and phishing detection.</a:t>
+            </a:r>
+          </a:p>
+          <a:p/>
+          <a:p>
+            <a:r>
+              <a:t>Methodology: same architecture and parameter count in each experiment. The ONLY variable is the approach. All results measured in our environment with our models. No cherry-picked numbers.</a:t>
+            </a:r>
+          </a:p>
+        </p:txBody>
+      </p:sp>
+      <p:sp>
+        <p:nvSpPr>
+          <p:cNvPr id="4" name="Slide Number Placeholder 3"/>
+          <p:cNvSpPr>
+            <a:spLocks noGrp="1"/>
+          </p:cNvSpPr>
+          <p:nvPr>
+            <p:ph type="sldNum" idx="5" sz="quarter"/>
+          </p:nvPr>
+        </p:nvSpPr>
+        <p:spPr/>
+      </p:sp>
+    </p:spTree>
+  </p:cSld>
+  <p:clrMapOvr>
+    <a:masterClrMapping/>
+  </p:clrMapOvr>
+</p:notes>
+</file>
+
+<file path=ppt/notesSlides/notesSlide31.xml><?xml version="1.0" encoding="utf-8"?>
+<p:notes xmlns:a="http://schemas.openxmlformats.org/drawingml/2006/main" xmlns:p="http://schemas.openxmlformats.org/presentationml/2006/main" xmlns:r="http://schemas.openxmlformats.org/officeDocument/2006/relationships">
+  <p:cSld>
+    <p:spTree>
+      <p:nvGrpSpPr>
+        <p:cNvPr id="1" name=""/>
+        <p:cNvGrpSpPr/>
+        <p:nvPr/>
+      </p:nvGrpSpPr>
+      <p:grpSpPr>
+        <a:xfrm>
+          <a:off x="0" y="0"/>
+          <a:ext cx="0" cy="0"/>
+          <a:chOff x="0" y="0"/>
+          <a:chExt cx="0" cy="0"/>
+        </a:xfrm>
+      </p:grpSpPr>
+      <p:sp>
+        <p:nvSpPr>
+          <p:cNvPr id="2" name="Slide Image Placeholder 1"/>
+          <p:cNvSpPr>
+            <a:spLocks noGrp="1"/>
+          </p:cNvSpPr>
+          <p:nvPr>
+            <p:ph type="sldImg" idx="2"/>
+          </p:nvPr>
+        </p:nvSpPr>
+        <p:spPr/>
+      </p:sp>
+      <p:sp>
+        <p:nvSpPr>
+          <p:cNvPr id="3" name="Notes Placeholder 2"/>
+          <p:cNvSpPr>
+            <a:spLocks noGrp="1"/>
+          </p:cNvSpPr>
+          <p:nvPr>
+            <p:ph type="body" idx="3" sz="quarter"/>
+          </p:nvPr>
+        </p:nvSpPr>
+        <p:spPr/>
+        <p:txBody>
+          <a:bodyPr/>
+          <a:lstStyle/>
+          <a:p>
+            <a:r>
+              <a:t>Experiment 1: Sentiment Classification using BERT 110M.</a:t>
+            </a:r>
+          </a:p>
+          <a:p/>
+          <a:p>
+            <a:r>
+              <a:t>Results: Base BERT achieves 45% accuracy (9 out of 20 correct). FinBERT (fine-tuned) achieves 70% (14/20). BERT + RAG gets 65% (13/20). And the hybrid FinBERT + RAG also achieves 70% (14/20).</a:t>
+            </a:r>
+          </a:p>
+          <a:p/>
+          <a:p>
+            <a:r>
+              <a:t>Fine-tuning provides a 25 percentage point improvement over the base model. RAG helps too — 20 point improvement — but fine-tuning is still better. The hybrid matches the fine-tuned result here.</a:t>
+            </a:r>
+          </a:p>
+          <a:p/>
+          <a:p>
+            <a:r>
+              <a:t>The charts show the accuracy comparison and per-example breakdown visually.</a:t>
+            </a:r>
+          </a:p>
+        </p:txBody>
+      </p:sp>
+      <p:sp>
+        <p:nvSpPr>
+          <p:cNvPr id="4" name="Slide Number Placeholder 3"/>
+          <p:cNvSpPr>
+            <a:spLocks noGrp="1"/>
+          </p:cNvSpPr>
+          <p:nvPr>
+            <p:ph type="sldNum" idx="5" sz="quarter"/>
+          </p:nvPr>
+        </p:nvSpPr>
+        <p:spPr/>
+      </p:sp>
+    </p:spTree>
+  </p:cSld>
+  <p:clrMapOvr>
+    <a:masterClrMapping/>
+  </p:clrMapOvr>
+</p:notes>
+</file>
+
+<file path=ppt/notesSlides/notesSlide32.xml><?xml version="1.0" encoding="utf-8"?>
+<p:notes xmlns:a="http://schemas.openxmlformats.org/drawingml/2006/main" xmlns:p="http://schemas.openxmlformats.org/presentationml/2006/main" xmlns:r="http://schemas.openxmlformats.org/officeDocument/2006/relationships">
+  <p:cSld>
+    <p:spTree>
+      <p:nvGrpSpPr>
+        <p:cNvPr id="1" name=""/>
+        <p:cNvGrpSpPr/>
+        <p:nvPr/>
+      </p:nvGrpSpPr>
+      <p:grpSpPr>
+        <a:xfrm>
+          <a:off x="0" y="0"/>
+          <a:ext cx="0" cy="0"/>
+          <a:chOff x="0" y="0"/>
+          <a:chExt cx="0" cy="0"/>
+        </a:xfrm>
+      </p:grpSpPr>
+      <p:sp>
+        <p:nvSpPr>
+          <p:cNvPr id="2" name="Slide Image Placeholder 1"/>
+          <p:cNvSpPr>
+            <a:spLocks noGrp="1"/>
+          </p:cNvSpPr>
+          <p:nvPr>
+            <p:ph type="sldImg" idx="2"/>
+          </p:nvPr>
+        </p:nvSpPr>
+        <p:spPr/>
+      </p:sp>
+      <p:sp>
+        <p:nvSpPr>
+          <p:cNvPr id="3" name="Notes Placeholder 2"/>
+          <p:cNvSpPr>
+            <a:spLocks noGrp="1"/>
+          </p:cNvSpPr>
+          <p:nvPr>
+            <p:ph type="body" idx="3" sz="quarter"/>
+          </p:nvPr>
+        </p:nvSpPr>
+        <p:spPr/>
+        <p:txBody>
+          <a:bodyPr/>
+          <a:lstStyle/>
+          <a:p>
+            <a:r>
+              <a:t>Token usage and cost analysis for Experiment 1.</a:t>
+            </a:r>
+          </a:p>
+          <a:p/>
+          <a:p>
+            <a:r>
+              <a:t>Base BERT and FinBERT use just 16 tokens per query — very efficient since sentiment classification is a direct inference task.</a:t>
+            </a:r>
+          </a:p>
+          <a:p/>
+          <a:p>
+            <a:r>
+              <a:t>RAG increases to 76 tokens per query (retrieved context adds overhead), and hybrid uses 92 tokens.</a:t>
+            </a:r>
+          </a:p>
+          <a:p/>
+          <a:p>
+            <a:r>
+              <a:t>Throughput: Base and FinBERT are around 240 tokens/sec. RAG is faster overall at 1,183 tokens/sec due to batching, but remember there's retrieval latency on top of that.</a:t>
+            </a:r>
+          </a:p>
+          <a:p/>
+          <a:p>
+            <a:r>
+              <a:t>Cost comparison: Base and FinBERT cost $0.0002 per 1K queries. RAG costs $0.0008 and hybrid costs $0.0009.</a:t>
+            </a:r>
+          </a:p>
+          <a:p/>
+          <a:p>
+            <a:r>
+              <a:t>For classification tasks, fine-tuning is both more accurate AND cheaper per query than RAG.</a:t>
+            </a:r>
+          </a:p>
+        </p:txBody>
+      </p:sp>
+      <p:sp>
+        <p:nvSpPr>
+          <p:cNvPr id="4" name="Slide Number Placeholder 3"/>
+          <p:cNvSpPr>
+            <a:spLocks noGrp="1"/>
+          </p:cNvSpPr>
+          <p:nvPr>
+            <p:ph type="sldNum" idx="5" sz="quarter"/>
+          </p:nvPr>
+        </p:nvSpPr>
+        <p:spPr/>
+      </p:sp>
+    </p:spTree>
+  </p:cSld>
+  <p:clrMapOvr>
+    <a:masterClrMapping/>
+  </p:clrMapOvr>
+</p:notes>
+</file>
+
+<file path=ppt/notesSlides/notesSlide33.xml><?xml version="1.0" encoding="utf-8"?>
+<p:notes xmlns:a="http://schemas.openxmlformats.org/drawingml/2006/main" xmlns:p="http://schemas.openxmlformats.org/presentationml/2006/main" xmlns:r="http://schemas.openxmlformats.org/officeDocument/2006/relationships">
+  <p:cSld>
+    <p:spTree>
+      <p:nvGrpSpPr>
+        <p:cNvPr id="1" name=""/>
+        <p:cNvGrpSpPr/>
+        <p:nvPr/>
+      </p:nvGrpSpPr>
+      <p:grpSpPr>
+        <a:xfrm>
+          <a:off x="0" y="0"/>
+          <a:ext cx="0" cy="0"/>
+          <a:chOff x="0" y="0"/>
+          <a:chExt cx="0" cy="0"/>
+        </a:xfrm>
+      </p:grpSpPr>
+      <p:sp>
+        <p:nvSpPr>
+          <p:cNvPr id="2" name="Slide Image Placeholder 1"/>
+          <p:cNvSpPr>
+            <a:spLocks noGrp="1"/>
+          </p:cNvSpPr>
+          <p:nvPr>
+            <p:ph type="sldImg" idx="2"/>
+          </p:nvPr>
+        </p:nvSpPr>
+        <p:spPr/>
+      </p:sp>
+      <p:sp>
+        <p:nvSpPr>
+          <p:cNvPr id="3" name="Notes Placeholder 2"/>
+          <p:cNvSpPr>
+            <a:spLocks noGrp="1"/>
+          </p:cNvSpPr>
+          <p:nvPr>
+            <p:ph type="body" idx="3" sz="quarter"/>
+          </p:nvPr>
+        </p:nvSpPr>
+        <p:spPr/>
+        <p:txBody>
+          <a:bodyPr/>
+          <a:lstStyle/>
+          <a:p>
+            <a:r>
+              <a:t>Quality metrics for Experiment 1.</a:t>
+            </a:r>
+          </a:p>
+          <a:p/>
+          <a:p>
+            <a:r>
+              <a:t>F1 Score (macro): FinBERT achieves 0.669 vs Base at 0.347. That's nearly double.</a:t>
+            </a:r>
+          </a:p>
+          <a:p/>
+          <a:p>
+            <a:r>
+              <a:t>Precision: FinBERT hits 0.801 — very few false positives.</a:t>
+            </a:r>
+          </a:p>
+          <a:p/>
+          <a:p>
+            <a:r>
+              <a:t>Interesting class-level patterns: FinBERT excels on negative sentiment (F1=0.800) while RAG actually does better on neutral (F1=0.923). This makes sense — RAG can retrieve examples that help identify "no change" language, but fine-tuning better captures the nuanced negative financial vocabulary.</a:t>
+            </a:r>
+          </a:p>
+          <a:p/>
+          <a:p>
+            <a:r>
+              <a:t>FinBERT shows balanced performance across all sentiment classes, which is the hallmark of a well-fine-tuned model.</a:t>
+            </a:r>
+          </a:p>
+        </p:txBody>
+      </p:sp>
+      <p:sp>
+        <p:nvSpPr>
+          <p:cNvPr id="4" name="Slide Number Placeholder 3"/>
+          <p:cNvSpPr>
+            <a:spLocks noGrp="1"/>
+          </p:cNvSpPr>
+          <p:nvPr>
+            <p:ph type="sldNum" idx="5" sz="quarter"/>
+          </p:nvPr>
+        </p:nvSpPr>
+        <p:spPr/>
+      </p:sp>
+    </p:spTree>
+  </p:cSld>
+  <p:clrMapOvr>
+    <a:masterClrMapping/>
+  </p:clrMapOvr>
+</p:notes>
+</file>
+
+<file path=ppt/notesSlides/notesSlide34.xml><?xml version="1.0" encoding="utf-8"?>
+<p:notes xmlns:a="http://schemas.openxmlformats.org/drawingml/2006/main" xmlns:p="http://schemas.openxmlformats.org/presentationml/2006/main" xmlns:r="http://schemas.openxmlformats.org/officeDocument/2006/relationships">
+  <p:cSld>
+    <p:spTree>
+      <p:nvGrpSpPr>
+        <p:cNvPr id="1" name=""/>
+        <p:cNvGrpSpPr/>
+        <p:nvPr/>
+      </p:nvGrpSpPr>
+      <p:grpSpPr>
+        <a:xfrm>
+          <a:off x="0" y="0"/>
+          <a:ext cx="0" cy="0"/>
+          <a:chOff x="0" y="0"/>
+          <a:chExt cx="0" cy="0"/>
+        </a:xfrm>
+      </p:grpSpPr>
+      <p:sp>
+        <p:nvSpPr>
+          <p:cNvPr id="2" name="Slide Image Placeholder 1"/>
+          <p:cNvSpPr>
+            <a:spLocks noGrp="1"/>
+          </p:cNvSpPr>
+          <p:nvPr>
+            <p:ph type="sldImg" idx="2"/>
+          </p:nvPr>
+        </p:nvSpPr>
+        <p:spPr/>
+      </p:sp>
+      <p:sp>
+        <p:nvSpPr>
+          <p:cNvPr id="3" name="Notes Placeholder 2"/>
+          <p:cNvSpPr>
+            <a:spLocks noGrp="1"/>
+          </p:cNvSpPr>
+          <p:nvPr>
+            <p:ph type="body" idx="3" sz="quarter"/>
+          </p:nvPr>
+        </p:nvSpPr>
+        <p:spPr/>
+        <p:txBody>
+          <a:bodyPr/>
+          <a:lstStyle/>
+          <a:p>
+            <a:r>
+              <a:t>Confidence scores tell an important story.</a:t>
+            </a:r>
+          </a:p>
+          <a:p/>
+          <a:p>
+            <a:r>
+              <a:t>FinBERT averages 0.845 confidence on its predictions vs Base BERT at just 0.375.</a:t>
+            </a:r>
+          </a:p>
+          <a:p/>
+          <a:p>
+            <a:r>
+              <a:t>Fine-tuning doesn't just make the model more accurate — it makes it more decisive. Higher confidence means clearer decision boundaries, which is crucial for production systems where you need to set confidence thresholds for automated processing.</a:t>
+            </a:r>
+          </a:p>
+          <a:p/>
+          <a:p>
+            <a:r>
+              <a:t>A model that's right 70% of the time but confident about it is more useful than one that's right 65% of the time but uncertain, because you can trust the high-confidence predictions and route low-confidence ones to human review.</a:t>
+            </a:r>
+          </a:p>
+        </p:txBody>
+      </p:sp>
+      <p:sp>
+        <p:nvSpPr>
+          <p:cNvPr id="4" name="Slide Number Placeholder 3"/>
+          <p:cNvSpPr>
+            <a:spLocks noGrp="1"/>
+          </p:cNvSpPr>
+          <p:nvPr>
+            <p:ph type="sldNum" idx="5" sz="quarter"/>
+          </p:nvPr>
+        </p:nvSpPr>
+        <p:spPr/>
+      </p:sp>
+    </p:spTree>
+  </p:cSld>
+  <p:clrMapOvr>
+    <a:masterClrMapping/>
+  </p:clrMapOvr>
+</p:notes>
+</file>
+
+<file path=ppt/notesSlides/notesSlide35.xml><?xml version="1.0" encoding="utf-8"?>
+<p:notes xmlns:a="http://schemas.openxmlformats.org/drawingml/2006/main" xmlns:p="http://schemas.openxmlformats.org/presentationml/2006/main" xmlns:r="http://schemas.openxmlformats.org/officeDocument/2006/relationships">
+  <p:cSld>
+    <p:spTree>
+      <p:nvGrpSpPr>
+        <p:cNvPr id="1" name=""/>
+        <p:cNvGrpSpPr/>
+        <p:nvPr/>
+      </p:nvGrpSpPr>
+      <p:grpSpPr>
+        <a:xfrm>
+          <a:off x="0" y="0"/>
+          <a:ext cx="0" cy="0"/>
+          <a:chOff x="0" y="0"/>
+          <a:chExt cx="0" cy="0"/>
+        </a:xfrm>
+      </p:grpSpPr>
+      <p:sp>
+        <p:nvSpPr>
+          <p:cNvPr id="2" name="Slide Image Placeholder 1"/>
+          <p:cNvSpPr>
+            <a:spLocks noGrp="1"/>
+          </p:cNvSpPr>
+          <p:nvPr>
+            <p:ph type="sldImg" idx="2"/>
+          </p:nvPr>
+        </p:nvSpPr>
+        <p:spPr/>
+      </p:sp>
+      <p:sp>
+        <p:nvSpPr>
+          <p:cNvPr id="3" name="Notes Placeholder 2"/>
+          <p:cNvSpPr>
+            <a:spLocks noGrp="1"/>
+          </p:cNvSpPr>
+          <p:nvPr>
+            <p:ph type="body" idx="3" sz="quarter"/>
+          </p:nvPr>
+        </p:nvSpPr>
+        <p:spPr/>
+        <p:txBody>
+          <a:bodyPr/>
+          <a:lstStyle/>
+          <a:p>
+            <a:r>
+              <a:t>Category breakdown reveals where fine-tuning truly shines.</a:t>
+            </a:r>
+          </a:p>
+          <a:p/>
+          <a:p>
+            <a:r>
+              <a:t>Domain Jargon: FinBERT scores 100% vs Base at 33.3%. This is the clearest win — fine-tuning is critical for specialized vocabulary like "headwinds," "margin compression," etc.</a:t>
+            </a:r>
+          </a:p>
+          <a:p/>
+          <a:p>
+            <a:r>
+              <a:t>Straightforward cases: FinBERT also hits 100% vs Base at 80%.</a:t>
+            </a:r>
+          </a:p>
+          <a:p/>
+          <a:p>
+            <a:r>
+              <a:t>Domain Specific: 60% for both FinBERT and Base — some cases are hard regardless.</a:t>
+            </a:r>
+          </a:p>
+          <a:p/>
+          <a:p>
+            <a:r>
+              <a:t>Subtle Neutral: interesting — RAG actually scores 100% here vs FinBERT at 40%. RAG's retrieved examples help identify neutral language better.</a:t>
+            </a:r>
+          </a:p>
+          <a:p/>
+          <a:p>
+            <a:r>
+              <a:t>The takeaway: fine-tuning dominates for domain jargon and clear-cut cases. RAG can complement it for subtle, context-dependent classifications.</a:t>
+            </a:r>
+          </a:p>
+        </p:txBody>
+      </p:sp>
+      <p:sp>
+        <p:nvSpPr>
+          <p:cNvPr id="4" name="Slide Number Placeholder 3"/>
+          <p:cNvSpPr>
+            <a:spLocks noGrp="1"/>
+          </p:cNvSpPr>
+          <p:nvPr>
+            <p:ph type="sldNum" idx="5" sz="quarter"/>
+          </p:nvPr>
+        </p:nvSpPr>
+        <p:spPr/>
+      </p:sp>
+    </p:spTree>
+  </p:cSld>
+  <p:clrMapOvr>
+    <a:masterClrMapping/>
+  </p:clrMapOvr>
+</p:notes>
+</file>
+
+<file path=ppt/notesSlides/notesSlide36.xml><?xml version="1.0" encoding="utf-8"?>
+<p:notes xmlns:a="http://schemas.openxmlformats.org/drawingml/2006/main" xmlns:p="http://schemas.openxmlformats.org/presentationml/2006/main" xmlns:r="http://schemas.openxmlformats.org/officeDocument/2006/relationships">
+  <p:cSld>
+    <p:spTree>
+      <p:nvGrpSpPr>
+        <p:cNvPr id="1" name=""/>
+        <p:cNvGrpSpPr/>
+        <p:nvPr/>
+      </p:nvGrpSpPr>
+      <p:grpSpPr>
+        <a:xfrm>
+          <a:off x="0" y="0"/>
+          <a:ext cx="0" cy="0"/>
+          <a:chOff x="0" y="0"/>
+          <a:chExt cx="0" cy="0"/>
+        </a:xfrm>
+      </p:grpSpPr>
+      <p:sp>
+        <p:nvSpPr>
+          <p:cNvPr id="2" name="Slide Image Placeholder 1"/>
+          <p:cNvSpPr>
+            <a:spLocks noGrp="1"/>
+          </p:cNvSpPr>
+          <p:nvPr>
+            <p:ph type="sldImg" idx="2"/>
+          </p:nvPr>
+        </p:nvSpPr>
+        <p:spPr/>
+      </p:sp>
+      <p:sp>
+        <p:nvSpPr>
+          <p:cNvPr id="3" name="Notes Placeholder 2"/>
+          <p:cNvSpPr>
+            <a:spLocks noGrp="1"/>
+          </p:cNvSpPr>
+          <p:nvPr>
+            <p:ph type="body" idx="3" sz="quarter"/>
+          </p:nvPr>
+        </p:nvSpPr>
+        <p:spPr/>
+        <p:txBody>
+          <a:bodyPr/>
+          <a:lstStyle/>
+          <a:p>
+            <a:r>
+              <a:t>This is the per-example detail table. Let me highlight key examples.</a:t>
+            </a:r>
+          </a:p>
+          <a:p/>
+          <a:p>
+            <a:r>
+              <a:t>Example 2: "Management expects headwinds from deposit competition" — FinBERT correctly identifies NEGATIVE. RAG misclassifies as positive. This is the classic domain jargon case.</a:t>
+            </a:r>
+          </a:p>
+          <a:p/>
+          <a:p>
+            <a:r>
+              <a:t>Example 9: "Provisions for loan losses rose sharply" — FinBERT correctly says NEGATIVE, while Base BERT says positive, confused by the word "rose."</a:t>
+            </a:r>
+          </a:p>
+          <a:p/>
+          <a:p>
+            <a:r>
+              <a:t>Example 3: "The company maintained its quarterly dividend" — FinBERT correctly identifies NEUTRAL, while Base says negative.</a:t>
+            </a:r>
+          </a:p>
+          <a:p/>
+          <a:p>
+            <a:r>
+              <a:t>Example 4: "Credit costs increased significantly" — interestingly, ALL approaches get this wrong, predicting positive instead of negative. Some cases remain challenging even with fine-tuning.</a:t>
+            </a:r>
+          </a:p>
+        </p:txBody>
+      </p:sp>
+      <p:sp>
+        <p:nvSpPr>
+          <p:cNvPr id="4" name="Slide Number Placeholder 3"/>
+          <p:cNvSpPr>
+            <a:spLocks noGrp="1"/>
+          </p:cNvSpPr>
+          <p:nvPr>
+            <p:ph type="sldNum" idx="5" sz="quarter"/>
+          </p:nvPr>
+        </p:nvSpPr>
+        <p:spPr/>
+      </p:sp>
+    </p:spTree>
+  </p:cSld>
+  <p:clrMapOvr>
+    <a:masterClrMapping/>
+  </p:clrMapOvr>
+</p:notes>
+</file>
+
+<file path=ppt/notesSlides/notesSlide37.xml><?xml version="1.0" encoding="utf-8"?>
+<p:notes xmlns:a="http://schemas.openxmlformats.org/drawingml/2006/main" xmlns:p="http://schemas.openxmlformats.org/presentationml/2006/main" xmlns:r="http://schemas.openxmlformats.org/officeDocument/2006/relationships">
+  <p:cSld>
+    <p:spTree>
+      <p:nvGrpSpPr>
+        <p:cNvPr id="1" name=""/>
+        <p:cNvGrpSpPr/>
+        <p:nvPr/>
+      </p:nvGrpSpPr>
+      <p:grpSpPr>
+        <a:xfrm>
+          <a:off x="0" y="0"/>
+          <a:ext cx="0" cy="0"/>
+          <a:chOff x="0" y="0"/>
+          <a:chExt cx="0" cy="0"/>
+        </a:xfrm>
+      </p:grpSpPr>
+      <p:sp>
+        <p:nvSpPr>
+          <p:cNvPr id="2" name="Slide Image Placeholder 1"/>
+          <p:cNvSpPr>
+            <a:spLocks noGrp="1"/>
+          </p:cNvSpPr>
+          <p:nvPr>
+            <p:ph type="sldImg" idx="2"/>
+          </p:nvPr>
+        </p:nvSpPr>
+        <p:spPr/>
+      </p:sp>
+      <p:sp>
+        <p:nvSpPr>
+          <p:cNvPr id="3" name="Notes Placeholder 2"/>
+          <p:cNvSpPr>
+            <a:spLocks noGrp="1"/>
+          </p:cNvSpPr>
+          <p:nvPr>
+            <p:ph type="body" idx="3" sz="quarter"/>
+          </p:nvPr>
+        </p:nvSpPr>
+        <p:spPr/>
+        <p:txBody>
+          <a:bodyPr/>
+          <a:lstStyle/>
+          <a:p>
+            <a:r>
+              <a:t>Experiment 2: Numerical Reasoning using Llama2-7B.</a:t>
+            </a:r>
+          </a:p>
+          <a:p/>
+          <a:p>
+            <a:r>
+              <a:t>This is a humbling result. ALL four approaches score just 20% accuracy — 1 out of 5 correct.</a:t>
+            </a:r>
+          </a:p>
+          <a:p/>
+          <a:p>
+            <a:r>
+              <a:t>This tells us that numerical reasoning is genuinely hard for 7B models, regardless of approach. Neither fine-tuning, RAG, nor hybrid can solve fundamental computational limitations at this model size.</a:t>
+            </a:r>
+          </a:p>
+          <a:p/>
+          <a:p>
+            <a:r>
+              <a:t>However, looking at the detailed results will reveal important nuances beyond simple accuracy.</a:t>
+            </a:r>
+          </a:p>
+        </p:txBody>
+      </p:sp>
+      <p:sp>
+        <p:nvSpPr>
+          <p:cNvPr id="4" name="Slide Number Placeholder 3"/>
+          <p:cNvSpPr>
+            <a:spLocks noGrp="1"/>
+          </p:cNvSpPr>
+          <p:nvPr>
+            <p:ph type="sldNum" idx="5" sz="quarter"/>
+          </p:nvPr>
+        </p:nvSpPr>
+        <p:spPr/>
+      </p:sp>
+    </p:spTree>
+  </p:cSld>
+  <p:clrMapOvr>
+    <a:masterClrMapping/>
+  </p:clrMapOvr>
+</p:notes>
+</file>
+
+<file path=ppt/notesSlides/notesSlide38.xml><?xml version="1.0" encoding="utf-8"?>
+<p:notes xmlns:a="http://schemas.openxmlformats.org/drawingml/2006/main" xmlns:p="http://schemas.openxmlformats.org/presentationml/2006/main" xmlns:r="http://schemas.openxmlformats.org/officeDocument/2006/relationships">
+  <p:cSld>
+    <p:spTree>
+      <p:nvGrpSpPr>
+        <p:cNvPr id="1" name=""/>
+        <p:cNvGrpSpPr/>
+        <p:nvPr/>
+      </p:nvGrpSpPr>
+      <p:grpSpPr>
+        <a:xfrm>
+          <a:off x="0" y="0"/>
+          <a:ext cx="0" cy="0"/>
+          <a:chOff x="0" y="0"/>
+          <a:chExt cx="0" cy="0"/>
+        </a:xfrm>
+      </p:grpSpPr>
+      <p:sp>
+        <p:nvSpPr>
+          <p:cNvPr id="2" name="Slide Image Placeholder 1"/>
+          <p:cNvSpPr>
+            <a:spLocks noGrp="1"/>
+          </p:cNvSpPr>
+          <p:nvPr>
+            <p:ph type="sldImg" idx="2"/>
+          </p:nvPr>
+        </p:nvSpPr>
+        <p:spPr/>
+      </p:sp>
+      <p:sp>
+        <p:nvSpPr>
+          <p:cNvPr id="3" name="Notes Placeholder 2"/>
+          <p:cNvSpPr>
+            <a:spLocks noGrp="1"/>
+          </p:cNvSpPr>
+          <p:nvPr>
+            <p:ph type="body" idx="3" sz="quarter"/>
+          </p:nvPr>
+        </p:nvSpPr>
+        <p:spPr/>
+        <p:txBody>
+          <a:bodyPr/>
+          <a:lstStyle/>
+          <a:p>
+            <a:r>
+              <a:t>Token usage for numerical reasoning shows dramatic differences.</a:t>
+            </a:r>
+          </a:p>
+          <a:p/>
+          <a:p>
+            <a:r>
+              <a:t>Base Llama2-7B uses 314 tokens per query. FinQA-7B is slightly more efficient at 285 tokens. But RAG explodes to 1,638 tokens — the retrieved financial tables and context consume massive prompt space.</a:t>
+            </a:r>
+          </a:p>
+          <a:p/>
+          <a:p>
+            <a:r>
+              <a:t>Cost scales accordingly: $0.06 per 1K queries for Base/FinQA vs $0.33 for RAG. That's 5-6x more expensive.</a:t>
+            </a:r>
+          </a:p>
+          <a:p/>
+          <a:p>
+            <a:r>
+              <a:t>Throughput is also telling: Base generates just 3 tokens/sec while FinQA-7B gets 5 tokens/sec. RAG achieves 12 tokens/sec due to the way parallel retrieval works, but the total wall-clock time is still higher due to the retrieval step.</a:t>
+            </a:r>
+          </a:p>
+        </p:txBody>
+      </p:sp>
+      <p:sp>
+        <p:nvSpPr>
+          <p:cNvPr id="4" name="Slide Number Placeholder 3"/>
+          <p:cNvSpPr>
+            <a:spLocks noGrp="1"/>
+          </p:cNvSpPr>
+          <p:nvPr>
+            <p:ph type="sldNum" idx="5" sz="quarter"/>
+          </p:nvPr>
+        </p:nvSpPr>
+        <p:spPr/>
+      </p:sp>
+    </p:spTree>
+  </p:cSld>
+  <p:clrMapOvr>
+    <a:masterClrMapping/>
+  </p:clrMapOvr>
+</p:notes>
+</file>
+
+<file path=ppt/notesSlides/notesSlide39.xml><?xml version="1.0" encoding="utf-8"?>
+<p:notes xmlns:a="http://schemas.openxmlformats.org/drawingml/2006/main" xmlns:p="http://schemas.openxmlformats.org/presentationml/2006/main" xmlns:r="http://schemas.openxmlformats.org/officeDocument/2006/relationships">
+  <p:cSld>
+    <p:spTree>
+      <p:nvGrpSpPr>
+        <p:cNvPr id="1" name=""/>
+        <p:cNvGrpSpPr/>
+        <p:nvPr/>
+      </p:nvGrpSpPr>
+      <p:grpSpPr>
+        <a:xfrm>
+          <a:off x="0" y="0"/>
+          <a:ext cx="0" cy="0"/>
+          <a:chOff x="0" y="0"/>
+          <a:chExt cx="0" cy="0"/>
+        </a:xfrm>
+      </p:grpSpPr>
+      <p:sp>
+        <p:nvSpPr>
+          <p:cNvPr id="2" name="Slide Image Placeholder 1"/>
+          <p:cNvSpPr>
+            <a:spLocks noGrp="1"/>
+          </p:cNvSpPr>
+          <p:nvPr>
+            <p:ph type="sldImg" idx="2"/>
+          </p:nvPr>
+        </p:nvSpPr>
+        <p:spPr/>
+      </p:sp>
+      <p:sp>
+        <p:nvSpPr>
+          <p:cNvPr id="3" name="Notes Placeholder 2"/>
+          <p:cNvSpPr>
+            <a:spLocks noGrp="1"/>
+          </p:cNvSpPr>
+          <p:nvPr>
+            <p:ph type="body" idx="3" sz="quarter"/>
+          </p:nvPr>
+        </p:nvSpPr>
+        <p:spPr/>
+        <p:txBody>
+          <a:bodyPr/>
+          <a:lstStyle/>
+          <a:p>
+            <a:r>
+              <a:t>The quality metrics reveal what accuracy alone misses.</a:t>
+            </a:r>
+          </a:p>
+          <a:p/>
+          <a:p>
+            <a:r>
+              <a:t>MAPE (Mean Absolute Percentage Error) — how far off are the numerical answers?</a:t>
+            </a:r>
+          </a:p>
+          <a:p/>
+          <a:p>
+            <a:r>
+              <a:t>FinQA-7B has the lowest MAPE at 109.7%. Base is worst at 838.5%. RAG is at 190.6% and hybrid at 232.4%.</a:t>
+            </a:r>
+          </a:p>
+          <a:p/>
+          <a:p>
+            <a:r>
+              <a:t>Even though accuracy is the same (20%), FinQA-7B's answers are CLOSEST to the correct values. When it's wrong, it's less wrong than the others. This matters in practice — being off by 10% is very different from being off by 800%.</a:t>
+            </a:r>
+          </a:p>
+          <a:p/>
+          <a:p>
+            <a:r>
+              <a:t>Lower MAPE means more precise calculations, even when the exact match threshold isn't met.</a:t>
+            </a:r>
+          </a:p>
+        </p:txBody>
+      </p:sp>
+      <p:sp>
+        <p:nvSpPr>
+          <p:cNvPr id="4" name="Slide Number Placeholder 3"/>
+          <p:cNvSpPr>
+            <a:spLocks noGrp="1"/>
+          </p:cNvSpPr>
+          <p:nvPr>
+            <p:ph type="sldNum" idx="5" sz="quarter"/>
+          </p:nvPr>
+        </p:nvSpPr>
+        <p:spPr/>
+      </p:sp>
+    </p:spTree>
+  </p:cSld>
+  <p:clrMapOvr>
+    <a:masterClrMapping/>
+  </p:clrMapOvr>
+</p:notes>
+</file>
+
+<file path=ppt/notesSlides/notesSlide4.xml><?xml version="1.0" encoding="utf-8"?>
+<p:notes xmlns:a="http://schemas.openxmlformats.org/drawingml/2006/main" xmlns:p="http://schemas.openxmlformats.org/presentationml/2006/main" xmlns:r="http://schemas.openxmlformats.org/officeDocument/2006/relationships">
+  <p:cSld>
+    <p:spTree>
+      <p:nvGrpSpPr>
+        <p:cNvPr id="1" name=""/>
+        <p:cNvGrpSpPr/>
+        <p:nvPr/>
+      </p:nvGrpSpPr>
+      <p:grpSpPr>
+        <a:xfrm>
+          <a:off x="0" y="0"/>
+          <a:ext cx="0" cy="0"/>
+          <a:chOff x="0" y="0"/>
+          <a:chExt cx="0" cy="0"/>
+        </a:xfrm>
+      </p:grpSpPr>
+      <p:sp>
+        <p:nvSpPr>
+          <p:cNvPr id="2" name="Slide Image Placeholder 1"/>
+          <p:cNvSpPr>
+            <a:spLocks noGrp="1"/>
+          </p:cNvSpPr>
+          <p:nvPr>
+            <p:ph type="sldImg" idx="2"/>
+          </p:nvPr>
+        </p:nvSpPr>
+        <p:spPr/>
+      </p:sp>
+      <p:sp>
+        <p:nvSpPr>
+          <p:cNvPr id="3" name="Notes Placeholder 2"/>
+          <p:cNvSpPr>
+            <a:spLocks noGrp="1"/>
+          </p:cNvSpPr>
+          <p:nvPr>
+            <p:ph type="body" idx="3" sz="quarter"/>
+          </p:nvPr>
+        </p:nvSpPr>
+        <p:spPr/>
+        <p:txBody>
+          <a:bodyPr/>
+          <a:lstStyle/>
+          <a:p>
+            <a:r>
+              <a:t>This is the core problem. Generic LLMs struggle with precise financial calculations, industry-specific terminology, domain reasoning patterns, and consistent output formats.</a:t>
+            </a:r>
+          </a:p>
+          <a:p/>
+          <a:p>
+            <a:r>
+              <a:t>Meanwhile, domain experts need accurate and verifiable answers, correct specialized vocabulary, step-by-step reasoning, consistent auditable output, and speed.</a:t>
+            </a:r>
+          </a:p>
+          <a:p/>
+          <a:p>
+            <a:r>
+              <a:t>Here's a concrete example: ask a generic LLM to calculate a bank's efficiency ratio from a financial table. It may know the definition, but it often gets the actual calculation wrong. That gap between "knowing the concept" and "executing correctly" is exactly what we need to solve.</a:t>
+            </a:r>
+          </a:p>
+        </p:txBody>
+      </p:sp>
+      <p:sp>
+        <p:nvSpPr>
+          <p:cNvPr id="4" name="Slide Number Placeholder 3"/>
+          <p:cNvSpPr>
+            <a:spLocks noGrp="1"/>
+          </p:cNvSpPr>
+          <p:nvPr>
+            <p:ph type="sldNum" idx="5" sz="quarter"/>
+          </p:nvPr>
+        </p:nvSpPr>
+        <p:spPr/>
+      </p:sp>
+    </p:spTree>
+  </p:cSld>
+  <p:clrMapOvr>
+    <a:masterClrMapping/>
+  </p:clrMapOvr>
+</p:notes>
+</file>
+
+<file path=ppt/notesSlides/notesSlide40.xml><?xml version="1.0" encoding="utf-8"?>
+<p:notes xmlns:a="http://schemas.openxmlformats.org/drawingml/2006/main" xmlns:p="http://schemas.openxmlformats.org/presentationml/2006/main" xmlns:r="http://schemas.openxmlformats.org/officeDocument/2006/relationships">
+  <p:cSld>
+    <p:spTree>
+      <p:nvGrpSpPr>
+        <p:cNvPr id="1" name=""/>
+        <p:cNvGrpSpPr/>
+        <p:nvPr/>
+      </p:nvGrpSpPr>
+      <p:grpSpPr>
+        <a:xfrm>
+          <a:off x="0" y="0"/>
+          <a:ext cx="0" cy="0"/>
+          <a:chOff x="0" y="0"/>
+          <a:chExt cx="0" cy="0"/>
+        </a:xfrm>
+      </p:grpSpPr>
+      <p:sp>
+        <p:nvSpPr>
+          <p:cNvPr id="2" name="Slide Image Placeholder 1"/>
+          <p:cNvSpPr>
+            <a:spLocks noGrp="1"/>
+          </p:cNvSpPr>
+          <p:nvPr>
+            <p:ph type="sldImg" idx="2"/>
+          </p:nvPr>
+        </p:nvSpPr>
+        <p:spPr/>
+      </p:sp>
+      <p:sp>
+        <p:nvSpPr>
+          <p:cNvPr id="3" name="Notes Placeholder 2"/>
+          <p:cNvSpPr>
+            <a:spLocks noGrp="1"/>
+          </p:cNvSpPr>
+          <p:nvPr>
+            <p:ph type="body" idx="3" sz="quarter"/>
+          </p:nvPr>
+        </p:nvSpPr>
+        <p:spPr/>
+        <p:txBody>
+          <a:bodyPr/>
+          <a:lstStyle/>
+          <a:p>
+            <a:r>
+              <a:t>Category breakdown shows an interesting split.</a:t>
+            </a:r>
+          </a:p>
+          <a:p/>
+          <a:p>
+            <a:r>
+              <a:t>Multi-step problems (2 cases): RAG actually gets 50% right here, while all others get 0%. Retrieved context can sometimes guide multi-step reasoning.</a:t>
+            </a:r>
+          </a:p>
+          <a:p/>
+          <a:p>
+            <a:r>
+              <a:t>Single-step problems (3 cases): Base and FinQA-7B both get 33.3% right. FinQA-7B matches here but RAG drops to 0%.</a:t>
+            </a:r>
+          </a:p>
+          <a:p/>
+          <a:p>
+            <a:r>
+              <a:t>The pattern: RAG helps with multi-step problems where relevant context and examples guide the calculation. Fine-tuning helps with single-step problems where learned computation patterns apply directly.</a:t>
+            </a:r>
+          </a:p>
+          <a:p/>
+          <a:p>
+            <a:r>
+              <a:t>With only 5 test cases, these percentages should be interpreted carefully — but the pattern is directionally interesting.</a:t>
+            </a:r>
+          </a:p>
+        </p:txBody>
+      </p:sp>
+      <p:sp>
+        <p:nvSpPr>
+          <p:cNvPr id="4" name="Slide Number Placeholder 3"/>
+          <p:cNvSpPr>
+            <a:spLocks noGrp="1"/>
+          </p:cNvSpPr>
+          <p:nvPr>
+            <p:ph type="sldNum" idx="5" sz="quarter"/>
+          </p:nvPr>
+        </p:nvSpPr>
+        <p:spPr/>
+      </p:sp>
+    </p:spTree>
+  </p:cSld>
+  <p:clrMapOvr>
+    <a:masterClrMapping/>
+  </p:clrMapOvr>
+</p:notes>
+</file>
+
+<file path=ppt/notesSlides/notesSlide41.xml><?xml version="1.0" encoding="utf-8"?>
+<p:notes xmlns:a="http://schemas.openxmlformats.org/drawingml/2006/main" xmlns:p="http://schemas.openxmlformats.org/presentationml/2006/main" xmlns:r="http://schemas.openxmlformats.org/officeDocument/2006/relationships">
+  <p:cSld>
+    <p:spTree>
+      <p:nvGrpSpPr>
+        <p:cNvPr id="1" name=""/>
+        <p:cNvGrpSpPr/>
+        <p:nvPr/>
+      </p:nvGrpSpPr>
+      <p:grpSpPr>
+        <a:xfrm>
+          <a:off x="0" y="0"/>
+          <a:ext cx="0" cy="0"/>
+          <a:chOff x="0" y="0"/>
+          <a:chExt cx="0" cy="0"/>
+        </a:xfrm>
+      </p:grpSpPr>
+      <p:sp>
+        <p:nvSpPr>
+          <p:cNvPr id="2" name="Slide Image Placeholder 1"/>
+          <p:cNvSpPr>
+            <a:spLocks noGrp="1"/>
+          </p:cNvSpPr>
+          <p:nvPr>
+            <p:ph type="sldImg" idx="2"/>
+          </p:nvPr>
+        </p:nvSpPr>
+        <p:spPr/>
+      </p:sp>
+      <p:sp>
+        <p:nvSpPr>
+          <p:cNvPr id="3" name="Notes Placeholder 2"/>
+          <p:cNvSpPr>
+            <a:spLocks noGrp="1"/>
+          </p:cNvSpPr>
+          <p:nvPr>
+            <p:ph type="body" idx="3" sz="quarter"/>
+          </p:nvPr>
+        </p:nvSpPr>
+        <p:spPr/>
+        <p:txBody>
+          <a:bodyPr/>
+          <a:lstStyle/>
+          <a:p>
+            <a:r>
+              <a:t>Per-example details for numerical reasoning.</a:t>
+            </a:r>
+          </a:p>
+          <a:p/>
+          <a:p>
+            <a:r>
+              <a:t>Example 2 — Debt-to-equity ratio: Base and FinQA-7B both get 1.11 (expected 1.10) — very close, marked correct. RAG answers 10, way off.</a:t>
+            </a:r>
+          </a:p>
+          <a:p/>
+          <a:p>
+            <a:r>
+              <a:t>Example 3 — Efficiency ratio: Hybrid (FinQA-7B + RAG) nails it at 57.3 vs expected 56.57. Base and FinQA-7B return 0.57 — they computed the ratio but forgot to multiply by 100.</a:t>
+            </a:r>
+          </a:p>
+          <a:p/>
+          <a:p>
+            <a:r>
+              <a:t>Example 4 — Return on Equity: RAG gets closest at 18.1 vs expected 17.98. Base and FinQA-7B return 0.18 — again, right calculation but missing the percentage conversion.</a:t>
+            </a:r>
+          </a:p>
+          <a:p/>
+          <a:p>
+            <a:r>
+              <a:t>This reveals a consistent pattern: fine-tuned models often get the computation right but miss formatting conventions (percentage vs decimal). RAG sometimes gets the format right from retrieved examples.</a:t>
+            </a:r>
+          </a:p>
+        </p:txBody>
+      </p:sp>
+      <p:sp>
+        <p:nvSpPr>
+          <p:cNvPr id="4" name="Slide Number Placeholder 3"/>
+          <p:cNvSpPr>
+            <a:spLocks noGrp="1"/>
+          </p:cNvSpPr>
+          <p:nvPr>
+            <p:ph type="sldNum" idx="5" sz="quarter"/>
+          </p:nvPr>
+        </p:nvSpPr>
+        <p:spPr/>
+      </p:sp>
+    </p:spTree>
+  </p:cSld>
+  <p:clrMapOvr>
+    <a:masterClrMapping/>
+  </p:clrMapOvr>
+</p:notes>
+</file>
+
+<file path=ppt/notesSlides/notesSlide42.xml><?xml version="1.0" encoding="utf-8"?>
+<p:notes xmlns:a="http://schemas.openxmlformats.org/drawingml/2006/main" xmlns:p="http://schemas.openxmlformats.org/presentationml/2006/main" xmlns:r="http://schemas.openxmlformats.org/officeDocument/2006/relationships">
+  <p:cSld>
+    <p:spTree>
+      <p:nvGrpSpPr>
+        <p:cNvPr id="1" name=""/>
+        <p:cNvGrpSpPr/>
+        <p:nvPr/>
+      </p:nvGrpSpPr>
+      <p:grpSpPr>
+        <a:xfrm>
+          <a:off x="0" y="0"/>
+          <a:ext cx="0" cy="0"/>
+          <a:chOff x="0" y="0"/>
+          <a:chExt cx="0" cy="0"/>
+        </a:xfrm>
+      </p:grpSpPr>
+      <p:sp>
+        <p:nvSpPr>
+          <p:cNvPr id="2" name="Slide Image Placeholder 1"/>
+          <p:cNvSpPr>
+            <a:spLocks noGrp="1"/>
+          </p:cNvSpPr>
+          <p:nvPr>
+            <p:ph type="sldImg" idx="2"/>
+          </p:nvPr>
+        </p:nvSpPr>
+        <p:spPr/>
+      </p:sp>
+      <p:sp>
+        <p:nvSpPr>
+          <p:cNvPr id="3" name="Notes Placeholder 2"/>
+          <p:cNvSpPr>
+            <a:spLocks noGrp="1"/>
+          </p:cNvSpPr>
+          <p:nvPr>
+            <p:ph type="body" idx="3" sz="quarter"/>
+          </p:nvPr>
+        </p:nvSpPr>
+        <p:spPr/>
+        <p:txBody>
+          <a:bodyPr/>
+          <a:lstStyle/>
+          <a:p>
+            <a:r>
+              <a:t>Experiment 3: Financial Ratios — a more extensive test with 8 cases.</a:t>
+            </a:r>
+          </a:p>
+          <a:p/>
+          <a:p>
+            <a:r>
+              <a:t>Here we see differentiation: FinQA-7B (fine-tuned) leads at 37.5% accuracy (3/8). Base gets 25% (2/8). RAG gets only 12.5% (1/8). Hybrid gets 25% (2/8).</a:t>
+            </a:r>
+          </a:p>
+          <a:p/>
+          <a:p>
+            <a:r>
+              <a:t>Fine-tuning wins by a clear margin on financial ratio calculations. RAG actually performs WORST — retrieval alone isn't enough for complex financial computations.</a:t>
+            </a:r>
+          </a:p>
+          <a:p/>
+          <a:p>
+            <a:r>
+              <a:t>The charts show FinQA-7B consistently outperforming on these calculation-intensive tasks.</a:t>
+            </a:r>
+          </a:p>
+        </p:txBody>
+      </p:sp>
+      <p:sp>
+        <p:nvSpPr>
+          <p:cNvPr id="4" name="Slide Number Placeholder 3"/>
+          <p:cNvSpPr>
+            <a:spLocks noGrp="1"/>
+          </p:cNvSpPr>
+          <p:nvPr>
+            <p:ph type="sldNum" idx="5" sz="quarter"/>
+          </p:nvPr>
+        </p:nvSpPr>
+        <p:spPr/>
+      </p:sp>
+    </p:spTree>
+  </p:cSld>
+  <p:clrMapOvr>
+    <a:masterClrMapping/>
+  </p:clrMapOvr>
+</p:notes>
+</file>
+
+<file path=ppt/notesSlides/notesSlide43.xml><?xml version="1.0" encoding="utf-8"?>
+<p:notes xmlns:a="http://schemas.openxmlformats.org/drawingml/2006/main" xmlns:p="http://schemas.openxmlformats.org/presentationml/2006/main" xmlns:r="http://schemas.openxmlformats.org/officeDocument/2006/relationships">
+  <p:cSld>
+    <p:spTree>
+      <p:nvGrpSpPr>
+        <p:cNvPr id="1" name=""/>
+        <p:cNvGrpSpPr/>
+        <p:nvPr/>
+      </p:nvGrpSpPr>
+      <p:grpSpPr>
+        <a:xfrm>
+          <a:off x="0" y="0"/>
+          <a:ext cx="0" cy="0"/>
+          <a:chOff x="0" y="0"/>
+          <a:chExt cx="0" cy="0"/>
+        </a:xfrm>
+      </p:grpSpPr>
+      <p:sp>
+        <p:nvSpPr>
+          <p:cNvPr id="2" name="Slide Image Placeholder 1"/>
+          <p:cNvSpPr>
+            <a:spLocks noGrp="1"/>
+          </p:cNvSpPr>
+          <p:nvPr>
+            <p:ph type="sldImg" idx="2"/>
+          </p:nvPr>
+        </p:nvSpPr>
+        <p:spPr/>
+      </p:sp>
+      <p:sp>
+        <p:nvSpPr>
+          <p:cNvPr id="3" name="Notes Placeholder 2"/>
+          <p:cNvSpPr>
+            <a:spLocks noGrp="1"/>
+          </p:cNvSpPr>
+          <p:nvPr>
+            <p:ph type="body" idx="3" sz="quarter"/>
+          </p:nvPr>
+        </p:nvSpPr>
+        <p:spPr/>
+        <p:txBody>
+          <a:bodyPr/>
+          <a:lstStyle/>
+          <a:p>
+            <a:r>
+              <a:t>Token usage and cost for financial ratios.</a:t>
+            </a:r>
+          </a:p>
+          <a:p/>
+          <a:p>
+            <a:r>
+              <a:t>Token counts are even higher than numerical reasoning: Base uses 477 tokens per query, FinQA-7B uses 503, RAG uses 1,731, hybrid uses 1,801.</a:t>
+            </a:r>
+          </a:p>
+          <a:p/>
+          <a:p>
+            <a:r>
+              <a:t>Completion tokens are substantial here — the models generate detailed working: Base produces 2,295 completion tokens total, FinQA-7B produces 2,542.</a:t>
+            </a:r>
+          </a:p>
+          <a:p/>
+          <a:p>
+            <a:r>
+              <a:t>Cost: Base is $0.095/1K queries. FinQA-7B is similar at $0.10. RAG jumps to $0.35 and hybrid to $0.36.</a:t>
+            </a:r>
+          </a:p>
+          <a:p/>
+          <a:p>
+            <a:r>
+              <a:t>RAG costs 3.5x more per query while achieving the LOWEST accuracy. For financial ratio calculations, fine-tuning is clearly the better investment.</a:t>
+            </a:r>
+          </a:p>
+        </p:txBody>
+      </p:sp>
+      <p:sp>
+        <p:nvSpPr>
+          <p:cNvPr id="4" name="Slide Number Placeholder 3"/>
+          <p:cNvSpPr>
+            <a:spLocks noGrp="1"/>
+          </p:cNvSpPr>
+          <p:nvPr>
+            <p:ph type="sldNum" idx="5" sz="quarter"/>
+          </p:nvPr>
+        </p:nvSpPr>
+        <p:spPr/>
+      </p:sp>
+    </p:spTree>
+  </p:cSld>
+  <p:clrMapOvr>
+    <a:masterClrMapping/>
+  </p:clrMapOvr>
+</p:notes>
+</file>
+
+<file path=ppt/notesSlides/notesSlide44.xml><?xml version="1.0" encoding="utf-8"?>
+<p:notes xmlns:a="http://schemas.openxmlformats.org/drawingml/2006/main" xmlns:p="http://schemas.openxmlformats.org/presentationml/2006/main" xmlns:r="http://schemas.openxmlformats.org/officeDocument/2006/relationships">
+  <p:cSld>
+    <p:spTree>
+      <p:nvGrpSpPr>
+        <p:cNvPr id="1" name=""/>
+        <p:cNvGrpSpPr/>
+        <p:nvPr/>
+      </p:nvGrpSpPr>
+      <p:grpSpPr>
+        <a:xfrm>
+          <a:off x="0" y="0"/>
+          <a:ext cx="0" cy="0"/>
+          <a:chOff x="0" y="0"/>
+          <a:chExt cx="0" cy="0"/>
+        </a:xfrm>
+      </p:grpSpPr>
+      <p:sp>
+        <p:nvSpPr>
+          <p:cNvPr id="2" name="Slide Image Placeholder 1"/>
+          <p:cNvSpPr>
+            <a:spLocks noGrp="1"/>
+          </p:cNvSpPr>
+          <p:nvPr>
+            <p:ph type="sldImg" idx="2"/>
+          </p:nvPr>
+        </p:nvSpPr>
+        <p:spPr/>
+      </p:sp>
+      <p:sp>
+        <p:nvSpPr>
+          <p:cNvPr id="3" name="Notes Placeholder 2"/>
+          <p:cNvSpPr>
+            <a:spLocks noGrp="1"/>
+          </p:cNvSpPr>
+          <p:nvPr>
+            <p:ph type="body" idx="3" sz="quarter"/>
+          </p:nvPr>
+        </p:nvSpPr>
+        <p:spPr/>
+        <p:txBody>
+          <a:bodyPr/>
+          <a:lstStyle/>
+          <a:p>
+            <a:r>
+              <a:t>Quality metrics for financial ratios show a surprising result.</a:t>
+            </a:r>
+          </a:p>
+          <a:p/>
+          <a:p>
+            <a:r>
+              <a:t>MAPE: Base Llama2-7B actually has the LOWEST MAPE at 21.4%. FinQA-7B is at 103.4%. RAG at 34.4%. Hybrid at 45.9%.</a:t>
+            </a:r>
+          </a:p>
+          <a:p/>
+          <a:p>
+            <a:r>
+              <a:t>Wait — how can Base have the lowest MAPE but not the highest accuracy? Because MAPE measures average error magnitude, while accuracy uses a strict threshold. Base gets close on many answers but only crosses the exact-match threshold twice. FinQA-7B gets three exact matches but has larger errors on the ones it misses.</a:t>
+            </a:r>
+          </a:p>
+          <a:p/>
+          <a:p>
+            <a:r>
+              <a:t>This highlights the importance of looking at multiple metrics. Accuracy alone doesn't tell the full story.</a:t>
+            </a:r>
+          </a:p>
+        </p:txBody>
+      </p:sp>
+      <p:sp>
+        <p:nvSpPr>
+          <p:cNvPr id="4" name="Slide Number Placeholder 3"/>
+          <p:cNvSpPr>
+            <a:spLocks noGrp="1"/>
+          </p:cNvSpPr>
+          <p:nvPr>
+            <p:ph type="sldNum" idx="5" sz="quarter"/>
+          </p:nvPr>
+        </p:nvSpPr>
+        <p:spPr/>
+      </p:sp>
+    </p:spTree>
+  </p:cSld>
+  <p:clrMapOvr>
+    <a:masterClrMapping/>
+  </p:clrMapOvr>
+</p:notes>
+</file>
+
+<file path=ppt/notesSlides/notesSlide45.xml><?xml version="1.0" encoding="utf-8"?>
+<p:notes xmlns:a="http://schemas.openxmlformats.org/drawingml/2006/main" xmlns:p="http://schemas.openxmlformats.org/presentationml/2006/main" xmlns:r="http://schemas.openxmlformats.org/officeDocument/2006/relationships">
+  <p:cSld>
+    <p:spTree>
+      <p:nvGrpSpPr>
+        <p:cNvPr id="1" name=""/>
+        <p:cNvGrpSpPr/>
+        <p:nvPr/>
+      </p:nvGrpSpPr>
+      <p:grpSpPr>
+        <a:xfrm>
+          <a:off x="0" y="0"/>
+          <a:ext cx="0" cy="0"/>
+          <a:chOff x="0" y="0"/>
+          <a:chExt cx="0" cy="0"/>
+        </a:xfrm>
+      </p:grpSpPr>
+      <p:sp>
+        <p:nvSpPr>
+          <p:cNvPr id="2" name="Slide Image Placeholder 1"/>
+          <p:cNvSpPr>
+            <a:spLocks noGrp="1"/>
+          </p:cNvSpPr>
+          <p:nvPr>
+            <p:ph type="sldImg" idx="2"/>
+          </p:nvPr>
+        </p:nvSpPr>
+        <p:spPr/>
+      </p:sp>
+      <p:sp>
+        <p:nvSpPr>
+          <p:cNvPr id="3" name="Notes Placeholder 2"/>
+          <p:cNvSpPr>
+            <a:spLocks noGrp="1"/>
+          </p:cNvSpPr>
+          <p:nvPr>
+            <p:ph type="body" idx="3" sz="quarter"/>
+          </p:nvPr>
+        </p:nvSpPr>
+        <p:spPr/>
+        <p:txBody>
+          <a:bodyPr/>
+          <a:lstStyle/>
+          <a:p>
+            <a:r>
+              <a:t>Category breakdown across five financial ratio categories.</a:t>
+            </a:r>
+          </a:p>
+          <a:p/>
+          <a:p>
+            <a:r>
+              <a:t>Efficiency (1 case): nobody gets it right — 0% across the board.</a:t>
+            </a:r>
+          </a:p>
+          <a:p/>
+          <a:p>
+            <a:r>
+              <a:t>Leverage (2 cases): FinQA-7B, RAG, and hybrid all get 50%. Only Base misses both.</a:t>
+            </a:r>
+          </a:p>
+          <a:p/>
+          <a:p>
+            <a:r>
+              <a:t>Liquidity (2 cases): Base and FinQA-7B get 50%. RAG gets 0%. Hybrid gets 50%.</a:t>
+            </a:r>
+          </a:p>
+          <a:p/>
+          <a:p>
+            <a:r>
+              <a:t>Profitability (2 cases): everyone gets 0%. These are the hardest calculations.</a:t>
+            </a:r>
+          </a:p>
+          <a:p/>
+          <a:p>
+            <a:r>
+              <a:t>Shareholder (1 case): Base and FinQA-7B get 100%. RAG and hybrid both miss.</a:t>
+            </a:r>
+          </a:p>
+          <a:p/>
+          <a:p>
+            <a:r>
+              <a:t>Fine-tuning helps most on leverage and liquidity ratios. Profitability ratios remain challenging for all approaches at the 7B model size.</a:t>
+            </a:r>
+          </a:p>
+        </p:txBody>
+      </p:sp>
+      <p:sp>
+        <p:nvSpPr>
+          <p:cNvPr id="4" name="Slide Number Placeholder 3"/>
+          <p:cNvSpPr>
+            <a:spLocks noGrp="1"/>
+          </p:cNvSpPr>
+          <p:nvPr>
+            <p:ph type="sldNum" idx="5" sz="quarter"/>
+          </p:nvPr>
+        </p:nvSpPr>
+        <p:spPr/>
+      </p:sp>
+    </p:spTree>
+  </p:cSld>
+  <p:clrMapOvr>
+    <a:masterClrMapping/>
+  </p:clrMapOvr>
+</p:notes>
+</file>
+
+<file path=ppt/notesSlides/notesSlide46.xml><?xml version="1.0" encoding="utf-8"?>
+<p:notes xmlns:a="http://schemas.openxmlformats.org/drawingml/2006/main" xmlns:p="http://schemas.openxmlformats.org/presentationml/2006/main" xmlns:r="http://schemas.openxmlformats.org/officeDocument/2006/relationships">
+  <p:cSld>
+    <p:spTree>
+      <p:nvGrpSpPr>
+        <p:cNvPr id="1" name=""/>
+        <p:cNvGrpSpPr/>
+        <p:nvPr/>
+      </p:nvGrpSpPr>
+      <p:grpSpPr>
+        <a:xfrm>
+          <a:off x="0" y="0"/>
+          <a:ext cx="0" cy="0"/>
+          <a:chOff x="0" y="0"/>
+          <a:chExt cx="0" cy="0"/>
+        </a:xfrm>
+      </p:grpSpPr>
+      <p:sp>
+        <p:nvSpPr>
+          <p:cNvPr id="2" name="Slide Image Placeholder 1"/>
+          <p:cNvSpPr>
+            <a:spLocks noGrp="1"/>
+          </p:cNvSpPr>
+          <p:nvPr>
+            <p:ph type="sldImg" idx="2"/>
+          </p:nvPr>
+        </p:nvSpPr>
+        <p:spPr/>
+      </p:sp>
+      <p:sp>
+        <p:nvSpPr>
+          <p:cNvPr id="3" name="Notes Placeholder 2"/>
+          <p:cNvSpPr>
+            <a:spLocks noGrp="1"/>
+          </p:cNvSpPr>
+          <p:nvPr>
+            <p:ph type="body" idx="3" sz="quarter"/>
+          </p:nvPr>
+        </p:nvSpPr>
+        <p:spPr/>
+        <p:txBody>
+          <a:bodyPr/>
+          <a:lstStyle/>
+          <a:p>
+            <a:r>
+              <a:t>Detailed per-example results for all 8 financial ratio questions.</a:t>
+            </a:r>
+          </a:p>
+          <a:p/>
+          <a:p>
+            <a:r>
+              <a:t>Notable results:</a:t>
+            </a:r>
+          </a:p>
+          <a:p>
+            <a:r>
+              <a:t>- Working capital (Example 3): Base, FinQA-7B, and hybrid all get it right (~37.5-37.8 vs expected 37.55). RAG is off at 41.7.</a:t>
+            </a:r>
+          </a:p>
+          <a:p>
+            <a:r>
+              <a:t>- Debt-to-equity (Example 4): FinQA-7B, RAG, and hybrid all nail 1.43-1.45. Base is off at 1.20.</a:t>
+            </a:r>
+          </a:p>
+          <a:p>
+            <a:r>
+              <a:t>- Sustainable growth rate (Example 7): Base and FinQA-7B both get 12 vs expected 12.59. RAG and hybrid are off at 18.</a:t>
+            </a:r>
+          </a:p>
+          <a:p>
+            <a:r>
+              <a:t>- Interest coverage (Example 8): All approaches overshoot — answers range from 25 to 31.7 vs expected 21.74.</a:t>
+            </a:r>
+          </a:p>
+          <a:p/>
+          <a:p>
+            <a:r>
+              <a:t>The data shows FinQA-7B is most consistent across different ratio types, though no approach dominates all categories.</a:t>
+            </a:r>
+          </a:p>
+        </p:txBody>
+      </p:sp>
+      <p:sp>
+        <p:nvSpPr>
+          <p:cNvPr id="4" name="Slide Number Placeholder 3"/>
+          <p:cNvSpPr>
+            <a:spLocks noGrp="1"/>
+          </p:cNvSpPr>
+          <p:nvPr>
+            <p:ph type="sldNum" idx="5" sz="quarter"/>
+          </p:nvPr>
+        </p:nvSpPr>
+        <p:spPr/>
+      </p:sp>
+    </p:spTree>
+  </p:cSld>
+  <p:clrMapOvr>
+    <a:masterClrMapping/>
+  </p:clrMapOvr>
+</p:notes>
+</file>
+
+<file path=ppt/notesSlides/notesSlide47.xml><?xml version="1.0" encoding="utf-8"?>
+<p:notes xmlns:a="http://schemas.openxmlformats.org/drawingml/2006/main" xmlns:p="http://schemas.openxmlformats.org/presentationml/2006/main" xmlns:r="http://schemas.openxmlformats.org/officeDocument/2006/relationships">
+  <p:cSld>
+    <p:spTree>
+      <p:nvGrpSpPr>
+        <p:cNvPr id="1" name=""/>
+        <p:cNvGrpSpPr/>
+        <p:nvPr/>
+      </p:nvGrpSpPr>
+      <p:grpSpPr>
+        <a:xfrm>
+          <a:off x="0" y="0"/>
+          <a:ext cx="0" cy="0"/>
+          <a:chOff x="0" y="0"/>
+          <a:chExt cx="0" cy="0"/>
+        </a:xfrm>
+      </p:grpSpPr>
+      <p:sp>
+        <p:nvSpPr>
+          <p:cNvPr id="2" name="Slide Image Placeholder 1"/>
+          <p:cNvSpPr>
+            <a:spLocks noGrp="1"/>
+          </p:cNvSpPr>
+          <p:nvPr>
+            <p:ph type="sldImg" idx="2"/>
+          </p:nvPr>
+        </p:nvSpPr>
+        <p:spPr/>
+      </p:sp>
+      <p:sp>
+        <p:nvSpPr>
+          <p:cNvPr id="3" name="Notes Placeholder 2"/>
+          <p:cNvSpPr>
+            <a:spLocks noGrp="1"/>
+          </p:cNvSpPr>
+          <p:nvPr>
+            <p:ph type="body" idx="3" sz="quarter"/>
+          </p:nvPr>
+        </p:nvSpPr>
+        <p:spPr/>
+        <p:txBody>
+          <a:bodyPr/>
+          <a:lstStyle/>
+          <a:p>
+            <a:r>
+              <a:t>Experiment 4: Spam Detection using DistilBERT 66M.</a:t>
+            </a:r>
+          </a:p>
+          <a:p/>
+          <a:p>
+            <a:r>
+              <a:t>This is our strongest result. Fine-tuned achieves 95% accuracy (19/20). Base gets 85% (17/20). RAG gets 90% (18/20). Hybrid matches fine-tuned at 95% (19/20).</a:t>
+            </a:r>
+          </a:p>
+          <a:p/>
+          <a:p>
+            <a:r>
+              <a:t>A 10 percentage point improvement from fine-tuning, and RAG also provides a meaningful 5 point lift over base.</a:t>
+            </a:r>
+          </a:p>
+          <a:p/>
+          <a:p>
+            <a:r>
+              <a:t>For a task like spam detection where speed and accuracy both matter, fine-tuning is the clear winner — it's both more accurate and faster than RAG since there's no retrieval overhead.</a:t>
+            </a:r>
+          </a:p>
+        </p:txBody>
+      </p:sp>
+      <p:sp>
+        <p:nvSpPr>
+          <p:cNvPr id="4" name="Slide Number Placeholder 3"/>
+          <p:cNvSpPr>
+            <a:spLocks noGrp="1"/>
+          </p:cNvSpPr>
+          <p:nvPr>
+            <p:ph type="sldNum" idx="5" sz="quarter"/>
+          </p:nvPr>
+        </p:nvSpPr>
+        <p:spPr/>
+      </p:sp>
+    </p:spTree>
+  </p:cSld>
+  <p:clrMapOvr>
+    <a:masterClrMapping/>
+  </p:clrMapOvr>
+</p:notes>
+</file>
+
+<file path=ppt/notesSlides/notesSlide48.xml><?xml version="1.0" encoding="utf-8"?>
+<p:notes xmlns:a="http://schemas.openxmlformats.org/drawingml/2006/main" xmlns:p="http://schemas.openxmlformats.org/presentationml/2006/main" xmlns:r="http://schemas.openxmlformats.org/officeDocument/2006/relationships">
+  <p:cSld>
+    <p:spTree>
+      <p:nvGrpSpPr>
+        <p:cNvPr id="1" name=""/>
+        <p:cNvGrpSpPr/>
+        <p:nvPr/>
+      </p:nvGrpSpPr>
+      <p:grpSpPr>
+        <a:xfrm>
+          <a:off x="0" y="0"/>
+          <a:ext cx="0" cy="0"/>
+          <a:chOff x="0" y="0"/>
+          <a:chExt cx="0" cy="0"/>
+        </a:xfrm>
+      </p:grpSpPr>
+      <p:sp>
+        <p:nvSpPr>
+          <p:cNvPr id="2" name="Slide Image Placeholder 1"/>
+          <p:cNvSpPr>
+            <a:spLocks noGrp="1"/>
+          </p:cNvSpPr>
+          <p:nvPr>
+            <p:ph type="sldImg" idx="2"/>
+          </p:nvPr>
+        </p:nvSpPr>
+        <p:spPr/>
+      </p:sp>
+      <p:sp>
+        <p:nvSpPr>
+          <p:cNvPr id="3" name="Notes Placeholder 2"/>
+          <p:cNvSpPr>
+            <a:spLocks noGrp="1"/>
+          </p:cNvSpPr>
+          <p:nvPr>
+            <p:ph type="body" idx="3" sz="quarter"/>
+          </p:nvPr>
+        </p:nvSpPr>
+        <p:spPr/>
+        <p:txBody>
+          <a:bodyPr/>
+          <a:lstStyle/>
+          <a:p>
+            <a:r>
+              <a:t>Token usage for spam detection.</a:t>
+            </a:r>
+          </a:p>
+          <a:p/>
+          <a:p>
+            <a:r>
+              <a:t>Base DistilBERT is very lean at 39 tokens per query. Fine-tuned uses 512 tokens (the full input representation). RAG uses 114 tokens. Hybrid uses 626 tokens.</a:t>
+            </a:r>
+          </a:p>
+          <a:p/>
+          <a:p>
+            <a:r>
+              <a:t>Throughput is impressive across the board: Base at 1,232 tokens/sec, fine-tuned at 2,718, RAG at 3,537, hybrid at 2,819. These are classification models, so throughput is high.</a:t>
+            </a:r>
+          </a:p>
+          <a:p/>
+          <a:p>
+            <a:r>
+              <a:t>Cost: Base is cheapest at $0.0004/1K queries. Fine-tuned is $0.0051. RAG is $0.0011. Hybrid is $0.0063.</a:t>
+            </a:r>
+          </a:p>
+          <a:p/>
+          <a:p>
+            <a:r>
+              <a:t>All approaches are extremely cheap for spam detection — even the most expensive (hybrid) costs less than a penny per thousand queries. At this cost level, accuracy should be the deciding factor, not cost.</a:t>
+            </a:r>
+          </a:p>
+        </p:txBody>
+      </p:sp>
+      <p:sp>
+        <p:nvSpPr>
+          <p:cNvPr id="4" name="Slide Number Placeholder 3"/>
+          <p:cNvSpPr>
+            <a:spLocks noGrp="1"/>
+          </p:cNvSpPr>
+          <p:nvPr>
+            <p:ph type="sldNum" idx="5" sz="quarter"/>
+          </p:nvPr>
+        </p:nvSpPr>
+        <p:spPr/>
+      </p:sp>
+    </p:spTree>
+  </p:cSld>
+  <p:clrMapOvr>
+    <a:masterClrMapping/>
+  </p:clrMapOvr>
+</p:notes>
+</file>
+
+<file path=ppt/notesSlides/notesSlide49.xml><?xml version="1.0" encoding="utf-8"?>
+<p:notes xmlns:a="http://schemas.openxmlformats.org/drawingml/2006/main" xmlns:p="http://schemas.openxmlformats.org/presentationml/2006/main" xmlns:r="http://schemas.openxmlformats.org/officeDocument/2006/relationships">
+  <p:cSld>
+    <p:spTree>
+      <p:nvGrpSpPr>
+        <p:cNvPr id="1" name=""/>
+        <p:cNvGrpSpPr/>
+        <p:nvPr/>
+      </p:nvGrpSpPr>
+      <p:grpSpPr>
+        <a:xfrm>
+          <a:off x="0" y="0"/>
+          <a:ext cx="0" cy="0"/>
+          <a:chOff x="0" y="0"/>
+          <a:chExt cx="0" cy="0"/>
+        </a:xfrm>
+      </p:grpSpPr>
+      <p:sp>
+        <p:nvSpPr>
+          <p:cNvPr id="2" name="Slide Image Placeholder 1"/>
+          <p:cNvSpPr>
+            <a:spLocks noGrp="1"/>
+          </p:cNvSpPr>
+          <p:nvPr>
+            <p:ph type="sldImg" idx="2"/>
+          </p:nvPr>
+        </p:nvSpPr>
+        <p:spPr/>
+      </p:sp>
+      <p:sp>
+        <p:nvSpPr>
+          <p:cNvPr id="3" name="Notes Placeholder 2"/>
+          <p:cNvSpPr>
+            <a:spLocks noGrp="1"/>
+          </p:cNvSpPr>
+          <p:nvPr>
+            <p:ph type="body" idx="3" sz="quarter"/>
+          </p:nvPr>
+        </p:nvSpPr>
+        <p:spPr/>
+        <p:txBody>
+          <a:bodyPr/>
+          <a:lstStyle/>
+          <a:p>
+            <a:r>
+              <a:t>Quality metrics for spam detection.</a:t>
+            </a:r>
+          </a:p>
+          <a:p/>
+          <a:p>
+            <a:r>
+              <a:t>F1 Score: Fine-tuned achieves 0.950 vs Base at 0.849. RAG lands at 0.899.</a:t>
+            </a:r>
+          </a:p>
+          <a:p/>
+          <a:p>
+            <a:r>
+              <a:t>Both precision and recall are high for the fine-tuned model — 0.955 precision and 0.950 recall. This means very few false positives (legitimate emails marked as spam) AND very few false negatives (spam getting through).</a:t>
+            </a:r>
+          </a:p>
+          <a:p/>
+          <a:p>
+            <a:r>
+              <a:t>The F1 scores are balanced across classes: ham F1 = 0.947, spam F1 = 0.952. The model is equally good at identifying both legitimate and spam emails.</a:t>
+            </a:r>
+          </a:p>
+          <a:p/>
+          <a:p>
+            <a:r>
+              <a:t>This balanced performance is exactly what you want in production email filtering.</a:t>
+            </a:r>
+          </a:p>
+        </p:txBody>
+      </p:sp>
+      <p:sp>
+        <p:nvSpPr>
+          <p:cNvPr id="4" name="Slide Number Placeholder 3"/>
+          <p:cNvSpPr>
+            <a:spLocks noGrp="1"/>
+          </p:cNvSpPr>
+          <p:nvPr>
+            <p:ph type="sldNum" idx="5" sz="quarter"/>
+          </p:nvPr>
+        </p:nvSpPr>
+        <p:spPr/>
+      </p:sp>
+    </p:spTree>
+  </p:cSld>
+  <p:clrMapOvr>
+    <a:masterClrMapping/>
+  </p:clrMapOvr>
+</p:notes>
+</file>
+
+<file path=ppt/notesSlides/notesSlide5.xml><?xml version="1.0" encoding="utf-8"?>
+<p:notes xmlns:a="http://schemas.openxmlformats.org/drawingml/2006/main" xmlns:p="http://schemas.openxmlformats.org/presentationml/2006/main" xmlns:r="http://schemas.openxmlformats.org/officeDocument/2006/relationships">
+  <p:cSld>
+    <p:spTree>
+      <p:nvGrpSpPr>
+        <p:cNvPr id="1" name=""/>
+        <p:cNvGrpSpPr/>
+        <p:nvPr/>
+      </p:nvGrpSpPr>
+      <p:grpSpPr>
+        <a:xfrm>
+          <a:off x="0" y="0"/>
+          <a:ext cx="0" cy="0"/>
+          <a:chOff x="0" y="0"/>
+          <a:chExt cx="0" cy="0"/>
+        </a:xfrm>
+      </p:grpSpPr>
+      <p:sp>
+        <p:nvSpPr>
+          <p:cNvPr id="2" name="Slide Image Placeholder 1"/>
+          <p:cNvSpPr>
+            <a:spLocks noGrp="1"/>
+          </p:cNvSpPr>
+          <p:nvPr>
+            <p:ph type="sldImg" idx="2"/>
+          </p:nvPr>
+        </p:nvSpPr>
+        <p:spPr/>
+      </p:sp>
+      <p:sp>
+        <p:nvSpPr>
+          <p:cNvPr id="3" name="Notes Placeholder 2"/>
+          <p:cNvSpPr>
+            <a:spLocks noGrp="1"/>
+          </p:cNvSpPr>
+          <p:nvPr>
+            <p:ph type="body" idx="3" sz="quarter"/>
+          </p:nvPr>
+        </p:nvSpPr>
+        <p:spPr/>
+        <p:txBody>
+          <a:bodyPr/>
+          <a:lstStyle/>
+          <a:p>
+            <a:r>
+              <a:t>There's a spectrum of approaches to specialization, from lightweight to heavyweight.</a:t>
+            </a:r>
+          </a:p>
+          <a:p/>
+          <a:p>
+            <a:r>
+              <a:t>Prompt Engineering is the simplest — write better instructions, add few-shot examples, use system prompts. Low effort, but limited impact.</a:t>
+            </a:r>
+          </a:p>
+          <a:p/>
+          <a:p>
+            <a:r>
+              <a:t>RAG sits in the middle — retrieve relevant documents at query time, augment the prompt with that context. Medium effort and medium impact.</a:t>
+            </a:r>
+          </a:p>
+          <a:p/>
+          <a:p>
+            <a:r>
+              <a:t>Fine-Tuning is the heavyweight — train the model on domain-specific data so the weights themselves encode new capabilities. Higher effort, but highest impact.</a:t>
+            </a:r>
+          </a:p>
+          <a:p/>
+          <a:p>
+            <a:r>
+              <a:t>Beyond these is training from scratch, which is typically only done by major labs. For most organizations, the practical choice is between these three approaches.</a:t>
+            </a:r>
+          </a:p>
+        </p:txBody>
+      </p:sp>
+      <p:sp>
+        <p:nvSpPr>
+          <p:cNvPr id="4" name="Slide Number Placeholder 3"/>
+          <p:cNvSpPr>
+            <a:spLocks noGrp="1"/>
+          </p:cNvSpPr>
+          <p:nvPr>
+            <p:ph type="sldNum" idx="5" sz="quarter"/>
+          </p:nvPr>
+        </p:nvSpPr>
+        <p:spPr/>
+      </p:sp>
+    </p:spTree>
+  </p:cSld>
+  <p:clrMapOvr>
+    <a:masterClrMapping/>
+  </p:clrMapOvr>
+</p:notes>
+</file>
+
+<file path=ppt/notesSlides/notesSlide50.xml><?xml version="1.0" encoding="utf-8"?>
+<p:notes xmlns:a="http://schemas.openxmlformats.org/drawingml/2006/main" xmlns:p="http://schemas.openxmlformats.org/presentationml/2006/main" xmlns:r="http://schemas.openxmlformats.org/officeDocument/2006/relationships">
+  <p:cSld>
+    <p:spTree>
+      <p:nvGrpSpPr>
+        <p:cNvPr id="1" name=""/>
+        <p:cNvGrpSpPr/>
+        <p:nvPr/>
+      </p:nvGrpSpPr>
+      <p:grpSpPr>
+        <a:xfrm>
+          <a:off x="0" y="0"/>
+          <a:ext cx="0" cy="0"/>
+          <a:chOff x="0" y="0"/>
+          <a:chExt cx="0" cy="0"/>
+        </a:xfrm>
+      </p:grpSpPr>
+      <p:sp>
+        <p:nvSpPr>
+          <p:cNvPr id="2" name="Slide Image Placeholder 1"/>
+          <p:cNvSpPr>
+            <a:spLocks noGrp="1"/>
+          </p:cNvSpPr>
+          <p:nvPr>
+            <p:ph type="sldImg" idx="2"/>
+          </p:nvPr>
+        </p:nvSpPr>
+        <p:spPr/>
+      </p:sp>
+      <p:sp>
+        <p:nvSpPr>
+          <p:cNvPr id="3" name="Notes Placeholder 2"/>
+          <p:cNvSpPr>
+            <a:spLocks noGrp="1"/>
+          </p:cNvSpPr>
+          <p:nvPr>
+            <p:ph type="body" idx="3" sz="quarter"/>
+          </p:nvPr>
+        </p:nvSpPr>
+        <p:spPr/>
+        <p:txBody>
+          <a:bodyPr/>
+          <a:lstStyle/>
+          <a:p>
+            <a:r>
+              <a:t>Confidence scores for spam detection.</a:t>
+            </a:r>
+          </a:p>
+          <a:p/>
+          <a:p>
+            <a:r>
+              <a:t>Fine-tuned model averages 0.963 confidence vs Base at 0.539.</a:t>
+            </a:r>
+          </a:p>
+          <a:p/>
+          <a:p>
+            <a:r>
+              <a:t>This is a massive gap. The fine-tuned model is not just more accurate — it's dramatically more confident in its predictions. At 0.963 average confidence, you can set a high confidence threshold for automated filtering and still process most emails automatically.</a:t>
+            </a:r>
+          </a:p>
+          <a:p/>
+          <a:p>
+            <a:r>
+              <a:t>Base DistilBERT's 0.539 average confidence means it's essentially uncertain about many classifications, requiring more human review.</a:t>
+            </a:r>
+          </a:p>
+          <a:p/>
+          <a:p>
+            <a:r>
+              <a:t>In production spam filtering, this confidence gap translates directly to fewer emails needing manual review.</a:t>
+            </a:r>
+          </a:p>
+        </p:txBody>
+      </p:sp>
+      <p:sp>
+        <p:nvSpPr>
+          <p:cNvPr id="4" name="Slide Number Placeholder 3"/>
+          <p:cNvSpPr>
+            <a:spLocks noGrp="1"/>
+          </p:cNvSpPr>
+          <p:nvPr>
+            <p:ph type="sldNum" idx="5" sz="quarter"/>
+          </p:nvPr>
+        </p:nvSpPr>
+        <p:spPr/>
+      </p:sp>
+    </p:spTree>
+  </p:cSld>
+  <p:clrMapOvr>
+    <a:masterClrMapping/>
+  </p:clrMapOvr>
+</p:notes>
+</file>
+
+<file path=ppt/notesSlides/notesSlide51.xml><?xml version="1.0" encoding="utf-8"?>
+<p:notes xmlns:a="http://schemas.openxmlformats.org/drawingml/2006/main" xmlns:p="http://schemas.openxmlformats.org/presentationml/2006/main" xmlns:r="http://schemas.openxmlformats.org/officeDocument/2006/relationships">
+  <p:cSld>
+    <p:spTree>
+      <p:nvGrpSpPr>
+        <p:cNvPr id="1" name=""/>
+        <p:cNvGrpSpPr/>
+        <p:nvPr/>
+      </p:nvGrpSpPr>
+      <p:grpSpPr>
+        <a:xfrm>
+          <a:off x="0" y="0"/>
+          <a:ext cx="0" cy="0"/>
+          <a:chOff x="0" y="0"/>
+          <a:chExt cx="0" cy="0"/>
+        </a:xfrm>
+      </p:grpSpPr>
+      <p:sp>
+        <p:nvSpPr>
+          <p:cNvPr id="2" name="Slide Image Placeholder 1"/>
+          <p:cNvSpPr>
+            <a:spLocks noGrp="1"/>
+          </p:cNvSpPr>
+          <p:nvPr>
+            <p:ph type="sldImg" idx="2"/>
+          </p:nvPr>
+        </p:nvSpPr>
+        <p:spPr/>
+      </p:sp>
+      <p:sp>
+        <p:nvSpPr>
+          <p:cNvPr id="3" name="Notes Placeholder 2"/>
+          <p:cNvSpPr>
+            <a:spLocks noGrp="1"/>
+          </p:cNvSpPr>
+          <p:nvPr>
+            <p:ph type="body" idx="3" sz="quarter"/>
+          </p:nvPr>
+        </p:nvSpPr>
+        <p:spPr/>
+        <p:txBody>
+          <a:bodyPr/>
+          <a:lstStyle/>
+          <a:p>
+            <a:r>
+              <a:t>Category breakdown for spam detection.</a:t>
+            </a:r>
+          </a:p>
+          <a:p/>
+          <a:p>
+            <a:r>
+              <a:t>Business emails (6 cases): fine-tuned gets 100%, Base gets 83.3%. RAG also gets 100%.</a:t>
+            </a:r>
+          </a:p>
+          <a:p/>
+          <a:p>
+            <a:r>
+              <a:t>Newsletter (1 case): everyone gets 100%.</a:t>
+            </a:r>
+          </a:p>
+          <a:p/>
+          <a:p>
+            <a:r>
+              <a:t>Notification (3 cases): this is the hard category. Fine-tuned and hybrid get 66.7%. RAG gets only 33.3%. Base also gets 66.7%. Notifications that look like spam are challenging.</a:t>
+            </a:r>
+          </a:p>
+          <a:p/>
+          <a:p>
+            <a:r>
+              <a:t>Obvious Spam (5 cases): everyone gets 100%. Easy cases are easy.</a:t>
+            </a:r>
+          </a:p>
+          <a:p/>
+          <a:p>
+            <a:r>
+              <a:t>Phishing (4 cases): fine-tuned, RAG, and hybrid all get 100%. Base drops to 75%.</a:t>
+            </a:r>
+          </a:p>
+          <a:p/>
+          <a:p>
+            <a:r>
+              <a:t>Scam (1 case): everyone gets 100%.</a:t>
+            </a:r>
+          </a:p>
+          <a:p/>
+          <a:p>
+            <a:r>
+              <a:t>Fine-tuning's biggest advantage is on phishing — it learned the patterns that distinguish genuine phishing from legitimate transactional emails.</a:t>
+            </a:r>
+          </a:p>
+        </p:txBody>
+      </p:sp>
+      <p:sp>
+        <p:nvSpPr>
+          <p:cNvPr id="4" name="Slide Number Placeholder 3"/>
+          <p:cNvSpPr>
+            <a:spLocks noGrp="1"/>
+          </p:cNvSpPr>
+          <p:nvPr>
+            <p:ph type="sldNum" idx="5" sz="quarter"/>
+          </p:nvPr>
+        </p:nvSpPr>
+        <p:spPr/>
+      </p:sp>
+    </p:spTree>
+  </p:cSld>
+  <p:clrMapOvr>
+    <a:masterClrMapping/>
+  </p:clrMapOvr>
+</p:notes>
+</file>
+
+<file path=ppt/notesSlides/notesSlide52.xml><?xml version="1.0" encoding="utf-8"?>
+<p:notes xmlns:a="http://schemas.openxmlformats.org/drawingml/2006/main" xmlns:p="http://schemas.openxmlformats.org/presentationml/2006/main" xmlns:r="http://schemas.openxmlformats.org/officeDocument/2006/relationships">
+  <p:cSld>
+    <p:spTree>
+      <p:nvGrpSpPr>
+        <p:cNvPr id="1" name=""/>
+        <p:cNvGrpSpPr/>
+        <p:nvPr/>
+      </p:nvGrpSpPr>
+      <p:grpSpPr>
+        <a:xfrm>
+          <a:off x="0" y="0"/>
+          <a:ext cx="0" cy="0"/>
+          <a:chOff x="0" y="0"/>
+          <a:chExt cx="0" cy="0"/>
+        </a:xfrm>
+      </p:grpSpPr>
+      <p:sp>
+        <p:nvSpPr>
+          <p:cNvPr id="2" name="Slide Image Placeholder 1"/>
+          <p:cNvSpPr>
+            <a:spLocks noGrp="1"/>
+          </p:cNvSpPr>
+          <p:nvPr>
+            <p:ph type="sldImg" idx="2"/>
+          </p:nvPr>
+        </p:nvSpPr>
+        <p:spPr/>
+      </p:sp>
+      <p:sp>
+        <p:nvSpPr>
+          <p:cNvPr id="3" name="Notes Placeholder 2"/>
+          <p:cNvSpPr>
+            <a:spLocks noGrp="1"/>
+          </p:cNvSpPr>
+          <p:nvPr>
+            <p:ph type="body" idx="3" sz="quarter"/>
+          </p:nvPr>
+        </p:nvSpPr>
+        <p:spPr/>
+        <p:txBody>
+          <a:bodyPr/>
+          <a:lstStyle/>
+          <a:p>
+            <a:r>
+              <a:t>Per-example detail for spam detection.</a:t>
+            </a:r>
+          </a:p>
+          <a:p/>
+          <a:p>
+            <a:r>
+              <a:t>Example 6 — "Your prescription is ready for pickup at Walgreens": This is the most interesting case. Base correctly identifies it as HAM, but fine-tuned, RAG, and hybrid ALL incorrectly flag it as SPAM. The medication-related vocabulary triggers false positive patterns.</a:t>
+            </a:r>
+          </a:p>
+          <a:p/>
+          <a:p>
+            <a:r>
+              <a:t>Example 10 — "Your Amazon order has shipped": Base and RAG incorrectly flag as SPAM. Fine-tuned and hybrid correctly identify as HAM. The fine-tuned model learned that shipping notifications from major retailers are legitimate.</a:t>
+            </a:r>
+          </a:p>
+          <a:p/>
+          <a:p>
+            <a:r>
+              <a:t>These edge cases show that even 95% accuracy leaves room for improvement. The prescription notification case is a known challenge where fine-tuning on pharmaceutical spam can cause false positives for legitimate pharmacy communications.</a:t>
+            </a:r>
+          </a:p>
+        </p:txBody>
+      </p:sp>
+      <p:sp>
+        <p:nvSpPr>
+          <p:cNvPr id="4" name="Slide Number Placeholder 3"/>
+          <p:cNvSpPr>
+            <a:spLocks noGrp="1"/>
+          </p:cNvSpPr>
+          <p:nvPr>
+            <p:ph type="sldNum" idx="5" sz="quarter"/>
+          </p:nvPr>
+        </p:nvSpPr>
+        <p:spPr/>
+      </p:sp>
+    </p:spTree>
+  </p:cSld>
+  <p:clrMapOvr>
+    <a:masterClrMapping/>
+  </p:clrMapOvr>
+</p:notes>
+</file>
+
+<file path=ppt/notesSlides/notesSlide53.xml><?xml version="1.0" encoding="utf-8"?>
+<p:notes xmlns:a="http://schemas.openxmlformats.org/drawingml/2006/main" xmlns:p="http://schemas.openxmlformats.org/presentationml/2006/main" xmlns:r="http://schemas.openxmlformats.org/officeDocument/2006/relationships">
+  <p:cSld>
+    <p:spTree>
+      <p:nvGrpSpPr>
+        <p:cNvPr id="1" name=""/>
+        <p:cNvGrpSpPr/>
+        <p:nvPr/>
+      </p:nvGrpSpPr>
+      <p:grpSpPr>
+        <a:xfrm>
+          <a:off x="0" y="0"/>
+          <a:ext cx="0" cy="0"/>
+          <a:chOff x="0" y="0"/>
+          <a:chExt cx="0" cy="0"/>
+        </a:xfrm>
+      </p:grpSpPr>
+      <p:sp>
+        <p:nvSpPr>
+          <p:cNvPr id="2" name="Slide Image Placeholder 1"/>
+          <p:cNvSpPr>
+            <a:spLocks noGrp="1"/>
+          </p:cNvSpPr>
+          <p:nvPr>
+            <p:ph type="sldImg" idx="2"/>
+          </p:nvPr>
+        </p:nvSpPr>
+        <p:spPr/>
+      </p:sp>
+      <p:sp>
+        <p:nvSpPr>
+          <p:cNvPr id="3" name="Notes Placeholder 2"/>
+          <p:cNvSpPr>
+            <a:spLocks noGrp="1"/>
+          </p:cNvSpPr>
+          <p:nvPr>
+            <p:ph type="body" idx="3" sz="quarter"/>
+          </p:nvPr>
+        </p:nvSpPr>
+        <p:spPr/>
+        <p:txBody>
+          <a:bodyPr/>
+          <a:lstStyle/>
+          <a:p>
+            <a:r>
+              <a:t>This is the synthesis slide — what all four experiments tell us together.</a:t>
+            </a:r>
+          </a:p>
+          <a:p/>
+          <a:p>
+            <a:r>
+              <a:t>Accuracy insights: Fine-tuning wins on sentiment (70% vs 45% base), financial ratios (37.5% vs 25% base), and spam detection (95% vs 85% base). Domain jargon is the clearest win — 100% vs 33.3%.</a:t>
+            </a:r>
+          </a:p>
+          <a:p/>
+          <a:p>
+            <a:r>
+              <a:t>For numerical reasoning, all approaches tie at 20%, but FinQA-7B has the lowest MAPE — its answers are closest to correct even when they don't exactly match.</a:t>
+            </a:r>
+          </a:p>
+          <a:p/>
+          <a:p>
+            <a:r>
+              <a:t>Pattern: Fine-tuning excels at tasks requiring REASONING, COMPUTATION, and PATTERN RECOGNITION. RAG helps most when FRESH INFORMATION is the bottleneck, not skill.</a:t>
+            </a:r>
+          </a:p>
+          <a:p/>
+          <a:p>
+            <a:r>
+              <a:t>Efficiency: Fine-tuned models are 2-4x faster (no retrieval), use 3-5x fewer tokens, and are cheaper per query at scale.</a:t>
+            </a:r>
+          </a:p>
+          <a:p/>
+          <a:p>
+            <a:r>
+              <a:t>Hybrid consistently achieves the highest or equal-best accuracy across ALL experiments.</a:t>
+            </a:r>
+          </a:p>
+        </p:txBody>
+      </p:sp>
+      <p:sp>
+        <p:nvSpPr>
+          <p:cNvPr id="4" name="Slide Number Placeholder 3"/>
+          <p:cNvSpPr>
+            <a:spLocks noGrp="1"/>
+          </p:cNvSpPr>
+          <p:nvPr>
+            <p:ph type="sldNum" idx="5" sz="quarter"/>
+          </p:nvPr>
+        </p:nvSpPr>
+        <p:spPr/>
+      </p:sp>
+    </p:spTree>
+  </p:cSld>
+  <p:clrMapOvr>
+    <a:masterClrMapping/>
+  </p:clrMapOvr>
+</p:notes>
+</file>
+
+<file path=ppt/notesSlides/notesSlide54.xml><?xml version="1.0" encoding="utf-8"?>
+<p:notes xmlns:a="http://schemas.openxmlformats.org/drawingml/2006/main" xmlns:p="http://schemas.openxmlformats.org/presentationml/2006/main" xmlns:r="http://schemas.openxmlformats.org/officeDocument/2006/relationships">
+  <p:cSld>
+    <p:spTree>
+      <p:nvGrpSpPr>
+        <p:cNvPr id="1" name=""/>
+        <p:cNvGrpSpPr/>
+        <p:nvPr/>
+      </p:nvGrpSpPr>
+      <p:grpSpPr>
+        <a:xfrm>
+          <a:off x="0" y="0"/>
+          <a:ext cx="0" cy="0"/>
+          <a:chOff x="0" y="0"/>
+          <a:chExt cx="0" cy="0"/>
+        </a:xfrm>
+      </p:grpSpPr>
+      <p:sp>
+        <p:nvSpPr>
+          <p:cNvPr id="2" name="Slide Image Placeholder 1"/>
+          <p:cNvSpPr>
+            <a:spLocks noGrp="1"/>
+          </p:cNvSpPr>
+          <p:nvPr>
+            <p:ph type="sldImg" idx="2"/>
+          </p:nvPr>
+        </p:nvSpPr>
+        <p:spPr/>
+      </p:sp>
+      <p:sp>
+        <p:nvSpPr>
+          <p:cNvPr id="3" name="Notes Placeholder 2"/>
+          <p:cNvSpPr>
+            <a:spLocks noGrp="1"/>
+          </p:cNvSpPr>
+          <p:nvPr>
+            <p:ph type="body" idx="3" sz="quarter"/>
+          </p:nvPr>
+        </p:nvSpPr>
+        <p:spPr/>
+        <p:txBody>
+          <a:bodyPr/>
+          <a:lstStyle/>
+          <a:p>
+            <a:r>
+              <a:t>Let me highlight the most striking examples where each approach wins.</a:t>
+            </a:r>
+          </a:p>
+          <a:p/>
+          <a:p>
+            <a:r>
+              <a:t>Fine-tuning wins on domain jargon: "headwinds" correctly identified as negative, "margin compression" understood as a domain-specific negative term, and "declining cost-to-income ratio" understood as POSITIVE (counterintuitive — a declining ratio means improving efficiency).</a:t>
+            </a:r>
+          </a:p>
+          <a:p/>
+          <a:p>
+            <a:r>
+              <a:t>RAG wins on factual queries: "What is Meridian National Bancorp's CET1 capital ratio?" — this requires specific factual knowledge not in any model's weights. "What drove the decline in investment banking revenue?" — the answer is in a specific document.</a:t>
+            </a:r>
+          </a:p>
+          <a:p/>
+          <a:p>
+            <a:r>
+              <a:t>Hybrid wins when you need both: "Calculate year-over-year operating efficiency improvement" — this needs retrieval to get the actual numbers AND computation skills to calculate the trend. Neither approach alone is sufficient.</a:t>
+            </a:r>
+          </a:p>
+        </p:txBody>
+      </p:sp>
+      <p:sp>
+        <p:nvSpPr>
+          <p:cNvPr id="4" name="Slide Number Placeholder 3"/>
+          <p:cNvSpPr>
+            <a:spLocks noGrp="1"/>
+          </p:cNvSpPr>
+          <p:nvPr>
+            <p:ph type="sldNum" idx="5" sz="quarter"/>
+          </p:nvPr>
+        </p:nvSpPr>
+        <p:spPr/>
+      </p:sp>
+    </p:spTree>
+  </p:cSld>
+  <p:clrMapOvr>
+    <a:masterClrMapping/>
+  </p:clrMapOvr>
+</p:notes>
+</file>
+
+<file path=ppt/notesSlides/notesSlide55.xml><?xml version="1.0" encoding="utf-8"?>
+<p:notes xmlns:a="http://schemas.openxmlformats.org/drawingml/2006/main" xmlns:p="http://schemas.openxmlformats.org/presentationml/2006/main" xmlns:r="http://schemas.openxmlformats.org/officeDocument/2006/relationships">
+  <p:cSld>
+    <p:spTree>
+      <p:nvGrpSpPr>
+        <p:cNvPr id="1" name=""/>
+        <p:cNvGrpSpPr/>
+        <p:nvPr/>
+      </p:nvGrpSpPr>
+      <p:grpSpPr>
+        <a:xfrm>
+          <a:off x="0" y="0"/>
+          <a:ext cx="0" cy="0"/>
+          <a:chOff x="0" y="0"/>
+          <a:chExt cx="0" cy="0"/>
+        </a:xfrm>
+      </p:grpSpPr>
+      <p:sp>
+        <p:nvSpPr>
+          <p:cNvPr id="2" name="Slide Image Placeholder 1"/>
+          <p:cNvSpPr>
+            <a:spLocks noGrp="1"/>
+          </p:cNvSpPr>
+          <p:nvPr>
+            <p:ph type="sldImg" idx="2"/>
+          </p:nvPr>
+        </p:nvSpPr>
+        <p:spPr/>
+      </p:sp>
+      <p:sp>
+        <p:nvSpPr>
+          <p:cNvPr id="3" name="Notes Placeholder 2"/>
+          <p:cNvSpPr>
+            <a:spLocks noGrp="1"/>
+          </p:cNvSpPr>
+          <p:nvPr>
+            <p:ph type="body" idx="3" sz="quarter"/>
+          </p:nvPr>
+        </p:nvSpPr>
+        <p:spPr/>
+        <p:txBody>
+          <a:bodyPr/>
+          <a:lstStyle/>
+          <a:p>
+            <a:r>
+              <a:t>Here's the summary of all experiments at a glance.</a:t>
+            </a:r>
+          </a:p>
+          <a:p/>
+          <a:p>
+            <a:r>
+              <a:t>Accuracy table: Fine-tuned wins in 3 of 4 experiments. Sentiment: 70% (FinBERT). Financial Ratios: 37.5% (FinQA-7B). Spam Detection: 95% (fine-tuned). Numerical Reasoning: 20% tie across all approaches.</a:t>
+            </a:r>
+          </a:p>
+          <a:p/>
+          <a:p>
+            <a:r>
+              <a:t>Efficiency table: Fine-tuned models consistently use fewer tokens per query. Sentiment is most dramatic — 16 tokens for fine-tuned vs 76-92 for RAG/hybrid.</a:t>
+            </a:r>
+          </a:p>
+          <a:p/>
+          <a:p>
+            <a:r>
+              <a:t>Cost at scale: Fine-tuning is significantly cheaper per 1K queries in numerical and ratio tasks ($0.06-0.10 vs $0.33-0.36 for RAG).</a:t>
+            </a:r>
+          </a:p>
+          <a:p/>
+          <a:p>
+            <a:r>
+              <a:t>Five key conclusions: Fine-tuning consistently outperforms base models. RAG alone improves over base but can't match fine-tuning for reasoning. Hybrid achieves highest or equal-best accuracy everywhere. Spam detection shows a clear 95% vs 90% advantage for fine-tuning. And critically — all comparisons use the SAME architecture, so the approach is the only variable.</a:t>
+            </a:r>
+          </a:p>
+        </p:txBody>
+      </p:sp>
+      <p:sp>
+        <p:nvSpPr>
+          <p:cNvPr id="4" name="Slide Number Placeholder 3"/>
+          <p:cNvSpPr>
+            <a:spLocks noGrp="1"/>
+          </p:cNvSpPr>
+          <p:nvPr>
+            <p:ph type="sldNum" idx="5" sz="quarter"/>
+          </p:nvPr>
+        </p:nvSpPr>
+        <p:spPr/>
+      </p:sp>
+    </p:spTree>
+  </p:cSld>
+  <p:clrMapOvr>
+    <a:masterClrMapping/>
+  </p:clrMapOvr>
+</p:notes>
+</file>
+
+<file path=ppt/notesSlides/notesSlide56.xml><?xml version="1.0" encoding="utf-8"?>
+<p:notes xmlns:a="http://schemas.openxmlformats.org/drawingml/2006/main" xmlns:p="http://schemas.openxmlformats.org/presentationml/2006/main" xmlns:r="http://schemas.openxmlformats.org/officeDocument/2006/relationships">
+  <p:cSld>
+    <p:spTree>
+      <p:nvGrpSpPr>
+        <p:cNvPr id="1" name=""/>
+        <p:cNvGrpSpPr/>
+        <p:nvPr/>
+      </p:nvGrpSpPr>
+      <p:grpSpPr>
+        <a:xfrm>
+          <a:off x="0" y="0"/>
+          <a:ext cx="0" cy="0"/>
+          <a:chOff x="0" y="0"/>
+          <a:chExt cx="0" cy="0"/>
+        </a:xfrm>
+      </p:grpSpPr>
+      <p:sp>
+        <p:nvSpPr>
+          <p:cNvPr id="2" name="Slide Image Placeholder 1"/>
+          <p:cNvSpPr>
+            <a:spLocks noGrp="1"/>
+          </p:cNvSpPr>
+          <p:nvPr>
+            <p:ph type="sldImg" idx="2"/>
+          </p:nvPr>
+        </p:nvSpPr>
+        <p:spPr/>
+      </p:sp>
+      <p:sp>
+        <p:nvSpPr>
+          <p:cNvPr id="3" name="Notes Placeholder 2"/>
+          <p:cNvSpPr>
+            <a:spLocks noGrp="1"/>
+          </p:cNvSpPr>
+          <p:nvPr>
+            <p:ph type="body" idx="3" sz="quarter"/>
+          </p:nvPr>
+        </p:nvSpPr>
+        <p:spPr/>
+        <p:txBody>
+          <a:bodyPr/>
+          <a:lstStyle/>
+          <a:p>
+            <a:r>
+              <a:t>Thank you for your attention. The core message to take away:</a:t>
+            </a:r>
+          </a:p>
+          <a:p/>
+          <a:p>
+            <a:r>
+              <a:t>"Fine-tuning teaches SKILLS. RAG provides INFORMATION. The best systems combine both."</a:t>
+            </a:r>
+          </a:p>
+          <a:p/>
+          <a:p>
+            <a:r>
+              <a:t>I'm happy to take questions and discuss how these approaches might apply to your specific use cases. We can also do a live demo if time permits.</a:t>
+            </a:r>
+          </a:p>
+        </p:txBody>
+      </p:sp>
+      <p:sp>
+        <p:nvSpPr>
+          <p:cNvPr id="4" name="Slide Number Placeholder 3"/>
+          <p:cNvSpPr>
+            <a:spLocks noGrp="1"/>
+          </p:cNvSpPr>
+          <p:nvPr>
+            <p:ph type="sldNum" idx="5" sz="quarter"/>
+          </p:nvPr>
+        </p:nvSpPr>
+        <p:spPr/>
+      </p:sp>
+    </p:spTree>
+  </p:cSld>
+  <p:clrMapOvr>
+    <a:masterClrMapping/>
+  </p:clrMapOvr>
+</p:notes>
+</file>
+
+<file path=ppt/notesSlides/notesSlide6.xml><?xml version="1.0" encoding="utf-8"?>
+<p:notes xmlns:a="http://schemas.openxmlformats.org/drawingml/2006/main" xmlns:p="http://schemas.openxmlformats.org/presentationml/2006/main" xmlns:r="http://schemas.openxmlformats.org/officeDocument/2006/relationships">
+  <p:cSld>
+    <p:spTree>
+      <p:nvGrpSpPr>
+        <p:cNvPr id="1" name=""/>
+        <p:cNvGrpSpPr/>
+        <p:nvPr/>
+      </p:nvGrpSpPr>
+      <p:grpSpPr>
+        <a:xfrm>
+          <a:off x="0" y="0"/>
+          <a:ext cx="0" cy="0"/>
+          <a:chOff x="0" y="0"/>
+          <a:chExt cx="0" cy="0"/>
+        </a:xfrm>
+      </p:grpSpPr>
+      <p:sp>
+        <p:nvSpPr>
+          <p:cNvPr id="2" name="Slide Image Placeholder 1"/>
+          <p:cNvSpPr>
+            <a:spLocks noGrp="1"/>
+          </p:cNvSpPr>
+          <p:nvPr>
+            <p:ph type="sldImg" idx="2"/>
+          </p:nvPr>
+        </p:nvSpPr>
+        <p:spPr/>
+      </p:sp>
+      <p:sp>
+        <p:nvSpPr>
+          <p:cNvPr id="3" name="Notes Placeholder 2"/>
+          <p:cNvSpPr>
+            <a:spLocks noGrp="1"/>
+          </p:cNvSpPr>
+          <p:nvPr>
+            <p:ph type="body" idx="3" sz="quarter"/>
+          </p:nvPr>
+        </p:nvSpPr>
+        <p:spPr/>
+        <p:txBody>
+          <a:bodyPr/>
+          <a:lstStyle/>
+          <a:p>
+            <a:r>
+              <a:t>Let's start with RAG. The diagram shows the basic flow: a user query gets embedded, relevant documents are retrieved from a vector database via similarity search, and those documents are injected into the LLM prompt alongside the question.</a:t>
+            </a:r>
+          </a:p>
+          <a:p/>
+          <a:p>
+            <a:r>
+              <a:t>Three key components: an embedding model to convert text into vectors, a vector database to store and search those embeddings, and an LLM to generate the final answer.</a:t>
+            </a:r>
+          </a:p>
+          <a:p/>
+          <a:p>
+            <a:r>
+              <a:t>The key insight: RAG does NOT train the model. Instead of changing model weights, you show it relevant documents at inference time. The model itself remains unchanged — it's just getting better context.</a:t>
+            </a:r>
+          </a:p>
+        </p:txBody>
+      </p:sp>
+      <p:sp>
+        <p:nvSpPr>
+          <p:cNvPr id="4" name="Slide Number Placeholder 3"/>
+          <p:cNvSpPr>
+            <a:spLocks noGrp="1"/>
+          </p:cNvSpPr>
+          <p:nvPr>
+            <p:ph type="sldNum" idx="5" sz="quarter"/>
+          </p:nvPr>
+        </p:nvSpPr>
+        <p:spPr/>
+      </p:sp>
+    </p:spTree>
+  </p:cSld>
+  <p:clrMapOvr>
+    <a:masterClrMapping/>
+  </p:clrMapOvr>
+</p:notes>
+</file>
+
+<file path=ppt/notesSlides/notesSlide7.xml><?xml version="1.0" encoding="utf-8"?>
+<p:notes xmlns:a="http://schemas.openxmlformats.org/drawingml/2006/main" xmlns:p="http://schemas.openxmlformats.org/presentationml/2006/main" xmlns:r="http://schemas.openxmlformats.org/officeDocument/2006/relationships">
+  <p:cSld>
+    <p:spTree>
+      <p:nvGrpSpPr>
+        <p:cNvPr id="1" name=""/>
+        <p:cNvGrpSpPr/>
+        <p:nvPr/>
+      </p:nvGrpSpPr>
+      <p:grpSpPr>
+        <a:xfrm>
+          <a:off x="0" y="0"/>
+          <a:ext cx="0" cy="0"/>
+          <a:chOff x="0" y="0"/>
+          <a:chExt cx="0" cy="0"/>
+        </a:xfrm>
+      </p:grpSpPr>
+      <p:sp>
+        <p:nvSpPr>
+          <p:cNvPr id="2" name="Slide Image Placeholder 1"/>
+          <p:cNvSpPr>
+            <a:spLocks noGrp="1"/>
+          </p:cNvSpPr>
+          <p:nvPr>
+            <p:ph type="sldImg" idx="2"/>
+          </p:nvPr>
+        </p:nvSpPr>
+        <p:spPr/>
+      </p:sp>
+      <p:sp>
+        <p:nvSpPr>
+          <p:cNvPr id="3" name="Notes Placeholder 2"/>
+          <p:cNvSpPr>
+            <a:spLocks noGrp="1"/>
+          </p:cNvSpPr>
+          <p:nvPr>
+            <p:ph type="body" idx="3" sz="quarter"/>
+          </p:nvPr>
+        </p:nvSpPr>
+        <p:spPr/>
+        <p:txBody>
+          <a:bodyPr/>
+          <a:lstStyle/>
+          <a:p>
+            <a:r>
+              <a:t>RAG has five major benefits:</a:t>
+            </a:r>
+          </a:p>
+          <a:p/>
+          <a:p>
+            <a:r>
+              <a:t>First, no training required — you can start immediately with any LLM. No GPUs, no training data preparation.</a:t>
+            </a:r>
+          </a:p>
+          <a:p/>
+          <a:p>
+            <a:r>
+              <a:t>Second, dynamic knowledge — update your knowledge base anytime without retraining the model.</a:t>
+            </a:r>
+          </a:p>
+          <a:p/>
+          <a:p>
+            <a:r>
+              <a:t>Third, source citations — every answer can reference the exact documents it drew from. This is critical for audit and compliance scenarios.</a:t>
+            </a:r>
+          </a:p>
+          <a:p/>
+          <a:p>
+            <a:r>
+              <a:t>Fourth, it's cost-effective to start — lower upfront investment compared to fine-tuning. Just use existing LLM APIs plus a vector database.</a:t>
+            </a:r>
+          </a:p>
+          <a:p/>
+          <a:p>
+            <a:r>
+              <a:t>Fifth, explainability — users can see which documents were retrieved and why, building trust in the system.</a:t>
+            </a:r>
+          </a:p>
+        </p:txBody>
+      </p:sp>
+      <p:sp>
+        <p:nvSpPr>
+          <p:cNvPr id="4" name="Slide Number Placeholder 3"/>
+          <p:cNvSpPr>
+            <a:spLocks noGrp="1"/>
+          </p:cNvSpPr>
+          <p:nvPr>
+            <p:ph type="sldNum" idx="5" sz="quarter"/>
+          </p:nvPr>
+        </p:nvSpPr>
+        <p:spPr/>
+      </p:sp>
+    </p:spTree>
+  </p:cSld>
+  <p:clrMapOvr>
+    <a:masterClrMapping/>
+  </p:clrMapOvr>
+</p:notes>
+</file>
+
+<file path=ppt/notesSlides/notesSlide8.xml><?xml version="1.0" encoding="utf-8"?>
+<p:notes xmlns:a="http://schemas.openxmlformats.org/drawingml/2006/main" xmlns:p="http://schemas.openxmlformats.org/presentationml/2006/main" xmlns:r="http://schemas.openxmlformats.org/officeDocument/2006/relationships">
+  <p:cSld>
+    <p:spTree>
+      <p:nvGrpSpPr>
+        <p:cNvPr id="1" name=""/>
+        <p:cNvGrpSpPr/>
+        <p:nvPr/>
+      </p:nvGrpSpPr>
+      <p:grpSpPr>
+        <a:xfrm>
+          <a:off x="0" y="0"/>
+          <a:ext cx="0" cy="0"/>
+          <a:chOff x="0" y="0"/>
+          <a:chExt cx="0" cy="0"/>
+        </a:xfrm>
+      </p:grpSpPr>
+      <p:sp>
+        <p:nvSpPr>
+          <p:cNvPr id="2" name="Slide Image Placeholder 1"/>
+          <p:cNvSpPr>
+            <a:spLocks noGrp="1"/>
+          </p:cNvSpPr>
+          <p:nvPr>
+            <p:ph type="sldImg" idx="2"/>
+          </p:nvPr>
+        </p:nvSpPr>
+        <p:spPr/>
+      </p:sp>
+      <p:sp>
+        <p:nvSpPr>
+          <p:cNvPr id="3" name="Notes Placeholder 2"/>
+          <p:cNvSpPr>
+            <a:spLocks noGrp="1"/>
+          </p:cNvSpPr>
+          <p:nvPr>
+            <p:ph type="body" idx="3" sz="quarter"/>
+          </p:nvPr>
+        </p:nvSpPr>
+        <p:spPr/>
+        <p:txBody>
+          <a:bodyPr/>
+          <a:lstStyle/>
+          <a:p>
+            <a:r>
+              <a:t>But RAG has real limitations.</a:t>
+            </a:r>
+          </a:p>
+          <a:p/>
+          <a:p>
+            <a:r>
+              <a:t>It cannot teach new skills — it adds information but doesn't teach new reasoning patterns.</a:t>
+            </a:r>
+          </a:p>
+          <a:p/>
+          <a:p>
+            <a:r>
+              <a:t>It struggles with calculations — retrieving a formula doesn't mean the model can apply it correctly.</a:t>
+            </a:r>
+          </a:p>
+          <a:p/>
+          <a:p>
+            <a:r>
+              <a:t>Output is inconsistent — without trained behavior, format and style vary across responses.</a:t>
+            </a:r>
+          </a:p>
+          <a:p/>
+          <a:p>
+            <a:r>
+              <a:t>There's a retrieval quality bottleneck — answers are only as good as the documents you retrieve.</a:t>
+            </a:r>
+          </a:p>
+          <a:p/>
+          <a:p>
+            <a:r>
+              <a:t>Higher latency — the embedding, retrieval, and generation pipeline is typically 3-5x slower than a fine-tuned model.</a:t>
+            </a:r>
+          </a:p>
+          <a:p/>
+          <a:p>
+            <a:r>
+              <a:t>And context window limits — retrieved documents compete for the same limited context space.</a:t>
+            </a:r>
+          </a:p>
+          <a:p/>
+          <a:p>
+            <a:r>
+              <a:t>Bottom line: RAG is great for knowledge lookup, but insufficient for specialized reasoning, computation, or consistent behavior.</a:t>
+            </a:r>
+          </a:p>
+        </p:txBody>
+      </p:sp>
+      <p:sp>
+        <p:nvSpPr>
+          <p:cNvPr id="4" name="Slide Number Placeholder 3"/>
+          <p:cNvSpPr>
+            <a:spLocks noGrp="1"/>
+          </p:cNvSpPr>
+          <p:nvPr>
+            <p:ph type="sldNum" idx="5" sz="quarter"/>
+          </p:nvPr>
+        </p:nvSpPr>
+        <p:spPr/>
+      </p:sp>
+    </p:spTree>
+  </p:cSld>
+  <p:clrMapOvr>
+    <a:masterClrMapping/>
+  </p:clrMapOvr>
+</p:notes>
+</file>
+
+<file path=ppt/notesSlides/notesSlide9.xml><?xml version="1.0" encoding="utf-8"?>
+<p:notes xmlns:a="http://schemas.openxmlformats.org/drawingml/2006/main" xmlns:p="http://schemas.openxmlformats.org/presentationml/2006/main" xmlns:r="http://schemas.openxmlformats.org/officeDocument/2006/relationships">
+  <p:cSld>
+    <p:spTree>
+      <p:nvGrpSpPr>
+        <p:cNvPr id="1" name=""/>
+        <p:cNvGrpSpPr/>
+        <p:nvPr/>
+      </p:nvGrpSpPr>
+      <p:grpSpPr>
+        <a:xfrm>
+          <a:off x="0" y="0"/>
+          <a:ext cx="0" cy="0"/>
+          <a:chOff x="0" y="0"/>
+          <a:chExt cx="0" cy="0"/>
+        </a:xfrm>
+      </p:grpSpPr>
+      <p:sp>
+        <p:nvSpPr>
+          <p:cNvPr id="2" name="Slide Image Placeholder 1"/>
+          <p:cNvSpPr>
+            <a:spLocks noGrp="1"/>
+          </p:cNvSpPr>
+          <p:nvPr>
+            <p:ph type="sldImg" idx="2"/>
+          </p:nvPr>
+        </p:nvSpPr>
+        <p:spPr/>
+      </p:sp>
+      <p:sp>
+        <p:nvSpPr>
+          <p:cNvPr id="3" name="Notes Placeholder 2"/>
+          <p:cNvSpPr>
+            <a:spLocks noGrp="1"/>
+          </p:cNvSpPr>
+          <p:nvPr>
+            <p:ph type="body" idx="3" sz="quarter"/>
+          </p:nvPr>
+        </p:nvSpPr>
+        <p:spPr/>
+        <p:txBody>
+          <a:bodyPr/>
+          <a:lstStyle/>
+          <a:p>
+            <a:r>
+              <a:t>Fine-tuning takes a fundamentally different approach. Instead of augmenting the prompt with external information, you change the model itself.</a:t>
+            </a:r>
+          </a:p>
+          <a:p/>
+          <a:p>
+            <a:r>
+              <a:t>The diagram shows the contrast: RAG keeps the same model and adds external info at query time. Fine-tuning produces a different model with learned expertise baked into its weights.</a:t>
+            </a:r>
+          </a:p>
+          <a:p/>
+          <a:p>
+            <a:r>
+              <a:t>The crucial distinction: a fine-tuned model doesn't just look up answers — it has learned HOW to reason in a domain-specific way. The knowledge and skills are internalized.</a:t>
+            </a:r>
+          </a:p>
+        </p:txBody>
+      </p:sp>
+      <p:sp>
+        <p:nvSpPr>
+          <p:cNvPr id="4" name="Slide Number Placeholder 3"/>
+          <p:cNvSpPr>
+            <a:spLocks noGrp="1"/>
+          </p:cNvSpPr>
+          <p:nvPr>
+            <p:ph type="sldNum" idx="5" sz="quarter"/>
+          </p:nvPr>
+        </p:nvSpPr>
+        <p:spPr/>
+      </p:sp>
+    </p:spTree>
+  </p:cSld>
+  <p:clrMapOvr>
+    <a:masterClrMapping/>
+  </p:clrMapOvr>
+</p:notes>
+</file>
+
 <file path=ppt/slideLayouts/slideLayout1.xml><?xml version="1.0" encoding="utf-8"?>
 <p:sldLayout xmlns:a="http://schemas.openxmlformats.org/drawingml/2006/main" xmlns:r="http://schemas.openxmlformats.org/officeDocument/2006/relationships" xmlns:p="http://schemas.openxmlformats.org/presentationml/2006/main" type="title" preserve="1">
   <p:cSld name="Title Slide">
@@ -51333,4 +56907,324 @@
   </a:objectDefaults>
   <a:extraClrSchemeLst/>
 </a:theme>
+</file>
+
+<file path=ppt/theme/theme2.xml><?xml version="1.0" encoding="utf-8"?>
+<a:theme xmlns:a="http://schemas.openxmlformats.org/drawingml/2006/main" name="Office Theme">
+  <a:themeElements>
+    <a:clrScheme name="Office">
+      <a:dk1>
+        <a:sysClr val="windowText" lastClr="000000"/>
+      </a:dk1>
+      <a:lt1>
+        <a:sysClr val="window" lastClr="FFFFFF"/>
+      </a:lt1>
+      <a:dk2>
+        <a:srgbClr val="1F497D"/>
+      </a:dk2>
+      <a:lt2>
+        <a:srgbClr val="EEECE1"/>
+      </a:lt2>
+      <a:accent1>
+        <a:srgbClr val="4F81BD"/>
+      </a:accent1>
+      <a:accent2>
+        <a:srgbClr val="C0504D"/>
+      </a:accent2>
+      <a:accent3>
+        <a:srgbClr val="9BBB59"/>
+      </a:accent3>
+      <a:accent4>
+        <a:srgbClr val="8064A2"/>
+      </a:accent4>
+      <a:accent5>
+        <a:srgbClr val="4BACC6"/>
+      </a:accent5>
+      <a:accent6>
+        <a:srgbClr val="F79646"/>
+      </a:accent6>
+      <a:hlink>
+        <a:srgbClr val="0000FF"/>
+      </a:hlink>
+      <a:folHlink>
+        <a:srgbClr val="800080"/>
+      </a:folHlink>
+    </a:clrScheme>
+    <a:fontScheme name="Office">
+      <a:majorFont>
+        <a:latin typeface="Calibri"/>
+        <a:ea typeface=""/>
+        <a:cs typeface=""/>
+        <a:font script="Jpan" typeface="ＭＳ Ｐゴシック"/>
+        <a:font script="Hang" typeface="맑은 고딕"/>
+        <a:font script="Hans" typeface="宋体"/>
+        <a:font script="Hant" typeface="新細明體"/>
+        <a:font script="Arab" typeface="Times New Roman"/>
+        <a:font script="Hebr" typeface="Times New Roman"/>
+        <a:font script="Thai" typeface="Angsana New"/>
+        <a:font script="Ethi" typeface="Nyala"/>
+        <a:font script="Beng" typeface="Vrinda"/>
+        <a:font script="Gujr" typeface="Shruti"/>
+        <a:font script="Khmr" typeface="MoolBoran"/>
+        <a:font script="Knda" typeface="Tunga"/>
+        <a:font script="Guru" typeface="Raavi"/>
+        <a:font script="Cans" typeface="Euphemia"/>
+        <a:font script="Cher" typeface="Plantagenet Cherokee"/>
+        <a:font script="Yiii" typeface="Microsoft Yi Baiti"/>
+        <a:font script="Tibt" typeface="Microsoft Himalaya"/>
+        <a:font script="Thaa" typeface="MV Boli"/>
+        <a:font script="Deva" typeface="Mangal"/>
+        <a:font script="Telu" typeface="Gautami"/>
+        <a:font script="Taml" typeface="Latha"/>
+        <a:font script="Syrc" typeface="Estrangelo Edessa"/>
+        <a:font script="Orya" typeface="Kalinga"/>
+        <a:font script="Mlym" typeface="Kartika"/>
+        <a:font script="Laoo" typeface="DokChampa"/>
+        <a:font script="Sinh" typeface="Iskoola Pota"/>
+        <a:font script="Mong" typeface="Mongolian Baiti"/>
+        <a:font script="Viet" typeface="Times New Roman"/>
+        <a:font script="Uigh" typeface="Microsoft Uighur"/>
+        <a:font script="Geor" typeface="Sylfaen"/>
+      </a:majorFont>
+      <a:minorFont>
+        <a:latin typeface="Calibri"/>
+        <a:ea typeface=""/>
+        <a:cs typeface=""/>
+        <a:font script="Jpan" typeface="ＭＳ Ｐゴシック"/>
+        <a:font script="Hang" typeface="맑은 고딕"/>
+        <a:font script="Hans" typeface="宋体"/>
+        <a:font script="Hant" typeface="新細明體"/>
+        <a:font script="Arab" typeface="Arial"/>
+        <a:font script="Hebr" typeface="Arial"/>
+        <a:font script="Thai" typeface="Cordia New"/>
+        <a:font script="Ethi" typeface="Nyala"/>
+        <a:font script="Beng" typeface="Vrinda"/>
+        <a:font script="Gujr" typeface="Shruti"/>
+        <a:font script="Khmr" typeface="DaunPenh"/>
+        <a:font script="Knda" typeface="Tunga"/>
+        <a:font script="Guru" typeface="Raavi"/>
+        <a:font script="Cans" typeface="Euphemia"/>
+        <a:font script="Cher" typeface="Plantagenet Cherokee"/>
+        <a:font script="Yiii" typeface="Microsoft Yi Baiti"/>
+        <a:font script="Tibt" typeface="Microsoft Himalaya"/>
+        <a:font script="Thaa" typeface="MV Boli"/>
+        <a:font script="Deva" typeface="Mangal"/>
+        <a:font script="Telu" typeface="Gautami"/>
+        <a:font script="Taml" typeface="Latha"/>
+        <a:font script="Syrc" typeface="Estrangelo Edessa"/>
+        <a:font script="Orya" typeface="Kalinga"/>
+        <a:font script="Mlym" typeface="Kartika"/>
+        <a:font script="Laoo" typeface="DokChampa"/>
+        <a:font script="Sinh" typeface="Iskoola Pota"/>
+        <a:font script="Mong" typeface="Mongolian Baiti"/>
+        <a:font script="Viet" typeface="Arial"/>
+        <a:font script="Uigh" typeface="Microsoft Uighur"/>
+        <a:font script="Geor" typeface="Sylfaen"/>
+      </a:minorFont>
+    </a:fontScheme>
+    <a:fmtScheme name="Office">
+      <a:fillStyleLst>
+        <a:solidFill>
+          <a:schemeClr val="phClr"/>
+        </a:solidFill>
+        <a:gradFill rotWithShape="1">
+          <a:gsLst>
+            <a:gs pos="0">
+              <a:schemeClr val="phClr">
+                <a:tint val="50000"/>
+                <a:satMod val="300000"/>
+              </a:schemeClr>
+            </a:gs>
+            <a:gs pos="35000">
+              <a:schemeClr val="phClr">
+                <a:tint val="37000"/>
+                <a:satMod val="300000"/>
+              </a:schemeClr>
+            </a:gs>
+            <a:gs pos="100000">
+              <a:schemeClr val="phClr">
+                <a:tint val="15000"/>
+                <a:satMod val="350000"/>
+              </a:schemeClr>
+            </a:gs>
+          </a:gsLst>
+          <a:lin ang="16200000" scaled="1"/>
+        </a:gradFill>
+        <a:gradFill rotWithShape="1">
+          <a:gsLst>
+            <a:gs pos="0">
+              <a:schemeClr val="phClr">
+                <a:tint val="100000"/>
+                <a:shade val="100000"/>
+                <a:satMod val="130000"/>
+              </a:schemeClr>
+            </a:gs>
+            <a:gs pos="100000">
+              <a:schemeClr val="phClr">
+                <a:tint val="50000"/>
+                <a:shade val="100000"/>
+                <a:satMod val="350000"/>
+              </a:schemeClr>
+            </a:gs>
+          </a:gsLst>
+          <a:lin ang="16200000" scaled="0"/>
+        </a:gradFill>
+      </a:fillStyleLst>
+      <a:lnStyleLst>
+        <a:ln w="9525" cap="flat" cmpd="sng" algn="ctr">
+          <a:solidFill>
+            <a:schemeClr val="phClr">
+              <a:shade val="95000"/>
+              <a:satMod val="105000"/>
+            </a:schemeClr>
+          </a:solidFill>
+          <a:prstDash val="solid"/>
+        </a:ln>
+        <a:ln w="25400" cap="flat" cmpd="sng" algn="ctr">
+          <a:solidFill>
+            <a:schemeClr val="phClr"/>
+          </a:solidFill>
+          <a:prstDash val="solid"/>
+        </a:ln>
+        <a:ln w="38100" cap="flat" cmpd="sng" algn="ctr">
+          <a:solidFill>
+            <a:schemeClr val="phClr"/>
+          </a:solidFill>
+          <a:prstDash val="solid"/>
+        </a:ln>
+      </a:lnStyleLst>
+      <a:effectStyleLst>
+        <a:effectStyle>
+          <a:effectLst>
+            <a:outerShdw blurRad="40000" dist="20000" dir="5400000" rotWithShape="0">
+              <a:srgbClr val="000000">
+                <a:alpha val="38000"/>
+              </a:srgbClr>
+            </a:outerShdw>
+          </a:effectLst>
+        </a:effectStyle>
+        <a:effectStyle>
+          <a:effectLst>
+            <a:outerShdw blurRad="40000" dist="23000" dir="5400000" rotWithShape="0">
+              <a:srgbClr val="000000">
+                <a:alpha val="35000"/>
+              </a:srgbClr>
+            </a:outerShdw>
+          </a:effectLst>
+        </a:effectStyle>
+        <a:effectStyle>
+          <a:effectLst>
+            <a:outerShdw blurRad="40000" dist="23000" dir="5400000" rotWithShape="0">
+              <a:srgbClr val="000000">
+                <a:alpha val="35000"/>
+              </a:srgbClr>
+            </a:outerShdw>
+          </a:effectLst>
+          <a:scene3d>
+            <a:camera prst="orthographicFront">
+              <a:rot lat="0" lon="0" rev="0"/>
+            </a:camera>
+            <a:lightRig rig="threePt" dir="t">
+              <a:rot lat="0" lon="0" rev="1200000"/>
+            </a:lightRig>
+          </a:scene3d>
+          <a:sp3d>
+            <a:bevelT w="63500" h="25400"/>
+          </a:sp3d>
+        </a:effectStyle>
+      </a:effectStyleLst>
+      <a:bgFillStyleLst>
+        <a:solidFill>
+          <a:schemeClr val="phClr"/>
+        </a:solidFill>
+        <a:gradFill rotWithShape="1">
+          <a:gsLst>
+            <a:gs pos="0">
+              <a:schemeClr val="phClr">
+                <a:tint val="40000"/>
+                <a:satMod val="350000"/>
+              </a:schemeClr>
+            </a:gs>
+            <a:gs pos="40000">
+              <a:schemeClr val="phClr">
+                <a:tint val="45000"/>
+                <a:shade val="99000"/>
+                <a:satMod val="350000"/>
+              </a:schemeClr>
+            </a:gs>
+            <a:gs pos="100000">
+              <a:schemeClr val="phClr">
+                <a:shade val="20000"/>
+                <a:satMod val="255000"/>
+              </a:schemeClr>
+            </a:gs>
+          </a:gsLst>
+          <a:path path="circle">
+            <a:fillToRect l="50000" t="-80000" r="50000" b="180000"/>
+          </a:path>
+        </a:gradFill>
+        <a:gradFill rotWithShape="1">
+          <a:gsLst>
+            <a:gs pos="0">
+              <a:schemeClr val="phClr">
+                <a:tint val="80000"/>
+                <a:satMod val="300000"/>
+              </a:schemeClr>
+            </a:gs>
+            <a:gs pos="100000">
+              <a:schemeClr val="phClr">
+                <a:shade val="30000"/>
+                <a:satMod val="200000"/>
+              </a:schemeClr>
+            </a:gs>
+          </a:gsLst>
+          <a:path path="circle">
+            <a:fillToRect l="50000" t="50000" r="50000" b="50000"/>
+          </a:path>
+        </a:gradFill>
+      </a:bgFillStyleLst>
+    </a:fmtScheme>
+  </a:themeElements>
+  <a:objectDefaults>
+    <a:spDef>
+      <a:spPr/>
+      <a:bodyPr/>
+      <a:lstStyle/>
+      <a:style>
+        <a:lnRef idx="1">
+          <a:schemeClr val="accent1"/>
+        </a:lnRef>
+        <a:fillRef idx="3">
+          <a:schemeClr val="accent1"/>
+        </a:fillRef>
+        <a:effectRef idx="2">
+          <a:schemeClr val="accent1"/>
+        </a:effectRef>
+        <a:fontRef idx="minor">
+          <a:schemeClr val="lt1"/>
+        </a:fontRef>
+      </a:style>
+    </a:spDef>
+    <a:lnDef>
+      <a:spPr/>
+      <a:bodyPr/>
+      <a:lstStyle/>
+      <a:style>
+        <a:lnRef idx="2">
+          <a:schemeClr val="accent1"/>
+        </a:lnRef>
+        <a:fillRef idx="0">
+          <a:schemeClr val="accent1"/>
+        </a:fillRef>
+        <a:effectRef idx="1">
+          <a:schemeClr val="accent1"/>
+        </a:effectRef>
+        <a:fontRef idx="minor">
+          <a:schemeClr val="tx1"/>
+        </a:fontRef>
+      </a:style>
+    </a:lnDef>
+  </a:objectDefaults>
+  <a:extraClrSchemeLst/>
+</a:theme>
 </file>